--- a/deliverables/立项答辩.pptx
+++ b/deliverables/立项答辩.pptx
@@ -360,7 +360,7 @@
             <a:pPr/>
             <a:r>
               <a:rPr lang="zh-CN" dirty="0"/>
-              <a:t>本项目研究轮灌操作变化和水力异常可能混淆，以及短时告警在无线链路中可能丢失的问题。我们拟完成建模与异常感知、可靠事件通信、系统集成与分层验证三个工作包，实施期为二〇二七年三月至二〇二八年二月。前期已经完成的是文献、模型和合成回放，还没有实物或田间实验。</a:t>
+              <a:t>本次采用老师提出的题目，研究对象保持在滴灌支管，但交付扩大为感知、有限诊断、可靠告警和管理确认的一套原型系统。周期为二〇二七年三月至二〇二八年二月。当前已有的是文献、模型与程序，没有实物和田间实验。</a:t>
             </a:r>
           </a:p>
         </p:txBody>
@@ -420,7 +420,7 @@
             <a:pPr/>
             <a:r>
               <a:rPr lang="zh-CN" dirty="0"/>
-              <a:t>实验先从参考标定、五类核心工况和独立操作标签开始，每个核心条件计划至少三次独立重复。方法参数由小试确定，验证按天或批次留出，避免相邻序列混入训练与测试。无线实验分别记录故障到本地发现、本地告警到远端收到两段延迟，并测量完整供电边界。计划至少八小时连续台架记录。真实现场必须取得许可，只有正常运行数据时不报告田间故障准确率。数量和时长是计划指标，提交前由导师核对资源。</a:t>
+              <a:t>实验首先校核两传感器差压误差与故障信号的关系，再做两类型、三供压、三程度和三个独立操作的主要网格，预计五十四次，正常及切换另做。参数在预实验确定，按独立日或批次测试，保留强基线和消融。随后测真实无线与整机能量，并进行八小时连续台架和掉电恢复。这里的数量都是计划，提交前需要导师核对。</a:t>
             </a:r>
           </a:p>
         </p:txBody>
@@ -480,7 +480,7 @@
             <a:pPr/>
             <a:r>
               <a:rPr lang="zh-CN" dirty="0"/>
-              <a:t>三四月先解决标定和可观测性，五到八月完成主要台架、真实LoRa和整机测量，九十月冻结方法并形成论文稿，余下时间补关键实验和结项材料。二千元是启动额度估算，不是采购报价，假设已有电脑并能借参考压力和电流测量仪器。获得资助后优先扩展实验条件和独立批次，第二节点或现场试验按资源落实。论文费用不包含在当前启动预算内。</a:t>
+              <a:t>三四月解决测量门槛，五六月完成主要水路实验，七八月实现无线和管理系统，九十月独立验证与论文稿，之后补实验并结项。两千元是启动额度估算，已调整为双压力配置，前提是已有电脑并可借参考仪器。没有资源证据时不保证该预算足够，论文费用另行核查。</a:t>
             </a:r>
           </a:p>
         </p:txBody>
@@ -540,7 +540,7 @@
             <a:pPr/>
             <a:r>
               <a:rPr lang="zh-CN" dirty="0"/>
-              <a:t>本项目拟交付一个监测节点、一个接收端、一套双支路台架，以及带标定和标签的数据、检测与通信对照、复现程序和回放软件。调研与研究报告、过程记录和论文稿共同组成成果体系。我们按争取国家级的目标组织研究深度，但立项仍取决于评审和条件，不能以页面数量保证。结项以任务书和系统研究成果为依据，论文从证据充分的问题中提炼贡献，已有工作和未来目标分别陈述。</a:t>
+              <a:t>交付包括一个双压力流量节点、接收端、台架和管理软件，还包含标定标签、对照、提前量及失败案例等研究证据，以及报告、过程记录和论文稿。按争取较高级别立项组织完整任务，但级别由评审决定。论文录用与收录不作为保证，更不能把计划成果写成已有成果。</a:t>
             </a:r>
           </a:p>
         </p:txBody>
@@ -600,7 +600,7 @@
             <a:pPr/>
             <a:r>
               <a:rPr lang="zh-CN" dirty="0"/>
-              <a:t>单测点存在结构性歧义：在本模型中，可以构造上游节流与供压下降，使测点压力和流量相同。因此主要输出应是异常及建议检查，原因分类仅在有证据的条件下开展。共同阻力为零的反例又说明正常切换对测点的影响依赖实际水路。是否可行最终取决于可观测信号、标定质量和独立重复，而不是图形看起来像工程系统。</a:t>
+              <a:t>旧单点模型给出供压下降与受限相同观测的反例，新增入口压力只能有条件改善这类歧义，定位仍只到布置的支管区段。未知正常负载增大与等效泄漏在当前模型中同形，无法只靠复杂算法辨因，因此输出需要保留待检查和数据无效，不能声称单滴头通用早期诊断。</a:t>
             </a:r>
           </a:p>
         </p:txBody>
@@ -660,7 +660,7 @@
             <a:pPr/>
             <a:r>
               <a:rPr lang="zh-CN" dirty="0"/>
-              <a:t>申报阶段交付的是有证据的前期分析和可执行任务体系，现阶段不需要把所有研究结果提前做完。大创结项需要拿出系统、独立实测、对照研究和过程材料。论文则要选择一个有证据的主问题，优先考察可靠告警约束下的通信取舍。若新检测没有超过强基线，就不强行包装算法创新；只有接线和界面展示，也不足以支撑高水平方法论文。</a:t>
+              <a:t>申报需要完整模板、任务、证据和资源计划；大创需要实物系统、独立实测和过程；论文只从项目提炼一个贡献。现在优先研究渐进故障辨识边界，如果没有增量，可靠通信可作为另一个候选方向。两条方向均需要真实数据与强基线，不保证发表或推免认定。</a:t>
             </a:r>
           </a:p>
         </p:txBody>
@@ -720,7 +720,7 @@
             <a:pPr/>
             <a:r>
               <a:rPr lang="zh-CN" dirty="0"/>
-              <a:t>学校实施细则和二〇二六申报通知用于理解项目与验收流程，本批要求下发后还要核对。主要技术依据包括堵塞检测综述、HydroNeuro、灌溉模拟平台和两项事件通信研究。所有模型结果均有本地程序和JSON或CSV记录，网站提供查看入口。这里列出的论文证明已有研究路径，不能代替本项目的创新与实物验证。</a:t>
+              <a:t>学校实施细则作为流程参考，最新批次须再核对。技术依据是综述、HydroNeuro、灌溉台架及事件通信研究。双压力模型有新增程序、协议和结果文件。案例的立项级别是用户提供的信息，文中全部性能没有由我们独立核实，不将其用于证明本项目有效。</a:t>
             </a:r>
           </a:p>
         </p:txBody>
@@ -780,7 +780,7 @@
             <a:pPr/>
             <a:r>
               <a:rPr lang="zh-CN" dirty="0"/>
-              <a:t>压力与流量的变化可能来自正常操作，也可能来自泄漏或水力受限。我们首先检验单测点能够看到多大异常，并比较固定阈值、切换等待和状态辅助等方法。随后在相同本地检测器下比较通信策略，避免用检测差异制造通信优势。目标是改善异常监测与告警信息质量，暂不承担自动灌溉控制或增产承诺。</a:t>
+              <a:t>系统面向支管巡检，应告诉管理者监测支管是否需要检查、依据是什么、何时发现。主研究下游等效泄漏和支管等效受限，正常供压与切换作为对照，信息不足时输出待检查。南疆是拟部署场景，现场需求和适用性仍待调查。</a:t>
             </a:r>
           </a:p>
         </p:txBody>
@@ -840,7 +840,7 @@
             <a:pPr/>
             <a:r>
               <a:rPr lang="zh-CN" dirty="0"/>
-              <a:t>滴灌堵塞综述提示压力和流量间接监测的局限，因此不能承诺逐滴头早期堵塞识别。HydroNeuro已经研究阀态与嵌入式异常感知，并非没有鲁棒性研究。灌溉模拟平台说明可控水路实验有可参考路径。农业事件通信也已有长期研究。本项目拟检验连续切换和短时异常，在强基线、相同告警确认规则下研究适用边界；这些是候选贡献，尚未被实物数据证明。</a:t>
+              <a:t>已有研究包括滴灌间接检测、阀态模型、LoRa试验平台和农业事件通信。本项目不能以这些技术名称当作创新。拟通过实验研究增加参考测点和工况信息带来多大增益、早期可观察到什么程度，以及可靠上报的代价。这些是候选研究问题而非已证明的贡献。</a:t>
             </a:r>
           </a:p>
         </p:txBody>
@@ -900,7 +900,7 @@
             <a:pPr/>
             <a:r>
               <a:rPr lang="zh-CN" dirty="0"/>
-              <a:t>第一工作包建立模型并通过标定和实验确定测点可观测范围，评估异常判别与强基线。第二工作包研究固定采样下的通信策略，加入事件缓存、确认和去重，检验开销与告警及时性。第三工作包完成节点、接收端和水路台架集成，用带标签数据、软件、报告与演示兑现任务。研究问题保持聚焦，项目工作量覆盖建模、方法、实现和验证，论文再选择证据最充分的主贡献。</a:t>
+              <a:t>四个工作包依次完成测量依据、诊断方法、可靠告警与系统验证。工作量涵盖模型、标定、嵌入式、协议、管理软件和独立实验，不只交付一个模块。每个任务都有对应证据，扩展节点和自动阀控不放进基础验收。</a:t>
             </a:r>
           </a:p>
         </p:txBody>
@@ -960,7 +960,7 @@
             <a:pPr/>
             <a:r>
               <a:rPr lang="zh-CN" dirty="0"/>
-              <a:t>模型包含共同供水阻力和两条支路，A支路记录压力和流量，压力点位于等效上游节流之后。负载用平方根压力关系描述，动态用一阶响应近似。模型能够检验供压、负载和测点假设的作用，但不是水锤或计算流体力学求解。当共同阻力为零时，B支路开关可以不影响A，这说明轮灌扰动不能被当作必然现场事实。</a:t>
+              <a:t>P0位于监测区段入口，P1位于目标受限元件下游，Q包含下游负载和泄漏总流量。平方律假设下可以用归一化流量与压降流量比形成简单强基线，新增压力点有望改善供压与局部受限的歧义。差压偏置和未知正常负载仍会混淆，需要校准、状态记录和不确定输出。</a:t>
             </a:r>
           </a:p>
         </p:txBody>
@@ -1020,7 +1020,7 @@
             <a:pPr/>
             <a:r>
               <a:rPr lang="zh-CN" dirty="0"/>
-              <a:t>这张图比较同一组模型参数下的正常轮灌和切换期间等效泄漏，B支路在一百八十到二百九十九秒开启，异常在一百九十到二百七十九秒发生。曲线是模拟压力，用于设计需要采集的工况，不能作为真实设备性能或田间识别率。下一步应先标定压力与流量，并用独立操作记录标记异常时间，再判断模拟响应是否接近真实水路。</a:t>
+              <a:t>图示两类从三百六十秒开始渐进的模拟故障，十五个百分点的流量偏离是为了说明评价定义而设定的演示失效判据，不是作物受损阈值。早期必须参照该判据，报告正确提前发现、前期误报和未成功试次。正式水路需要独立参考测量冻结程度与失效标准，还要测本地和远端两段时间。</a:t>
             </a:r>
           </a:p>
         </p:txBody>
@@ -1080,7 +1080,7 @@
             <a:pPr/>
             <a:r>
               <a:rPr lang="zh-CN" dirty="0"/>
-              <a:t>通信回放包含八类场景、二十个种子、三种丢包率和四种策略，共一千九百二十次合成回放。这里展示百分之十随机丢包加十五秒阻断的正常和噪声场景，各策略使用相同检测器、滤波载荷和确认规则。滤波限频可能形成有用取舍，但较慢周期也有竞争力；原始事件在较大噪声下频繁发送，却得到更小的远端重构误差。误差相对本地模拟滤波值，帧数包含上行和确认、以及尾段清队列，不能推出真实能耗。</a:t>
+              <a:t>这里保留此前一千九百二十次单压力模型的公平通信回放，四策略使用相同检测、载荷与确认。慢周期有竞争力，噪声可使原始事件大量发送。帧数不能代替能耗，误差相对本地模拟量。新双压力诊断与这套通信证据尚未合并，因此端到端实物验证仍是研究任务。</a:t>
             </a:r>
           </a:p>
         </p:txBody>
@@ -1140,7 +1140,7 @@
             <a:pPr/>
             <a:r>
               <a:rPr lang="zh-CN" dirty="0"/>
-              <a:t>对抗检验说明当前方法有真实的模型内失败案例。弱等效泄漏在二十个噪声种子中均未被候选检测器命中，阀态缺失会使正常切换产生误报，较大噪声下每试次平均有二点七次误报。加入事件保留和确认后，百分之三十随机丢包加十五秒阻断仍不能保证所有短时告警在演示设定的二十秒内到达。通信可靠性也不能补救本地漏检。因此我们保留失败案例、强基线和测量边界，而不承诺所有工况准确识别。</a:t>
+              <a:t>双压力假设检验包含六个场景、四种压力噪声和二十个种子，共四百八十次。在低噪声理想条件下能提前发现，但噪声为十千帕时两类均只有十二次满足无前期误报且正确提前发现。漂移和未知正常负载即使低噪声仍能误报。重复主要改变噪声，不能报告为实物识别率，也不证明优于强基线。</a:t>
             </a:r>
           </a:p>
         </p:txBody>
@@ -1200,7 +1200,7 @@
             <a:pPr/>
             <a:r>
               <a:rPr lang="zh-CN" dirty="0"/>
-              <a:t>原型先完成压力和流量的有线原始采集，再实现本地检测和事件缓存。LoRa接收端返回确认并记录日志，网站用于展示、工况回放和证据追踪。数据包含启动会话、序号、时间、测量和事件编号，以便区分重启、重传和丢包。超时、去重、掉电恢复与溢出记录属于必须验证的工程任务。当前网站只展示模型和合成结果，尚未连接真实传感器。</a:t>
+              <a:t>软件是系统工作的一部分，提供设备档案、支管示意、趋势、事件证据、处理确认和回放导出。信息无法辨因、测量无效和节点离线分别处理，防止把没有数据当作正常。当前展示网页没有连接真实硬件，最终还要实现接收日志和管理状态持久化。</a:t>
             </a:r>
           </a:p>
         </p:txBody>
@@ -1709,7 +1709,7 @@
     <p:bg>
       <p:bgPr>
         <a:solidFill>
-          <a:schemeClr val="lt1"/>
+          <a:schemeClr val="accent1"/>
         </a:solidFill>
         <a:effectLst/>
       </p:bgPr>
@@ -1737,7 +1737,7 @@
         <p:spPr>
           <a:xfrm>
             <a:off x="451104" y="289560"/>
-            <a:ext cx="1304544" cy="234696"/>
+            <a:ext cx="1466088" cy="234696"/>
           </a:xfrm>
           <a:prstGeom prst="rect">
             <a:avLst/>
@@ -1757,20 +1757,180 @@
             <a:r>
               <a:rPr lang="zh-CN" sz="1200" dirty="0">
                 <a:solidFill>
-                  <a:schemeClr val="accent1"/>
+                  <a:srgbClr val="EEF3EF"/>
                 </a:solidFill>
                 <a:latin typeface="+mn-lt"/>
                 <a:ea typeface="+mn-ea"/>
                 <a:cs typeface="+mn-cs"/>
               </a:rPr>
-              <a:t>创新训练申报方案</a:t>
+              <a:t>申报方案｜尚无实物</a:t>
             </a:r>
           </a:p>
         </p:txBody>
       </p:sp>
       <p:sp>
         <p:nvSpPr>
-          <p:cNvPr id="3" name="Line 3"/>
+          <p:cNvPr id="3" name="page-route-0"/>
+          <p:cNvSpPr txBox="1"/>
+          <p:nvPr/>
+        </p:nvSpPr>
+        <p:spPr>
+          <a:xfrm>
+            <a:off x="7518654" y="289560"/>
+            <a:ext cx="335280" cy="234696"/>
+          </a:xfrm>
+          <a:prstGeom prst="rect">
+            <a:avLst/>
+          </a:prstGeom>
+          <a:noFill/>
+          <a:ln>
+            <a:noFill/>
+          </a:ln>
+        </p:spPr>
+        <p:txBody>
+          <a:bodyPr wrap="none" lIns="0" tIns="0" rIns="0" bIns="0" anchor="t" anchorCtr="0">
+            <a:spAutoFit/>
+          </a:bodyPr>
+          <a:lstStyle/>
+          <a:p>
+            <a:pPr algn="l"/>
+            <a:r>
+              <a:rPr lang="zh-CN" sz="1200" b="1" dirty="0">
+                <a:solidFill>
+                  <a:srgbClr val="EEF3EF"/>
+                </a:solidFill>
+                <a:latin typeface="+mn-lt"/>
+                <a:ea typeface="+mn-ea"/>
+                <a:cs typeface="+mn-cs"/>
+              </a:rPr>
+              <a:t>场景</a:t>
+            </a:r>
+          </a:p>
+        </p:txBody>
+      </p:sp>
+      <p:sp>
+        <p:nvSpPr>
+          <p:cNvPr id="4" name="page-route-1"/>
+          <p:cNvSpPr txBox="1"/>
+          <p:nvPr/>
+        </p:nvSpPr>
+        <p:spPr>
+          <a:xfrm>
+            <a:off x="8404479" y="289560"/>
+            <a:ext cx="335280" cy="234696"/>
+          </a:xfrm>
+          <a:prstGeom prst="rect">
+            <a:avLst/>
+          </a:prstGeom>
+          <a:noFill/>
+          <a:ln>
+            <a:noFill/>
+          </a:ln>
+        </p:spPr>
+        <p:txBody>
+          <a:bodyPr wrap="none" lIns="0" tIns="0" rIns="0" bIns="0" anchor="t" anchorCtr="0">
+            <a:spAutoFit/>
+          </a:bodyPr>
+          <a:lstStyle/>
+          <a:p>
+            <a:pPr algn="l"/>
+            <a:r>
+              <a:rPr lang="zh-CN" sz="1200" dirty="0">
+                <a:solidFill>
+                  <a:srgbClr val="EEF3EF"/>
+                </a:solidFill>
+                <a:latin typeface="+mn-lt"/>
+                <a:ea typeface="+mn-ea"/>
+                <a:cs typeface="+mn-cs"/>
+              </a:rPr>
+              <a:t>系统</a:t>
+            </a:r>
+          </a:p>
+        </p:txBody>
+      </p:sp>
+      <p:sp>
+        <p:nvSpPr>
+          <p:cNvPr id="5" name="page-route-2"/>
+          <p:cNvSpPr txBox="1"/>
+          <p:nvPr/>
+        </p:nvSpPr>
+        <p:spPr>
+          <a:xfrm>
+            <a:off x="9290304" y="289560"/>
+            <a:ext cx="335280" cy="234696"/>
+          </a:xfrm>
+          <a:prstGeom prst="rect">
+            <a:avLst/>
+          </a:prstGeom>
+          <a:noFill/>
+          <a:ln>
+            <a:noFill/>
+          </a:ln>
+        </p:spPr>
+        <p:txBody>
+          <a:bodyPr wrap="none" lIns="0" tIns="0" rIns="0" bIns="0" anchor="t" anchorCtr="0">
+            <a:spAutoFit/>
+          </a:bodyPr>
+          <a:lstStyle/>
+          <a:p>
+            <a:pPr algn="l"/>
+            <a:r>
+              <a:rPr lang="zh-CN" sz="1200" dirty="0">
+                <a:solidFill>
+                  <a:srgbClr val="EEF3EF"/>
+                </a:solidFill>
+                <a:latin typeface="+mn-lt"/>
+                <a:ea typeface="+mn-ea"/>
+                <a:cs typeface="+mn-cs"/>
+              </a:rPr>
+              <a:t>证据</a:t>
+            </a:r>
+          </a:p>
+        </p:txBody>
+      </p:sp>
+      <p:sp>
+        <p:nvSpPr>
+          <p:cNvPr id="6" name="page-route-3"/>
+          <p:cNvSpPr txBox="1"/>
+          <p:nvPr/>
+        </p:nvSpPr>
+        <p:spPr>
+          <a:xfrm>
+            <a:off x="10176129" y="289560"/>
+            <a:ext cx="335280" cy="234696"/>
+          </a:xfrm>
+          <a:prstGeom prst="rect">
+            <a:avLst/>
+          </a:prstGeom>
+          <a:noFill/>
+          <a:ln>
+            <a:noFill/>
+          </a:ln>
+        </p:spPr>
+        <p:txBody>
+          <a:bodyPr wrap="none" lIns="0" tIns="0" rIns="0" bIns="0" anchor="t" anchorCtr="0">
+            <a:spAutoFit/>
+          </a:bodyPr>
+          <a:lstStyle/>
+          <a:p>
+            <a:pPr algn="l"/>
+            <a:r>
+              <a:rPr lang="zh-CN" sz="1200" dirty="0">
+                <a:solidFill>
+                  <a:srgbClr val="EEF3EF"/>
+                </a:solidFill>
+                <a:latin typeface="+mn-lt"/>
+                <a:ea typeface="+mn-ea"/>
+                <a:cs typeface="+mn-cs"/>
+              </a:rPr>
+              <a:t>实施</a:t>
+            </a:r>
+          </a:p>
+        </p:txBody>
+      </p:sp>
+      <p:sp>
+        <p:nvSpPr>
+          <p:cNvPr id="7" name="Line 7"/>
           <p:cNvSpPr/>
           <p:nvPr/>
         </p:nvSpPr>
@@ -1806,7 +1966,7 @@
       </p:sp>
       <p:sp>
         <p:nvSpPr>
-          <p:cNvPr id="4" name="source-footer"/>
+          <p:cNvPr id="8" name="source-footer"/>
           <p:cNvSpPr txBox="1"/>
           <p:nvPr/>
         </p:nvSpPr>
@@ -1833,7 +1993,7 @@
             <a:r>
               <a:rPr lang="zh-CN" sz="1200" dirty="0">
                 <a:solidFill>
-                  <a:schemeClr val="accent5"/>
+                  <a:srgbClr val="EEF3EF"/>
                 </a:solidFill>
                 <a:latin typeface="+mn-lt"/>
                 <a:ea typeface="+mn-ea"/>
@@ -1846,7 +2006,7 @@
       </p:sp>
       <p:sp>
         <p:nvSpPr>
-          <p:cNvPr id="5" name="page-number"/>
+          <p:cNvPr id="9" name="page-number"/>
           <p:cNvSpPr txBox="1"/>
           <p:nvPr/>
         </p:nvSpPr>
@@ -1873,7 +2033,7 @@
             <a:r>
               <a:rPr lang="zh-CN" sz="1200" dirty="0">
                 <a:solidFill>
-                  <a:schemeClr val="accent5"/>
+                  <a:srgbClr val="EEF3EF"/>
                 </a:solidFill>
                 <a:latin typeface="+mn-lt"/>
                 <a:ea typeface="+mn-ea"/>
@@ -1886,28 +2046,28 @@
       </p:sp>
       <p:grpSp>
         <p:nvGrpSpPr>
-          <p:cNvPr id="10" name="cover-claim"/>
+          <p:cNvPr id="14" name="cover-claim"/>
           <p:cNvGrpSpPr/>
           <p:nvPr/>
         </p:nvGrpSpPr>
         <p:grpSpPr>
           <a:xfrm>
             <a:off x="438150" y="1828800"/>
-            <a:ext cx="5181600" cy="3937825"/>
+            <a:ext cx="4325874" cy="3937825"/>
             <a:chOff x="438150" y="1828800"/>
-            <a:chExt cx="5181600" cy="3937825"/>
+            <a:chExt cx="4325874" cy="3937825"/>
           </a:xfrm>
         </p:grpSpPr>
         <p:sp>
           <p:nvSpPr>
-            <p:cNvPr id="6" name="TextBox 6"/>
+            <p:cNvPr id="10" name="TextBox 10"/>
             <p:cNvSpPr txBox="1"/>
             <p:nvPr/>
           </p:nvSpPr>
           <p:spPr>
             <a:xfrm>
               <a:off x="438150" y="1828800"/>
-              <a:ext cx="5181600" cy="1676400"/>
+              <a:ext cx="3467100" cy="1676400"/>
             </a:xfrm>
             <a:prstGeom prst="rect">
               <a:avLst/>
@@ -1931,39 +2091,39 @@
               <a:r>
                 <a:rPr lang="zh-CN" sz="4500" b="1" dirty="0">
                   <a:solidFill>
-                    <a:schemeClr val="accent1"/>
+                    <a:srgbClr val="FFFFFF"/>
                   </a:solidFill>
                   <a:latin typeface="+mn-lt"/>
                   <a:ea typeface="+mn-ea"/>
                   <a:cs typeface="+mn-cs"/>
                 </a:rPr>
-                <a:t>让轮灌监测看得清</a:t>
+                <a:t>南疆滴灌支管</a:t>
               </a:r>
               <a:br/>
               <a:r>
                 <a:rPr lang="zh-CN" sz="4500" b="1" dirty="0">
                   <a:solidFill>
-                    <a:schemeClr val="accent1"/>
+                    <a:srgbClr val="FFFFFF"/>
                   </a:solidFill>
                   <a:latin typeface="+mn-lt"/>
                   <a:ea typeface="+mn-ea"/>
                   <a:cs typeface="+mn-cs"/>
                 </a:rPr>
-                <a:t>让短时告警报得可靠</a:t>
+                <a:t>早期故障诊断</a:t>
               </a:r>
             </a:p>
           </p:txBody>
         </p:sp>
         <p:sp>
           <p:nvSpPr>
-            <p:cNvPr id="7" name="TextBox 7"/>
+            <p:cNvPr id="11" name="TextBox 11"/>
             <p:cNvSpPr txBox="1"/>
             <p:nvPr/>
           </p:nvSpPr>
           <p:spPr>
             <a:xfrm>
               <a:off x="448056" y="3758565"/>
-              <a:ext cx="3904488" cy="704469"/>
+              <a:ext cx="4315968" cy="704469"/>
             </a:xfrm>
             <a:prstGeom prst="rect">
               <a:avLst/>
@@ -1987,32 +2147,32 @@
               <a:r>
                 <a:rPr lang="zh-CN" sz="1800" dirty="0">
                   <a:solidFill>
-                    <a:schemeClr val="dk1"/>
+                    <a:srgbClr val="EEF3EF"/>
                   </a:solidFill>
                   <a:latin typeface="+mn-lt"/>
                   <a:ea typeface="+mn-ea"/>
                   <a:cs typeface="+mn-cs"/>
                 </a:rPr>
-                <a:t>面向棉田轮灌工况的滴灌支管异常监测</a:t>
+                <a:t>基于 LoRa 的南疆滴灌支管道早期故障诊断</a:t>
               </a:r>
               <a:br/>
               <a:r>
                 <a:rPr lang="zh-CN" sz="1800" dirty="0">
                   <a:solidFill>
-                    <a:schemeClr val="dk1"/>
+                    <a:srgbClr val="EEF3EF"/>
                   </a:solidFill>
                   <a:latin typeface="+mn-lt"/>
                   <a:ea typeface="+mn-ea"/>
                   <a:cs typeface="+mn-cs"/>
                 </a:rPr>
-                <a:t>与事件触发 LoRa 通信方法研究</a:t>
+                <a:t>物联网原型系统</a:t>
               </a:r>
             </a:p>
           </p:txBody>
         </p:sp>
         <p:sp>
           <p:nvSpPr>
-            <p:cNvPr id="8" name="TextBox 8"/>
+            <p:cNvPr id="12" name="TextBox 12"/>
             <p:cNvSpPr txBox="1"/>
             <p:nvPr/>
           </p:nvSpPr>
@@ -2039,20 +2199,20 @@
               <a:r>
                 <a:rPr lang="zh-CN" sz="1800" dirty="0">
                   <a:solidFill>
-                    <a:schemeClr val="accent5"/>
+                    <a:srgbClr val="EEF3EF"/>
                   </a:solidFill>
                   <a:latin typeface="+mn-lt"/>
                   <a:ea typeface="+mn-ea"/>
                   <a:cs typeface="+mn-cs"/>
                 </a:rPr>
-                <a:t>2027.03—2028.02｜争取较高级别立项</a:t>
+                <a:t>2027.03—2028.02｜创新训练申报方案</a:t>
               </a:r>
             </a:p>
           </p:txBody>
         </p:sp>
         <p:sp>
           <p:nvSpPr>
-            <p:cNvPr id="9" name="TextBox 9"/>
+            <p:cNvPr id="13" name="TextBox 13"/>
             <p:cNvSpPr txBox="1"/>
             <p:nvPr/>
           </p:nvSpPr>
@@ -2079,13 +2239,13 @@
               <a:r>
                 <a:rPr lang="zh-CN" sz="1350" dirty="0">
                   <a:solidFill>
-                    <a:schemeClr val="accent5"/>
+                    <a:srgbClr val="EEF3EF"/>
                   </a:solidFill>
                   <a:latin typeface="+mn-lt"/>
                   <a:ea typeface="+mn-ea"/>
                   <a:cs typeface="+mn-cs"/>
                 </a:rPr>
-                <a:t>前期基础：文献、模型与合成回放；尚无实物数据</a:t>
+                <a:t>前期：文献、未标定模型、合成回放；无实物数据</a:t>
               </a:r>
             </a:p>
           </p:txBody>
@@ -2093,7 +2253,7 @@
       </p:grpSp>
       <p:grpSp>
         <p:nvGrpSpPr>
-          <p:cNvPr id="22" name="cover-system"/>
+          <p:cNvPr id="26" name="cover-system"/>
           <p:cNvGrpSpPr/>
           <p:nvPr/>
         </p:nvGrpSpPr>
@@ -2107,7 +2267,7 @@
         </p:grpSpPr>
         <p:sp>
           <p:nvSpPr>
-            <p:cNvPr id="11" name="Line 11"/>
+            <p:cNvPr id="15" name="Line 15"/>
             <p:cNvSpPr/>
             <p:nvPr/>
           </p:nvSpPr>
@@ -2136,14 +2296,14 @@
             <a:noFill/>
             <a:ln w="38100">
               <a:solidFill>
-                <a:schemeClr val="accent1"/>
+                <a:srgbClr val="EEF3EF"/>
               </a:solidFill>
             </a:ln>
           </p:spPr>
         </p:sp>
         <p:sp>
           <p:nvSpPr>
-            <p:cNvPr id="12" name="Line 12"/>
+            <p:cNvPr id="16" name="Line 16"/>
             <p:cNvSpPr/>
             <p:nvPr/>
           </p:nvSpPr>
@@ -2172,14 +2332,14 @@
             <a:noFill/>
             <a:ln w="38100">
               <a:solidFill>
-                <a:schemeClr val="accent1"/>
+                <a:srgbClr val="EEF3EF"/>
               </a:solidFill>
             </a:ln>
           </p:spPr>
         </p:sp>
         <p:sp>
           <p:nvSpPr>
-            <p:cNvPr id="13" name="Line 13"/>
+            <p:cNvPr id="17" name="Line 17"/>
             <p:cNvSpPr/>
             <p:nvPr/>
           </p:nvSpPr>
@@ -2208,14 +2368,14 @@
             <a:noFill/>
             <a:ln w="38100">
               <a:solidFill>
-                <a:schemeClr val="accent1"/>
+                <a:srgbClr val="EEF3EF"/>
               </a:solidFill>
             </a:ln>
           </p:spPr>
         </p:sp>
         <p:sp>
           <p:nvSpPr>
-            <p:cNvPr id="14" name="Line 14"/>
+            <p:cNvPr id="18" name="Line 18"/>
             <p:cNvSpPr/>
             <p:nvPr/>
           </p:nvSpPr>
@@ -2244,14 +2404,14 @@
             <a:noFill/>
             <a:ln w="38100">
               <a:solidFill>
-                <a:schemeClr val="accent1"/>
+                <a:srgbClr val="EEF3EF"/>
               </a:solidFill>
             </a:ln>
           </p:spPr>
         </p:sp>
         <p:sp>
           <p:nvSpPr>
-            <p:cNvPr id="15" name="Ellipse 15"/>
+            <p:cNvPr id="19" name="Ellipse 19"/>
             <p:cNvSpPr/>
             <p:nvPr/>
           </p:nvSpPr>
@@ -2264,18 +2424,18 @@
               <a:avLst/>
             </a:prstGeom>
             <a:solidFill>
-              <a:schemeClr val="lt1"/>
+              <a:schemeClr val="accent1"/>
             </a:solidFill>
             <a:ln w="28575">
               <a:solidFill>
-                <a:schemeClr val="accent1"/>
+                <a:srgbClr val="EEF3EF"/>
               </a:solidFill>
             </a:ln>
           </p:spPr>
         </p:sp>
         <p:sp>
           <p:nvSpPr>
-            <p:cNvPr id="16" name="Ellipse 16"/>
+            <p:cNvPr id="20" name="Ellipse 20"/>
             <p:cNvSpPr/>
             <p:nvPr/>
           </p:nvSpPr>
@@ -2288,18 +2448,18 @@
               <a:avLst/>
             </a:prstGeom>
             <a:solidFill>
-              <a:schemeClr val="lt1"/>
+              <a:schemeClr val="accent1"/>
             </a:solidFill>
             <a:ln w="28575">
               <a:solidFill>
-                <a:schemeClr val="accent1"/>
+                <a:srgbClr val="EEF3EF"/>
               </a:solidFill>
             </a:ln>
           </p:spPr>
         </p:sp>
         <p:sp>
           <p:nvSpPr>
-            <p:cNvPr id="17" name="TextBox 17"/>
+            <p:cNvPr id="21" name="TextBox 21"/>
             <p:cNvSpPr txBox="1"/>
             <p:nvPr/>
           </p:nvSpPr>
@@ -2326,7 +2486,7 @@
               <a:r>
                 <a:rPr lang="en-US" sz="1800" dirty="0">
                   <a:solidFill>
-                    <a:schemeClr val="accent1"/>
+                    <a:srgbClr val="EEF3EF"/>
                   </a:solidFill>
                   <a:latin typeface="+mn-lt"/>
                   <a:ea typeface="+mn-ea"/>
@@ -2339,7 +2499,7 @@
         </p:sp>
         <p:sp>
           <p:nvSpPr>
-            <p:cNvPr id="18" name="TextBox 18"/>
+            <p:cNvPr id="22" name="TextBox 22"/>
             <p:cNvSpPr txBox="1"/>
             <p:nvPr/>
           </p:nvSpPr>
@@ -2366,7 +2526,7 @@
               <a:r>
                 <a:rPr lang="en-US" sz="1800" dirty="0">
                   <a:solidFill>
-                    <a:schemeClr val="accent1"/>
+                    <a:srgbClr val="EEF3EF"/>
                   </a:solidFill>
                   <a:latin typeface="+mn-lt"/>
                   <a:ea typeface="+mn-ea"/>
@@ -2379,14 +2539,14 @@
         </p:sp>
         <p:sp>
           <p:nvSpPr>
-            <p:cNvPr id="19" name="TextBox 19"/>
+            <p:cNvPr id="23" name="TextBox 23"/>
             <p:cNvSpPr txBox="1"/>
             <p:nvPr/>
           </p:nvSpPr>
           <p:spPr>
             <a:xfrm>
               <a:off x="8942832" y="2097405"/>
-              <a:ext cx="586740" cy="410718"/>
+              <a:ext cx="869442" cy="410718"/>
             </a:xfrm>
             <a:prstGeom prst="rect">
               <a:avLst/>
@@ -2406,27 +2566,27 @@
               <a:r>
                 <a:rPr lang="zh-CN" sz="2100" dirty="0">
                   <a:solidFill>
-                    <a:schemeClr val="accent1"/>
+                    <a:srgbClr val="EEF3EF"/>
                   </a:solidFill>
                   <a:latin typeface="+mn-lt"/>
                   <a:ea typeface="+mn-ea"/>
                   <a:cs typeface="+mn-cs"/>
                 </a:rPr>
-                <a:t>感知</a:t>
+                <a:t>双压力</a:t>
               </a:r>
             </a:p>
           </p:txBody>
         </p:sp>
         <p:sp>
           <p:nvSpPr>
-            <p:cNvPr id="20" name="TextBox 20"/>
+            <p:cNvPr id="24" name="TextBox 24"/>
             <p:cNvSpPr txBox="1"/>
             <p:nvPr/>
           </p:nvSpPr>
           <p:spPr>
             <a:xfrm>
-              <a:off x="10193274" y="4587240"/>
-              <a:ext cx="987552" cy="352044"/>
+              <a:off x="10053942" y="4587240"/>
+              <a:ext cx="1266215" cy="352044"/>
             </a:xfrm>
             <a:prstGeom prst="rect">
               <a:avLst/>
@@ -2446,20 +2606,20 @@
               <a:r>
                 <a:rPr lang="zh-CN" sz="1800" dirty="0">
                   <a:solidFill>
-                    <a:schemeClr val="accent2"/>
+                    <a:srgbClr val="EEF3EF"/>
                   </a:solidFill>
                   <a:latin typeface="+mn-lt"/>
                   <a:ea typeface="+mn-ea"/>
                   <a:cs typeface="+mn-cs"/>
                 </a:rPr>
-                <a:t>可靠上报</a:t>
+                <a:t>诊断 → 告警</a:t>
               </a:r>
             </a:p>
           </p:txBody>
         </p:sp>
         <p:sp>
           <p:nvSpPr>
-            <p:cNvPr id="21" name="Line 21"/>
+            <p:cNvPr id="25" name="Line 25"/>
             <p:cNvSpPr/>
             <p:nvPr/>
           </p:nvSpPr>
@@ -2488,7 +2648,7 @@
             <a:noFill/>
             <a:ln w="19050">
               <a:solidFill>
-                <a:schemeClr val="accent2"/>
+                <a:srgbClr val="EEF3EF"/>
               </a:solidFill>
               <a:custDash>
                 <a:ds d="300000" sp="250000"/>
@@ -2542,7 +2702,7 @@
         <p:spPr>
           <a:xfrm>
             <a:off x="451104" y="289560"/>
-            <a:ext cx="658368" cy="234696"/>
+            <a:ext cx="1950720" cy="234696"/>
           </a:xfrm>
           <a:prstGeom prst="rect">
             <a:avLst/>
@@ -2568,35 +2728,195 @@
                 <a:ea typeface="+mn-ea"/>
                 <a:cs typeface="+mn-cs"/>
               </a:rPr>
-              <a:t>实验计划</a:t>
+              <a:t>实验计划｜数量待导师审核</a:t>
+            </a:r>
+          </a:p>
+        </p:txBody>
+      </p:sp>
+      <p:sp>
+        <p:nvSpPr>
+          <p:cNvPr id="3" name="page-route-0"/>
+          <p:cNvSpPr txBox="1"/>
+          <p:nvPr/>
+        </p:nvSpPr>
+        <p:spPr>
+          <a:xfrm>
+            <a:off x="7518654" y="289560"/>
+            <a:ext cx="335280" cy="234696"/>
+          </a:xfrm>
+          <a:prstGeom prst="rect">
+            <a:avLst/>
+          </a:prstGeom>
+          <a:noFill/>
+          <a:ln>
+            <a:noFill/>
+          </a:ln>
+        </p:spPr>
+        <p:txBody>
+          <a:bodyPr wrap="none" lIns="0" tIns="0" rIns="0" bIns="0" anchor="t" anchorCtr="0">
+            <a:spAutoFit/>
+          </a:bodyPr>
+          <a:lstStyle/>
+          <a:p>
+            <a:pPr algn="l"/>
+            <a:r>
+              <a:rPr lang="zh-CN" sz="1200" dirty="0">
+                <a:solidFill>
+                  <a:schemeClr val="accent5"/>
+                </a:solidFill>
+                <a:latin typeface="+mn-lt"/>
+                <a:ea typeface="+mn-ea"/>
+                <a:cs typeface="+mn-cs"/>
+              </a:rPr>
+              <a:t>场景</a:t>
+            </a:r>
+          </a:p>
+        </p:txBody>
+      </p:sp>
+      <p:sp>
+        <p:nvSpPr>
+          <p:cNvPr id="4" name="page-route-1"/>
+          <p:cNvSpPr txBox="1"/>
+          <p:nvPr/>
+        </p:nvSpPr>
+        <p:spPr>
+          <a:xfrm>
+            <a:off x="8404479" y="289560"/>
+            <a:ext cx="335280" cy="234696"/>
+          </a:xfrm>
+          <a:prstGeom prst="rect">
+            <a:avLst/>
+          </a:prstGeom>
+          <a:noFill/>
+          <a:ln>
+            <a:noFill/>
+          </a:ln>
+        </p:spPr>
+        <p:txBody>
+          <a:bodyPr wrap="none" lIns="0" tIns="0" rIns="0" bIns="0" anchor="t" anchorCtr="0">
+            <a:spAutoFit/>
+          </a:bodyPr>
+          <a:lstStyle/>
+          <a:p>
+            <a:pPr algn="l"/>
+            <a:r>
+              <a:rPr lang="zh-CN" sz="1200" dirty="0">
+                <a:solidFill>
+                  <a:schemeClr val="accent5"/>
+                </a:solidFill>
+                <a:latin typeface="+mn-lt"/>
+                <a:ea typeface="+mn-ea"/>
+                <a:cs typeface="+mn-cs"/>
+              </a:rPr>
+              <a:t>系统</a:t>
+            </a:r>
+          </a:p>
+        </p:txBody>
+      </p:sp>
+      <p:sp>
+        <p:nvSpPr>
+          <p:cNvPr id="5" name="page-route-2"/>
+          <p:cNvSpPr txBox="1"/>
+          <p:nvPr/>
+        </p:nvSpPr>
+        <p:spPr>
+          <a:xfrm>
+            <a:off x="9290304" y="289560"/>
+            <a:ext cx="335280" cy="234696"/>
+          </a:xfrm>
+          <a:prstGeom prst="rect">
+            <a:avLst/>
+          </a:prstGeom>
+          <a:noFill/>
+          <a:ln>
+            <a:noFill/>
+          </a:ln>
+        </p:spPr>
+        <p:txBody>
+          <a:bodyPr wrap="none" lIns="0" tIns="0" rIns="0" bIns="0" anchor="t" anchorCtr="0">
+            <a:spAutoFit/>
+          </a:bodyPr>
+          <a:lstStyle/>
+          <a:p>
+            <a:pPr algn="l"/>
+            <a:r>
+              <a:rPr lang="zh-CN" sz="1200" dirty="0">
+                <a:solidFill>
+                  <a:schemeClr val="accent5"/>
+                </a:solidFill>
+                <a:latin typeface="+mn-lt"/>
+                <a:ea typeface="+mn-ea"/>
+                <a:cs typeface="+mn-cs"/>
+              </a:rPr>
+              <a:t>证据</a:t>
+            </a:r>
+          </a:p>
+        </p:txBody>
+      </p:sp>
+      <p:sp>
+        <p:nvSpPr>
+          <p:cNvPr id="6" name="page-route-3"/>
+          <p:cNvSpPr txBox="1"/>
+          <p:nvPr/>
+        </p:nvSpPr>
+        <p:spPr>
+          <a:xfrm>
+            <a:off x="10176129" y="289560"/>
+            <a:ext cx="335280" cy="234696"/>
+          </a:xfrm>
+          <a:prstGeom prst="rect">
+            <a:avLst/>
+          </a:prstGeom>
+          <a:noFill/>
+          <a:ln>
+            <a:noFill/>
+          </a:ln>
+        </p:spPr>
+        <p:txBody>
+          <a:bodyPr wrap="none" lIns="0" tIns="0" rIns="0" bIns="0" anchor="t" anchorCtr="0">
+            <a:spAutoFit/>
+          </a:bodyPr>
+          <a:lstStyle/>
+          <a:p>
+            <a:pPr algn="l"/>
+            <a:r>
+              <a:rPr lang="zh-CN" sz="1200" b="1" dirty="0">
+                <a:solidFill>
+                  <a:schemeClr val="accent1"/>
+                </a:solidFill>
+                <a:latin typeface="+mn-lt"/>
+                <a:ea typeface="+mn-ea"/>
+                <a:cs typeface="+mn-cs"/>
+              </a:rPr>
+              <a:t>实施</a:t>
             </a:r>
           </a:p>
         </p:txBody>
       </p:sp>
       <p:grpSp>
         <p:nvGrpSpPr>
-          <p:cNvPr id="4" name="page-title"/>
+          <p:cNvPr id="8" name="page-title"/>
           <p:cNvGrpSpPr/>
           <p:nvPr/>
         </p:nvGrpSpPr>
         <p:grpSpPr>
           <a:xfrm>
             <a:off x="441198" y="812483"/>
-            <a:ext cx="6392799" cy="616077"/>
+            <a:ext cx="5544693" cy="616077"/>
             <a:chOff x="441198" y="812483"/>
-            <a:chExt cx="6392799" cy="616077"/>
+            <a:chExt cx="5544693" cy="616077"/>
           </a:xfrm>
         </p:grpSpPr>
         <p:sp>
           <p:nvSpPr>
-            <p:cNvPr id="3" name="TextBox 3"/>
+            <p:cNvPr id="7" name="TextBox 7"/>
             <p:cNvSpPr txBox="1"/>
             <p:nvPr/>
           </p:nvSpPr>
           <p:spPr>
             <a:xfrm>
               <a:off x="441198" y="812483"/>
-              <a:ext cx="6392799" cy="616077"/>
+              <a:ext cx="5544693" cy="616077"/>
             </a:xfrm>
             <a:prstGeom prst="rect">
               <a:avLst/>
@@ -2622,7 +2942,7 @@
                   <a:ea typeface="+mj-ea"/>
                   <a:cs typeface="+mj-cs"/>
                 </a:rPr>
-                <a:t>分层验证把方法、硬件与场景分开</a:t>
+                <a:t>目标有程度，实验有独立重复</a:t>
               </a:r>
             </a:p>
           </p:txBody>
@@ -2630,7 +2950,7 @@
       </p:grpSp>
       <p:sp>
         <p:nvSpPr>
-          <p:cNvPr id="5" name="Line 5"/>
+          <p:cNvPr id="9" name="Line 9"/>
           <p:cNvSpPr/>
           <p:nvPr/>
         </p:nvSpPr>
@@ -2666,7 +2986,7 @@
       </p:sp>
       <p:sp>
         <p:nvSpPr>
-          <p:cNvPr id="6" name="source-footer"/>
+          <p:cNvPr id="10" name="source-footer"/>
           <p:cNvSpPr txBox="1"/>
           <p:nvPr/>
         </p:nvSpPr>
@@ -2706,7 +3026,7 @@
       </p:sp>
       <p:sp>
         <p:nvSpPr>
-          <p:cNvPr id="7" name="page-number"/>
+          <p:cNvPr id="11" name="page-number"/>
           <p:cNvSpPr txBox="1"/>
           <p:nvPr/>
         </p:nvSpPr>
@@ -2746,7 +3066,7 @@
       </p:sp>
       <p:grpSp>
         <p:nvGrpSpPr>
-          <p:cNvPr id="25" name="validation-stages"/>
+          <p:cNvPr id="29" name="validation-stages"/>
           <p:cNvGrpSpPr/>
           <p:nvPr/>
         </p:nvGrpSpPr>
@@ -2760,7 +3080,7 @@
         </p:grpSpPr>
         <p:sp>
           <p:nvSpPr>
-            <p:cNvPr id="8" name="Ellipse 8"/>
+            <p:cNvPr id="12" name="Ellipse 12"/>
             <p:cNvSpPr/>
             <p:nvPr/>
           </p:nvSpPr>
@@ -2782,7 +3102,7 @@
         </p:sp>
         <p:sp>
           <p:nvSpPr>
-            <p:cNvPr id="9" name="TextBox 9"/>
+            <p:cNvPr id="13" name="TextBox 13"/>
             <p:cNvSpPr txBox="1"/>
             <p:nvPr/>
           </p:nvSpPr>
@@ -2822,7 +3142,7 @@
         </p:sp>
         <p:sp>
           <p:nvSpPr>
-            <p:cNvPr id="10" name="TextBox 10"/>
+            <p:cNvPr id="14" name="TextBox 14"/>
             <p:cNvSpPr txBox="1"/>
             <p:nvPr/>
           </p:nvSpPr>
@@ -2862,7 +3182,7 @@
         </p:sp>
         <p:sp>
           <p:nvSpPr>
-            <p:cNvPr id="11" name="TextBox 11"/>
+            <p:cNvPr id="15" name="TextBox 15"/>
             <p:cNvSpPr txBox="1"/>
             <p:nvPr/>
           </p:nvSpPr>
@@ -2902,7 +3222,7 @@
         </p:sp>
         <p:sp>
           <p:nvSpPr>
-            <p:cNvPr id="12" name="Line 12"/>
+            <p:cNvPr id="16" name="Line 16"/>
             <p:cNvSpPr/>
             <p:nvPr/>
           </p:nvSpPr>
@@ -2938,7 +3258,7 @@
         </p:sp>
         <p:sp>
           <p:nvSpPr>
-            <p:cNvPr id="13" name="Ellipse 13"/>
+            <p:cNvPr id="17" name="Ellipse 17"/>
             <p:cNvSpPr/>
             <p:nvPr/>
           </p:nvSpPr>
@@ -2960,7 +3280,7 @@
         </p:sp>
         <p:sp>
           <p:nvSpPr>
-            <p:cNvPr id="14" name="TextBox 14"/>
+            <p:cNvPr id="18" name="TextBox 18"/>
             <p:cNvSpPr txBox="1"/>
             <p:nvPr/>
           </p:nvSpPr>
@@ -3000,7 +3320,7 @@
         </p:sp>
         <p:sp>
           <p:nvSpPr>
-            <p:cNvPr id="15" name="TextBox 15"/>
+            <p:cNvPr id="19" name="TextBox 19"/>
             <p:cNvSpPr txBox="1"/>
             <p:nvPr/>
           </p:nvSpPr>
@@ -3040,7 +3360,7 @@
         </p:sp>
         <p:sp>
           <p:nvSpPr>
-            <p:cNvPr id="16" name="TextBox 16"/>
+            <p:cNvPr id="20" name="TextBox 20"/>
             <p:cNvSpPr txBox="1"/>
             <p:nvPr/>
           </p:nvSpPr>
@@ -3080,7 +3400,7 @@
         </p:sp>
         <p:sp>
           <p:nvSpPr>
-            <p:cNvPr id="17" name="Line 17"/>
+            <p:cNvPr id="21" name="Line 21"/>
             <p:cNvSpPr/>
             <p:nvPr/>
           </p:nvSpPr>
@@ -3116,7 +3436,7 @@
         </p:sp>
         <p:sp>
           <p:nvSpPr>
-            <p:cNvPr id="18" name="Ellipse 18"/>
+            <p:cNvPr id="22" name="Ellipse 22"/>
             <p:cNvSpPr/>
             <p:nvPr/>
           </p:nvSpPr>
@@ -3138,7 +3458,7 @@
         </p:sp>
         <p:sp>
           <p:nvSpPr>
-            <p:cNvPr id="19" name="TextBox 19"/>
+            <p:cNvPr id="23" name="TextBox 23"/>
             <p:cNvSpPr txBox="1"/>
             <p:nvPr/>
           </p:nvSpPr>
@@ -3178,7 +3498,7 @@
         </p:sp>
         <p:sp>
           <p:nvSpPr>
-            <p:cNvPr id="20" name="TextBox 20"/>
+            <p:cNvPr id="24" name="TextBox 24"/>
             <p:cNvSpPr txBox="1"/>
             <p:nvPr/>
           </p:nvSpPr>
@@ -3218,7 +3538,7 @@
         </p:sp>
         <p:sp>
           <p:nvSpPr>
-            <p:cNvPr id="21" name="TextBox 21"/>
+            <p:cNvPr id="25" name="TextBox 25"/>
             <p:cNvSpPr txBox="1"/>
             <p:nvPr/>
           </p:nvSpPr>
@@ -3258,7 +3578,7 @@
         </p:sp>
         <p:sp>
           <p:nvSpPr>
-            <p:cNvPr id="22" name="Line 22"/>
+            <p:cNvPr id="26" name="Line 26"/>
             <p:cNvSpPr/>
             <p:nvPr/>
           </p:nvSpPr>
@@ -3294,14 +3614,14 @@
         </p:sp>
         <p:sp>
           <p:nvSpPr>
-            <p:cNvPr id="23" name="TextBox 23"/>
+            <p:cNvPr id="27" name="TextBox 27"/>
             <p:cNvSpPr txBox="1"/>
             <p:nvPr/>
           </p:nvSpPr>
           <p:spPr>
             <a:xfrm>
               <a:off x="448056" y="5406390"/>
-              <a:ext cx="5906567" cy="352044"/>
+              <a:ext cx="6633515" cy="352044"/>
             </a:xfrm>
             <a:prstGeom prst="rect">
               <a:avLst/>
@@ -3327,21 +3647,21 @@
                   <a:ea typeface="+mn-ea"/>
                   <a:cs typeface="+mn-cs"/>
                 </a:rPr>
-                <a:t>拟≥3次独立操作重复/核心条件；拟≥8h连续台架记录。</a:t>
+                <a:t>两类型×三供压×三程度×三次操作：拟54次；正常/切换另做。</a:t>
               </a:r>
             </a:p>
           </p:txBody>
         </p:sp>
         <p:sp>
           <p:nvSpPr>
-            <p:cNvPr id="24" name="TextBox 24"/>
+            <p:cNvPr id="28" name="TextBox 28"/>
             <p:cNvSpPr txBox="1"/>
             <p:nvPr/>
           </p:nvSpPr>
           <p:spPr>
             <a:xfrm>
               <a:off x="450342" y="5855018"/>
-              <a:ext cx="5929255" cy="264033"/>
+              <a:ext cx="6029211" cy="264033"/>
             </a:xfrm>
             <a:prstGeom prst="rect">
               <a:avLst/>
@@ -3367,7 +3687,7 @@
                   <a:ea typeface="+mn-ea"/>
                   <a:cs typeface="+mn-cs"/>
                 </a:rPr>
-                <a:t>田间无故障标签时，仅报告正常运行适应性；数量/时长提交前核对资源。</a:t>
+                <a:t>拟8h连续台架及恢复检查；现场无故障标签只验适应性；提交前核对资源。</a:t>
               </a:r>
             </a:p>
           </p:txBody>
@@ -3418,7 +3738,7 @@
         <p:spPr>
           <a:xfrm>
             <a:off x="451104" y="289560"/>
-            <a:ext cx="2112264" cy="234696"/>
+            <a:ext cx="1143000" cy="234696"/>
           </a:xfrm>
           <a:prstGeom prst="rect">
             <a:avLst/>
@@ -3444,35 +3764,195 @@
                 <a:ea typeface="+mn-ea"/>
                 <a:cs typeface="+mn-cs"/>
               </a:rPr>
-              <a:t>拟定进度与预算｜非采购报价</a:t>
+              <a:t>拟定进度和预算</a:t>
+            </a:r>
+          </a:p>
+        </p:txBody>
+      </p:sp>
+      <p:sp>
+        <p:nvSpPr>
+          <p:cNvPr id="3" name="page-route-0"/>
+          <p:cNvSpPr txBox="1"/>
+          <p:nvPr/>
+        </p:nvSpPr>
+        <p:spPr>
+          <a:xfrm>
+            <a:off x="7518654" y="289560"/>
+            <a:ext cx="335280" cy="234696"/>
+          </a:xfrm>
+          <a:prstGeom prst="rect">
+            <a:avLst/>
+          </a:prstGeom>
+          <a:noFill/>
+          <a:ln>
+            <a:noFill/>
+          </a:ln>
+        </p:spPr>
+        <p:txBody>
+          <a:bodyPr wrap="none" lIns="0" tIns="0" rIns="0" bIns="0" anchor="t" anchorCtr="0">
+            <a:spAutoFit/>
+          </a:bodyPr>
+          <a:lstStyle/>
+          <a:p>
+            <a:pPr algn="l"/>
+            <a:r>
+              <a:rPr lang="zh-CN" sz="1200" dirty="0">
+                <a:solidFill>
+                  <a:schemeClr val="accent5"/>
+                </a:solidFill>
+                <a:latin typeface="+mn-lt"/>
+                <a:ea typeface="+mn-ea"/>
+                <a:cs typeface="+mn-cs"/>
+              </a:rPr>
+              <a:t>场景</a:t>
+            </a:r>
+          </a:p>
+        </p:txBody>
+      </p:sp>
+      <p:sp>
+        <p:nvSpPr>
+          <p:cNvPr id="4" name="page-route-1"/>
+          <p:cNvSpPr txBox="1"/>
+          <p:nvPr/>
+        </p:nvSpPr>
+        <p:spPr>
+          <a:xfrm>
+            <a:off x="8404479" y="289560"/>
+            <a:ext cx="335280" cy="234696"/>
+          </a:xfrm>
+          <a:prstGeom prst="rect">
+            <a:avLst/>
+          </a:prstGeom>
+          <a:noFill/>
+          <a:ln>
+            <a:noFill/>
+          </a:ln>
+        </p:spPr>
+        <p:txBody>
+          <a:bodyPr wrap="none" lIns="0" tIns="0" rIns="0" bIns="0" anchor="t" anchorCtr="0">
+            <a:spAutoFit/>
+          </a:bodyPr>
+          <a:lstStyle/>
+          <a:p>
+            <a:pPr algn="l"/>
+            <a:r>
+              <a:rPr lang="zh-CN" sz="1200" dirty="0">
+                <a:solidFill>
+                  <a:schemeClr val="accent5"/>
+                </a:solidFill>
+                <a:latin typeface="+mn-lt"/>
+                <a:ea typeface="+mn-ea"/>
+                <a:cs typeface="+mn-cs"/>
+              </a:rPr>
+              <a:t>系统</a:t>
+            </a:r>
+          </a:p>
+        </p:txBody>
+      </p:sp>
+      <p:sp>
+        <p:nvSpPr>
+          <p:cNvPr id="5" name="page-route-2"/>
+          <p:cNvSpPr txBox="1"/>
+          <p:nvPr/>
+        </p:nvSpPr>
+        <p:spPr>
+          <a:xfrm>
+            <a:off x="9290304" y="289560"/>
+            <a:ext cx="335280" cy="234696"/>
+          </a:xfrm>
+          <a:prstGeom prst="rect">
+            <a:avLst/>
+          </a:prstGeom>
+          <a:noFill/>
+          <a:ln>
+            <a:noFill/>
+          </a:ln>
+        </p:spPr>
+        <p:txBody>
+          <a:bodyPr wrap="none" lIns="0" tIns="0" rIns="0" bIns="0" anchor="t" anchorCtr="0">
+            <a:spAutoFit/>
+          </a:bodyPr>
+          <a:lstStyle/>
+          <a:p>
+            <a:pPr algn="l"/>
+            <a:r>
+              <a:rPr lang="zh-CN" sz="1200" dirty="0">
+                <a:solidFill>
+                  <a:schemeClr val="accent5"/>
+                </a:solidFill>
+                <a:latin typeface="+mn-lt"/>
+                <a:ea typeface="+mn-ea"/>
+                <a:cs typeface="+mn-cs"/>
+              </a:rPr>
+              <a:t>证据</a:t>
+            </a:r>
+          </a:p>
+        </p:txBody>
+      </p:sp>
+      <p:sp>
+        <p:nvSpPr>
+          <p:cNvPr id="6" name="page-route-3"/>
+          <p:cNvSpPr txBox="1"/>
+          <p:nvPr/>
+        </p:nvSpPr>
+        <p:spPr>
+          <a:xfrm>
+            <a:off x="10176129" y="289560"/>
+            <a:ext cx="335280" cy="234696"/>
+          </a:xfrm>
+          <a:prstGeom prst="rect">
+            <a:avLst/>
+          </a:prstGeom>
+          <a:noFill/>
+          <a:ln>
+            <a:noFill/>
+          </a:ln>
+        </p:spPr>
+        <p:txBody>
+          <a:bodyPr wrap="none" lIns="0" tIns="0" rIns="0" bIns="0" anchor="t" anchorCtr="0">
+            <a:spAutoFit/>
+          </a:bodyPr>
+          <a:lstStyle/>
+          <a:p>
+            <a:pPr algn="l"/>
+            <a:r>
+              <a:rPr lang="zh-CN" sz="1200" b="1" dirty="0">
+                <a:solidFill>
+                  <a:schemeClr val="accent1"/>
+                </a:solidFill>
+                <a:latin typeface="+mn-lt"/>
+                <a:ea typeface="+mn-ea"/>
+                <a:cs typeface="+mn-cs"/>
+              </a:rPr>
+              <a:t>实施</a:t>
             </a:r>
           </a:p>
         </p:txBody>
       </p:sp>
       <p:grpSp>
         <p:nvGrpSpPr>
-          <p:cNvPr id="4" name="page-title"/>
+          <p:cNvPr id="8" name="page-title"/>
           <p:cNvGrpSpPr/>
           <p:nvPr/>
         </p:nvGrpSpPr>
         <p:grpSpPr>
           <a:xfrm>
             <a:off x="441198" y="812483"/>
-            <a:ext cx="6053557" cy="616077"/>
+            <a:ext cx="5205451" cy="616077"/>
             <a:chOff x="441198" y="812483"/>
-            <a:chExt cx="6053557" cy="616077"/>
+            <a:chExt cx="5205451" cy="616077"/>
           </a:xfrm>
         </p:grpSpPr>
         <p:sp>
           <p:nvSpPr>
-            <p:cNvPr id="3" name="TextBox 3"/>
+            <p:cNvPr id="7" name="TextBox 7"/>
             <p:cNvSpPr txBox="1"/>
             <p:nvPr/>
           </p:nvSpPr>
           <p:spPr>
             <a:xfrm>
               <a:off x="441198" y="812483"/>
-              <a:ext cx="6053557" cy="616077"/>
+              <a:ext cx="5205451" cy="616077"/>
             </a:xfrm>
             <a:prstGeom prst="rect">
               <a:avLst/>
@@ -3498,7 +3978,7 @@
                   <a:ea typeface="+mj-ea"/>
                   <a:cs typeface="+mj-cs"/>
                 </a:rPr>
-                <a:t>一年有阶段门槛，2000元先启动</a:t>
+                <a:t>一年有门槛，2000元先启动</a:t>
               </a:r>
             </a:p>
           </p:txBody>
@@ -3506,7 +3986,7 @@
       </p:grpSp>
       <p:sp>
         <p:nvSpPr>
-          <p:cNvPr id="5" name="Line 5"/>
+          <p:cNvPr id="9" name="Line 9"/>
           <p:cNvSpPr/>
           <p:nvPr/>
         </p:nvSpPr>
@@ -3542,7 +4022,7 @@
       </p:sp>
       <p:sp>
         <p:nvSpPr>
-          <p:cNvPr id="6" name="source-footer"/>
+          <p:cNvPr id="10" name="source-footer"/>
           <p:cNvSpPr txBox="1"/>
           <p:nvPr/>
         </p:nvSpPr>
@@ -3575,14 +4055,14 @@
                 <a:ea typeface="+mn-ea"/>
                 <a:cs typeface="+mn-cs"/>
               </a:rPr>
-              <a:t>预算为启动额度估算，非采购报价；进度与性能承诺须正式申报前经导师和资源核对。</a:t>
+              <a:t>额度估算，非报价；已有电脑且借参考仪器为前提，任务及数值须提交前由导师核对。</a:t>
             </a:r>
           </a:p>
         </p:txBody>
       </p:sp>
       <p:sp>
         <p:nvSpPr>
-          <p:cNvPr id="7" name="page-number"/>
+          <p:cNvPr id="11" name="page-number"/>
           <p:cNvSpPr txBox="1"/>
           <p:nvPr/>
         </p:nvSpPr>
@@ -3622,7 +4102,7 @@
       </p:sp>
       <p:grpSp>
         <p:nvGrpSpPr>
-          <p:cNvPr id="20" name="project-schedule"/>
+          <p:cNvPr id="24" name="project-schedule"/>
           <p:cNvGrpSpPr/>
           <p:nvPr/>
         </p:nvGrpSpPr>
@@ -3636,7 +4116,7 @@
         </p:grpSpPr>
         <p:sp>
           <p:nvSpPr>
-            <p:cNvPr id="8" name="TextBox 8"/>
+            <p:cNvPr id="12" name="TextBox 12"/>
             <p:cNvSpPr txBox="1"/>
             <p:nvPr/>
           </p:nvSpPr>
@@ -3676,7 +4156,7 @@
         </p:sp>
         <p:sp>
           <p:nvSpPr>
-            <p:cNvPr id="9" name="TextBox 9"/>
+            <p:cNvPr id="13" name="TextBox 13"/>
             <p:cNvSpPr txBox="1"/>
             <p:nvPr/>
           </p:nvSpPr>
@@ -3716,7 +4196,7 @@
         </p:sp>
         <p:sp>
           <p:nvSpPr>
-            <p:cNvPr id="10" name="Line 10"/>
+            <p:cNvPr id="14" name="Line 14"/>
             <p:cNvSpPr/>
             <p:nvPr/>
           </p:nvSpPr>
@@ -3752,7 +4232,7 @@
         </p:sp>
         <p:sp>
           <p:nvSpPr>
-            <p:cNvPr id="11" name="TextBox 11"/>
+            <p:cNvPr id="15" name="TextBox 15"/>
             <p:cNvSpPr txBox="1"/>
             <p:nvPr/>
           </p:nvSpPr>
@@ -3792,7 +4272,7 @@
         </p:sp>
         <p:sp>
           <p:nvSpPr>
-            <p:cNvPr id="12" name="TextBox 12"/>
+            <p:cNvPr id="16" name="TextBox 16"/>
             <p:cNvSpPr txBox="1"/>
             <p:nvPr/>
           </p:nvSpPr>
@@ -3832,7 +4312,7 @@
         </p:sp>
         <p:sp>
           <p:nvSpPr>
-            <p:cNvPr id="13" name="Line 13"/>
+            <p:cNvPr id="17" name="Line 17"/>
             <p:cNvSpPr/>
             <p:nvPr/>
           </p:nvSpPr>
@@ -3868,7 +4348,7 @@
         </p:sp>
         <p:sp>
           <p:nvSpPr>
-            <p:cNvPr id="14" name="TextBox 14"/>
+            <p:cNvPr id="18" name="TextBox 18"/>
             <p:cNvSpPr txBox="1"/>
             <p:nvPr/>
           </p:nvSpPr>
@@ -3908,7 +4388,7 @@
         </p:sp>
         <p:sp>
           <p:nvSpPr>
-            <p:cNvPr id="15" name="TextBox 15"/>
+            <p:cNvPr id="19" name="TextBox 19"/>
             <p:cNvSpPr txBox="1"/>
             <p:nvPr/>
           </p:nvSpPr>
@@ -3948,7 +4428,7 @@
         </p:sp>
         <p:sp>
           <p:nvSpPr>
-            <p:cNvPr id="16" name="Line 16"/>
+            <p:cNvPr id="20" name="Line 20"/>
             <p:cNvSpPr/>
             <p:nvPr/>
           </p:nvSpPr>
@@ -3984,7 +4464,7 @@
         </p:sp>
         <p:sp>
           <p:nvSpPr>
-            <p:cNvPr id="17" name="TextBox 17"/>
+            <p:cNvPr id="21" name="TextBox 21"/>
             <p:cNvSpPr txBox="1"/>
             <p:nvPr/>
           </p:nvSpPr>
@@ -4024,7 +4504,7 @@
         </p:sp>
         <p:sp>
           <p:nvSpPr>
-            <p:cNvPr id="18" name="TextBox 18"/>
+            <p:cNvPr id="22" name="TextBox 22"/>
             <p:cNvSpPr txBox="1"/>
             <p:nvPr/>
           </p:nvSpPr>
@@ -4064,7 +4544,7 @@
         </p:sp>
         <p:sp>
           <p:nvSpPr>
-            <p:cNvPr id="19" name="Line 19"/>
+            <p:cNvPr id="23" name="Line 23"/>
             <p:cNvSpPr/>
             <p:nvPr/>
           </p:nvSpPr>
@@ -4101,7 +4581,7 @@
       </p:grpSp>
       <p:grpSp>
         <p:nvGrpSpPr>
-          <p:cNvPr id="26" name="startup-budget"/>
+          <p:cNvPr id="30" name="startup-budget"/>
           <p:cNvGrpSpPr/>
           <p:nvPr/>
         </p:nvGrpSpPr>
@@ -4115,7 +4595,7 @@
         </p:grpSpPr>
         <p:sp>
           <p:nvSpPr>
-            <p:cNvPr id="21" name="Rectangle 21"/>
+            <p:cNvPr id="25" name="Rectangle 25"/>
             <p:cNvSpPr/>
             <p:nvPr/>
           </p:nvSpPr>
@@ -4137,7 +4617,7 @@
         </p:sp>
         <p:sp>
           <p:nvSpPr>
-            <p:cNvPr id="22" name="TextBox 22"/>
+            <p:cNvPr id="26" name="TextBox 26"/>
             <p:cNvSpPr txBox="1"/>
             <p:nvPr/>
           </p:nvSpPr>
@@ -4177,7 +4657,7 @@
         </p:sp>
         <p:sp>
           <p:nvSpPr>
-            <p:cNvPr id="23" name="TextBox 23"/>
+            <p:cNvPr id="27" name="TextBox 27"/>
             <p:cNvSpPr txBox="1"/>
             <p:nvPr/>
           </p:nvSpPr>
@@ -4217,7 +4697,7 @@
         </p:sp>
         <p:sp>
           <p:nvSpPr>
-            <p:cNvPr id="24" name="TextBox 24"/>
+            <p:cNvPr id="28" name="TextBox 28"/>
             <p:cNvSpPr txBox="1"/>
             <p:nvPr/>
           </p:nvSpPr>
@@ -4254,7 +4734,7 @@
                   <a:ea typeface="+mn-ea"/>
                   <a:cs typeface="+mn-cs"/>
                 </a:rPr>
-                <a:t>电子无线260；传感450</a:t>
+                <a:t>电子无线260；传感500</a:t>
               </a:r>
               <a:br/>
               <a:r>
@@ -4278,14 +4758,14 @@
                   <a:ea typeface="+mn-ea"/>
                   <a:cs typeface="+mn-cs"/>
                 </a:rPr>
-                <a:t>记录耗材160；返工380</a:t>
+                <a:t>记录耗材130；返工360</a:t>
               </a:r>
             </a:p>
           </p:txBody>
         </p:sp>
         <p:sp>
           <p:nvSpPr>
-            <p:cNvPr id="25" name="TextBox 25"/>
+            <p:cNvPr id="29" name="TextBox 29"/>
             <p:cNvSpPr txBox="1"/>
             <p:nvPr/>
           </p:nvSpPr>
@@ -4385,7 +4865,7 @@
         <p:spPr>
           <a:xfrm>
             <a:off x="451104" y="289560"/>
-            <a:ext cx="1466088" cy="234696"/>
+            <a:ext cx="658368" cy="234696"/>
           </a:xfrm>
           <a:prstGeom prst="rect">
             <a:avLst/>
@@ -4411,35 +4891,195 @@
                 <a:ea typeface="+mn-ea"/>
                 <a:cs typeface="+mn-cs"/>
               </a:rPr>
-              <a:t>预期成果与立项目标</a:t>
+              <a:t>预期成果</a:t>
+            </a:r>
+          </a:p>
+        </p:txBody>
+      </p:sp>
+      <p:sp>
+        <p:nvSpPr>
+          <p:cNvPr id="3" name="page-route-0"/>
+          <p:cNvSpPr txBox="1"/>
+          <p:nvPr/>
+        </p:nvSpPr>
+        <p:spPr>
+          <a:xfrm>
+            <a:off x="7518654" y="289560"/>
+            <a:ext cx="335280" cy="234696"/>
+          </a:xfrm>
+          <a:prstGeom prst="rect">
+            <a:avLst/>
+          </a:prstGeom>
+          <a:noFill/>
+          <a:ln>
+            <a:noFill/>
+          </a:ln>
+        </p:spPr>
+        <p:txBody>
+          <a:bodyPr wrap="none" lIns="0" tIns="0" rIns="0" bIns="0" anchor="t" anchorCtr="0">
+            <a:spAutoFit/>
+          </a:bodyPr>
+          <a:lstStyle/>
+          <a:p>
+            <a:pPr algn="l"/>
+            <a:r>
+              <a:rPr lang="zh-CN" sz="1200" dirty="0">
+                <a:solidFill>
+                  <a:schemeClr val="accent5"/>
+                </a:solidFill>
+                <a:latin typeface="+mn-lt"/>
+                <a:ea typeface="+mn-ea"/>
+                <a:cs typeface="+mn-cs"/>
+              </a:rPr>
+              <a:t>场景</a:t>
+            </a:r>
+          </a:p>
+        </p:txBody>
+      </p:sp>
+      <p:sp>
+        <p:nvSpPr>
+          <p:cNvPr id="4" name="page-route-1"/>
+          <p:cNvSpPr txBox="1"/>
+          <p:nvPr/>
+        </p:nvSpPr>
+        <p:spPr>
+          <a:xfrm>
+            <a:off x="8404479" y="289560"/>
+            <a:ext cx="335280" cy="234696"/>
+          </a:xfrm>
+          <a:prstGeom prst="rect">
+            <a:avLst/>
+          </a:prstGeom>
+          <a:noFill/>
+          <a:ln>
+            <a:noFill/>
+          </a:ln>
+        </p:spPr>
+        <p:txBody>
+          <a:bodyPr wrap="none" lIns="0" tIns="0" rIns="0" bIns="0" anchor="t" anchorCtr="0">
+            <a:spAutoFit/>
+          </a:bodyPr>
+          <a:lstStyle/>
+          <a:p>
+            <a:pPr algn="l"/>
+            <a:r>
+              <a:rPr lang="zh-CN" sz="1200" dirty="0">
+                <a:solidFill>
+                  <a:schemeClr val="accent5"/>
+                </a:solidFill>
+                <a:latin typeface="+mn-lt"/>
+                <a:ea typeface="+mn-ea"/>
+                <a:cs typeface="+mn-cs"/>
+              </a:rPr>
+              <a:t>系统</a:t>
+            </a:r>
+          </a:p>
+        </p:txBody>
+      </p:sp>
+      <p:sp>
+        <p:nvSpPr>
+          <p:cNvPr id="5" name="page-route-2"/>
+          <p:cNvSpPr txBox="1"/>
+          <p:nvPr/>
+        </p:nvSpPr>
+        <p:spPr>
+          <a:xfrm>
+            <a:off x="9290304" y="289560"/>
+            <a:ext cx="335280" cy="234696"/>
+          </a:xfrm>
+          <a:prstGeom prst="rect">
+            <a:avLst/>
+          </a:prstGeom>
+          <a:noFill/>
+          <a:ln>
+            <a:noFill/>
+          </a:ln>
+        </p:spPr>
+        <p:txBody>
+          <a:bodyPr wrap="none" lIns="0" tIns="0" rIns="0" bIns="0" anchor="t" anchorCtr="0">
+            <a:spAutoFit/>
+          </a:bodyPr>
+          <a:lstStyle/>
+          <a:p>
+            <a:pPr algn="l"/>
+            <a:r>
+              <a:rPr lang="zh-CN" sz="1200" dirty="0">
+                <a:solidFill>
+                  <a:schemeClr val="accent5"/>
+                </a:solidFill>
+                <a:latin typeface="+mn-lt"/>
+                <a:ea typeface="+mn-ea"/>
+                <a:cs typeface="+mn-cs"/>
+              </a:rPr>
+              <a:t>证据</a:t>
+            </a:r>
+          </a:p>
+        </p:txBody>
+      </p:sp>
+      <p:sp>
+        <p:nvSpPr>
+          <p:cNvPr id="6" name="page-route-3"/>
+          <p:cNvSpPr txBox="1"/>
+          <p:nvPr/>
+        </p:nvSpPr>
+        <p:spPr>
+          <a:xfrm>
+            <a:off x="10176129" y="289560"/>
+            <a:ext cx="335280" cy="234696"/>
+          </a:xfrm>
+          <a:prstGeom prst="rect">
+            <a:avLst/>
+          </a:prstGeom>
+          <a:noFill/>
+          <a:ln>
+            <a:noFill/>
+          </a:ln>
+        </p:spPr>
+        <p:txBody>
+          <a:bodyPr wrap="none" lIns="0" tIns="0" rIns="0" bIns="0" anchor="t" anchorCtr="0">
+            <a:spAutoFit/>
+          </a:bodyPr>
+          <a:lstStyle/>
+          <a:p>
+            <a:pPr algn="l"/>
+            <a:r>
+              <a:rPr lang="zh-CN" sz="1200" b="1" dirty="0">
+                <a:solidFill>
+                  <a:schemeClr val="accent1"/>
+                </a:solidFill>
+                <a:latin typeface="+mn-lt"/>
+                <a:ea typeface="+mn-ea"/>
+                <a:cs typeface="+mn-cs"/>
+              </a:rPr>
+              <a:t>实施</a:t>
             </a:r>
           </a:p>
         </p:txBody>
       </p:sp>
       <p:grpSp>
         <p:nvGrpSpPr>
-          <p:cNvPr id="4" name="page-title"/>
+          <p:cNvPr id="8" name="page-title"/>
           <p:cNvGrpSpPr/>
           <p:nvPr/>
         </p:nvGrpSpPr>
         <p:grpSpPr>
           <a:xfrm>
             <a:off x="441198" y="812483"/>
-            <a:ext cx="7240905" cy="616077"/>
+            <a:ext cx="5544693" cy="616077"/>
             <a:chOff x="441198" y="812483"/>
-            <a:chExt cx="7240905" cy="616077"/>
+            <a:chExt cx="5544693" cy="616077"/>
           </a:xfrm>
         </p:grpSpPr>
         <p:sp>
           <p:nvSpPr>
-            <p:cNvPr id="3" name="TextBox 3"/>
+            <p:cNvPr id="7" name="TextBox 7"/>
             <p:cNvSpPr txBox="1"/>
             <p:nvPr/>
           </p:nvSpPr>
           <p:spPr>
             <a:xfrm>
               <a:off x="441198" y="812483"/>
-              <a:ext cx="7240905" cy="616077"/>
+              <a:ext cx="5544693" cy="616077"/>
             </a:xfrm>
             <a:prstGeom prst="rect">
               <a:avLst/>
@@ -4465,7 +5105,7 @@
                   <a:ea typeface="+mj-ea"/>
                   <a:cs typeface="+mj-cs"/>
                 </a:rPr>
-                <a:t>用系统成果结项，用研究证据支撑论文</a:t>
+                <a:t>系统交付与研究证据一起验收</a:t>
               </a:r>
             </a:p>
           </p:txBody>
@@ -4473,7 +5113,7 @@
       </p:grpSp>
       <p:sp>
         <p:nvSpPr>
-          <p:cNvPr id="5" name="Line 5"/>
+          <p:cNvPr id="9" name="Line 9"/>
           <p:cNvSpPr/>
           <p:nvPr/>
         </p:nvSpPr>
@@ -4509,7 +5149,7 @@
       </p:sp>
       <p:sp>
         <p:nvSpPr>
-          <p:cNvPr id="6" name="source-footer"/>
+          <p:cNvPr id="10" name="source-footer"/>
           <p:cNvSpPr txBox="1"/>
           <p:nvPr/>
         </p:nvSpPr>
@@ -4549,7 +5189,7 @@
       </p:sp>
       <p:sp>
         <p:nvSpPr>
-          <p:cNvPr id="7" name="page-number"/>
+          <p:cNvPr id="11" name="page-number"/>
           <p:cNvSpPr txBox="1"/>
           <p:nvPr/>
         </p:nvSpPr>
@@ -4589,7 +5229,7 @@
       </p:sp>
       <p:grpSp>
         <p:nvGrpSpPr>
-          <p:cNvPr id="15" name="project-deliverables"/>
+          <p:cNvPr id="19" name="project-deliverables"/>
           <p:cNvGrpSpPr/>
           <p:nvPr/>
         </p:nvGrpSpPr>
@@ -4603,7 +5243,7 @@
         </p:grpSpPr>
         <p:sp>
           <p:nvSpPr>
-            <p:cNvPr id="8" name="TextBox 8"/>
+            <p:cNvPr id="12" name="TextBox 12"/>
             <p:cNvSpPr txBox="1"/>
             <p:nvPr/>
           </p:nvSpPr>
@@ -4643,14 +5283,14 @@
         </p:sp>
         <p:sp>
           <p:nvSpPr>
-            <p:cNvPr id="9" name="TextBox 9"/>
+            <p:cNvPr id="13" name="TextBox 13"/>
             <p:cNvSpPr txBox="1"/>
             <p:nvPr/>
           </p:nvSpPr>
           <p:spPr>
             <a:xfrm>
               <a:off x="446532" y="2497455"/>
-              <a:ext cx="4247731" cy="410718"/>
+              <a:ext cx="5519890" cy="410718"/>
             </a:xfrm>
             <a:prstGeom prst="rect">
               <a:avLst/>
@@ -4676,14 +5316,14 @@
                   <a:ea typeface="+mn-ea"/>
                   <a:cs typeface="+mn-cs"/>
                 </a:rPr>
-                <a:t>1节点 + 1接收端 + 1套双支路台架</a:t>
+                <a:t>双压力流量节点 + 接收端 + 台架 + 管理软件</a:t>
               </a:r>
             </a:p>
           </p:txBody>
         </p:sp>
         <p:sp>
           <p:nvSpPr>
-            <p:cNvPr id="10" name="TextBox 10"/>
+            <p:cNvPr id="14" name="TextBox 14"/>
             <p:cNvSpPr txBox="1"/>
             <p:nvPr/>
           </p:nvSpPr>
@@ -4723,14 +5363,14 @@
         </p:sp>
         <p:sp>
           <p:nvSpPr>
-            <p:cNvPr id="11" name="TextBox 11"/>
+            <p:cNvPr id="15" name="TextBox 15"/>
             <p:cNvSpPr txBox="1"/>
             <p:nvPr/>
           </p:nvSpPr>
           <p:spPr>
             <a:xfrm>
               <a:off x="446532" y="3802380"/>
-              <a:ext cx="7399858" cy="410718"/>
+              <a:ext cx="7555344" cy="410718"/>
             </a:xfrm>
             <a:prstGeom prst="rect">
               <a:avLst/>
@@ -4756,14 +5396,14 @@
                   <a:ea typeface="+mn-ea"/>
                   <a:cs typeface="+mn-cs"/>
                 </a:rPr>
-                <a:t>标定/标签数据、检测/通信对照、复现软件、报告与论文稿</a:t>
+                <a:t>标定/标签、强基线/消融、提前量/失败案例、报告与论文稿</a:t>
               </a:r>
             </a:p>
           </p:txBody>
         </p:sp>
         <p:sp>
           <p:nvSpPr>
-            <p:cNvPr id="12" name="Rectangle 12"/>
+            <p:cNvPr id="16" name="Rectangle 16"/>
             <p:cNvSpPr/>
             <p:nvPr/>
           </p:nvSpPr>
@@ -4785,7 +5425,7 @@
         </p:sp>
         <p:sp>
           <p:nvSpPr>
-            <p:cNvPr id="13" name="TextBox 13"/>
+            <p:cNvPr id="17" name="TextBox 17"/>
             <p:cNvSpPr txBox="1"/>
             <p:nvPr/>
           </p:nvSpPr>
@@ -4825,7 +5465,7 @@
         </p:sp>
         <p:sp>
           <p:nvSpPr>
-            <p:cNvPr id="14" name="TextBox 14"/>
+            <p:cNvPr id="18" name="TextBox 18"/>
             <p:cNvSpPr txBox="1"/>
             <p:nvPr/>
           </p:nvSpPr>
@@ -4909,7 +5549,7 @@
         <p:spPr>
           <a:xfrm>
             <a:off x="451104" y="289560"/>
-            <a:ext cx="1304544" cy="234696"/>
+            <a:ext cx="1143000" cy="234696"/>
           </a:xfrm>
           <a:prstGeom prst="rect">
             <a:avLst/>
@@ -4935,14 +5575,174 @@
                 <a:ea typeface="+mn-ea"/>
                 <a:cs typeface="+mn-cs"/>
               </a:rPr>
-              <a:t>模型反例｜非实测</a:t>
+              <a:t>测量与辨因边界</a:t>
+            </a:r>
+          </a:p>
+        </p:txBody>
+      </p:sp>
+      <p:sp>
+        <p:nvSpPr>
+          <p:cNvPr id="3" name="page-route-0"/>
+          <p:cNvSpPr txBox="1"/>
+          <p:nvPr/>
+        </p:nvSpPr>
+        <p:spPr>
+          <a:xfrm>
+            <a:off x="7518654" y="289560"/>
+            <a:ext cx="335280" cy="234696"/>
+          </a:xfrm>
+          <a:prstGeom prst="rect">
+            <a:avLst/>
+          </a:prstGeom>
+          <a:noFill/>
+          <a:ln>
+            <a:noFill/>
+          </a:ln>
+        </p:spPr>
+        <p:txBody>
+          <a:bodyPr wrap="none" lIns="0" tIns="0" rIns="0" bIns="0" anchor="t" anchorCtr="0">
+            <a:spAutoFit/>
+          </a:bodyPr>
+          <a:lstStyle/>
+          <a:p>
+            <a:pPr algn="l"/>
+            <a:r>
+              <a:rPr lang="zh-CN" sz="1200" dirty="0">
+                <a:solidFill>
+                  <a:schemeClr val="accent5"/>
+                </a:solidFill>
+                <a:latin typeface="+mn-lt"/>
+                <a:ea typeface="+mn-ea"/>
+                <a:cs typeface="+mn-cs"/>
+              </a:rPr>
+              <a:t>场景</a:t>
+            </a:r>
+          </a:p>
+        </p:txBody>
+      </p:sp>
+      <p:sp>
+        <p:nvSpPr>
+          <p:cNvPr id="4" name="page-route-1"/>
+          <p:cNvSpPr txBox="1"/>
+          <p:nvPr/>
+        </p:nvSpPr>
+        <p:spPr>
+          <a:xfrm>
+            <a:off x="8404479" y="289560"/>
+            <a:ext cx="335280" cy="234696"/>
+          </a:xfrm>
+          <a:prstGeom prst="rect">
+            <a:avLst/>
+          </a:prstGeom>
+          <a:noFill/>
+          <a:ln>
+            <a:noFill/>
+          </a:ln>
+        </p:spPr>
+        <p:txBody>
+          <a:bodyPr wrap="none" lIns="0" tIns="0" rIns="0" bIns="0" anchor="t" anchorCtr="0">
+            <a:spAutoFit/>
+          </a:bodyPr>
+          <a:lstStyle/>
+          <a:p>
+            <a:pPr algn="l"/>
+            <a:r>
+              <a:rPr lang="zh-CN" sz="1200" dirty="0">
+                <a:solidFill>
+                  <a:schemeClr val="accent5"/>
+                </a:solidFill>
+                <a:latin typeface="+mn-lt"/>
+                <a:ea typeface="+mn-ea"/>
+                <a:cs typeface="+mn-cs"/>
+              </a:rPr>
+              <a:t>系统</a:t>
+            </a:r>
+          </a:p>
+        </p:txBody>
+      </p:sp>
+      <p:sp>
+        <p:nvSpPr>
+          <p:cNvPr id="5" name="page-route-2"/>
+          <p:cNvSpPr txBox="1"/>
+          <p:nvPr/>
+        </p:nvSpPr>
+        <p:spPr>
+          <a:xfrm>
+            <a:off x="9290304" y="289560"/>
+            <a:ext cx="335280" cy="234696"/>
+          </a:xfrm>
+          <a:prstGeom prst="rect">
+            <a:avLst/>
+          </a:prstGeom>
+          <a:noFill/>
+          <a:ln>
+            <a:noFill/>
+          </a:ln>
+        </p:spPr>
+        <p:txBody>
+          <a:bodyPr wrap="none" lIns="0" tIns="0" rIns="0" bIns="0" anchor="t" anchorCtr="0">
+            <a:spAutoFit/>
+          </a:bodyPr>
+          <a:lstStyle/>
+          <a:p>
+            <a:pPr algn="l"/>
+            <a:r>
+              <a:rPr lang="zh-CN" sz="1200" b="1" dirty="0">
+                <a:solidFill>
+                  <a:schemeClr val="accent1"/>
+                </a:solidFill>
+                <a:latin typeface="+mn-lt"/>
+                <a:ea typeface="+mn-ea"/>
+                <a:cs typeface="+mn-cs"/>
+              </a:rPr>
+              <a:t>证据</a:t>
+            </a:r>
+          </a:p>
+        </p:txBody>
+      </p:sp>
+      <p:sp>
+        <p:nvSpPr>
+          <p:cNvPr id="6" name="page-route-3"/>
+          <p:cNvSpPr txBox="1"/>
+          <p:nvPr/>
+        </p:nvSpPr>
+        <p:spPr>
+          <a:xfrm>
+            <a:off x="10176129" y="289560"/>
+            <a:ext cx="335280" cy="234696"/>
+          </a:xfrm>
+          <a:prstGeom prst="rect">
+            <a:avLst/>
+          </a:prstGeom>
+          <a:noFill/>
+          <a:ln>
+            <a:noFill/>
+          </a:ln>
+        </p:spPr>
+        <p:txBody>
+          <a:bodyPr wrap="none" lIns="0" tIns="0" rIns="0" bIns="0" anchor="t" anchorCtr="0">
+            <a:spAutoFit/>
+          </a:bodyPr>
+          <a:lstStyle/>
+          <a:p>
+            <a:pPr algn="l"/>
+            <a:r>
+              <a:rPr lang="zh-CN" sz="1200" dirty="0">
+                <a:solidFill>
+                  <a:schemeClr val="accent5"/>
+                </a:solidFill>
+                <a:latin typeface="+mn-lt"/>
+                <a:ea typeface="+mn-ea"/>
+                <a:cs typeface="+mn-cs"/>
+              </a:rPr>
+              <a:t>实施</a:t>
             </a:r>
           </a:p>
         </p:txBody>
       </p:sp>
       <p:grpSp>
         <p:nvGrpSpPr>
-          <p:cNvPr id="4" name="page-title"/>
+          <p:cNvPr id="8" name="page-title"/>
           <p:cNvGrpSpPr/>
           <p:nvPr/>
         </p:nvGrpSpPr>
@@ -4956,7 +5756,7 @@
         </p:grpSpPr>
         <p:sp>
           <p:nvSpPr>
-            <p:cNvPr id="3" name="TextBox 3"/>
+            <p:cNvPr id="7" name="TextBox 7"/>
             <p:cNvSpPr txBox="1"/>
             <p:nvPr/>
           </p:nvSpPr>
@@ -4989,7 +5789,7 @@
                   <a:ea typeface="+mj-ea"/>
                   <a:cs typeface="+mj-cs"/>
                 </a:rPr>
-                <a:t>备用｜单测点不等于故障原因诊断</a:t>
+                <a:t>备用｜诊断只在可辨识条件下成立</a:t>
               </a:r>
             </a:p>
           </p:txBody>
@@ -4997,7 +5797,7 @@
       </p:grpSp>
       <p:sp>
         <p:nvSpPr>
-          <p:cNvPr id="5" name="Line 5"/>
+          <p:cNvPr id="9" name="Line 9"/>
           <p:cNvSpPr/>
           <p:nvPr/>
         </p:nvSpPr>
@@ -5033,14 +5833,14 @@
       </p:sp>
       <p:sp>
         <p:nvSpPr>
-          <p:cNvPr id="6" name="source-footer"/>
+          <p:cNvPr id="10" name="source-footer"/>
           <p:cNvSpPr txBox="1"/>
           <p:nvPr/>
         </p:nvSpPr>
         <p:spPr>
           <a:xfrm>
             <a:off x="451104" y="6376035"/>
-            <a:ext cx="6554724" cy="234696"/>
+            <a:ext cx="6150864" cy="234696"/>
           </a:xfrm>
           <a:prstGeom prst="rect">
             <a:avLst/>
@@ -5066,14 +5866,14 @@
                 <a:ea typeface="+mn-ea"/>
                 <a:cs typeface="+mn-cs"/>
               </a:rPr>
-              <a:t>来源：audit_results/audit.json 的结构性反例；参数化等效模型，不代表每条实际管路。</a:t>
+              <a:t>来源：旧单点结构反例及新增双点模型；辨因依赖布点、操作信息、负载与测量质量。</a:t>
             </a:r>
           </a:p>
         </p:txBody>
       </p:sp>
       <p:sp>
         <p:nvSpPr>
-          <p:cNvPr id="7" name="page-number"/>
+          <p:cNvPr id="11" name="page-number"/>
           <p:cNvSpPr txBox="1"/>
           <p:nvPr/>
         </p:nvSpPr>
@@ -5113,21 +5913,21 @@
       </p:sp>
       <p:grpSp>
         <p:nvGrpSpPr>
-          <p:cNvPr id="13" name="observability-boundary"/>
+          <p:cNvPr id="17" name="observability-boundary"/>
           <p:cNvGrpSpPr/>
           <p:nvPr/>
         </p:nvGrpSpPr>
         <p:grpSpPr>
           <a:xfrm>
             <a:off x="441198" y="2088832"/>
-            <a:ext cx="7405192" cy="3829241"/>
+            <a:ext cx="6574688" cy="3829241"/>
             <a:chOff x="441198" y="2088832"/>
-            <a:chExt cx="7405192" cy="3829241"/>
+            <a:chExt cx="6574688" cy="3829241"/>
           </a:xfrm>
         </p:grpSpPr>
         <p:sp>
           <p:nvSpPr>
-            <p:cNvPr id="8" name="TextBox 8"/>
+            <p:cNvPr id="12" name="TextBox 12"/>
             <p:cNvSpPr txBox="1"/>
             <p:nvPr/>
           </p:nvSpPr>
@@ -5167,7 +5967,7 @@
         </p:sp>
         <p:sp>
           <p:nvSpPr>
-            <p:cNvPr id="9" name="TextBox 9"/>
+            <p:cNvPr id="13" name="TextBox 13"/>
             <p:cNvSpPr txBox="1"/>
             <p:nvPr/>
           </p:nvSpPr>
@@ -5207,14 +6007,14 @@
         </p:sp>
         <p:sp>
           <p:nvSpPr>
-            <p:cNvPr id="10" name="TextBox 10"/>
+            <p:cNvPr id="14" name="TextBox 14"/>
             <p:cNvSpPr txBox="1"/>
             <p:nvPr/>
           </p:nvSpPr>
           <p:spPr>
             <a:xfrm>
               <a:off x="446532" y="3754755"/>
-              <a:ext cx="7399858" cy="410718"/>
+              <a:ext cx="6569354" cy="410718"/>
             </a:xfrm>
             <a:prstGeom prst="rect">
               <a:avLst/>
@@ -5240,21 +6040,21 @@
                   <a:ea typeface="+mn-ea"/>
                   <a:cs typeface="+mn-cs"/>
                 </a:rPr>
-                <a:t>主要输出“异常、建议检查”；分类仅限有独立证据的工况。</a:t>
+                <a:t>新增P0可有条件改善；未知正常负载仍与泄漏同形。</a:t>
               </a:r>
             </a:p>
           </p:txBody>
         </p:sp>
         <p:sp>
           <p:nvSpPr>
-            <p:cNvPr id="11" name="TextBox 11"/>
+            <p:cNvPr id="15" name="TextBox 15"/>
             <p:cNvSpPr txBox="1"/>
             <p:nvPr/>
           </p:nvSpPr>
           <p:spPr>
             <a:xfrm>
               <a:off x="448056" y="4606290"/>
-              <a:ext cx="5146243" cy="352044"/>
+              <a:ext cx="6076188" cy="352044"/>
             </a:xfrm>
             <a:prstGeom prst="rect">
               <a:avLst/>
@@ -5280,14 +6080,14 @@
                   <a:ea typeface="+mn-ea"/>
                   <a:cs typeface="+mn-cs"/>
                 </a:rPr>
-                <a:t>共同阻力为零时，B支路切换也可不影响A测点。</a:t>
+                <a:t>位置只到监测支管区段；输出模式、待检查或数据无效。</a:t>
               </a:r>
             </a:p>
           </p:txBody>
         </p:sp>
         <p:sp>
           <p:nvSpPr>
-            <p:cNvPr id="12" name="TextBox 12"/>
+            <p:cNvPr id="16" name="TextBox 16"/>
             <p:cNvSpPr txBox="1"/>
             <p:nvPr/>
           </p:nvSpPr>
@@ -5371,7 +6171,7 @@
         <p:spPr>
           <a:xfrm>
             <a:off x="451104" y="289560"/>
-            <a:ext cx="658368" cy="234696"/>
+            <a:ext cx="1143000" cy="234696"/>
           </a:xfrm>
           <a:prstGeom prst="rect">
             <a:avLst/>
@@ -5397,35 +6197,195 @@
                 <a:ea typeface="+mn-ea"/>
                 <a:cs typeface="+mn-cs"/>
               </a:rPr>
-              <a:t>成果路线</a:t>
+              <a:t>三阶段执行标准</a:t>
+            </a:r>
+          </a:p>
+        </p:txBody>
+      </p:sp>
+      <p:sp>
+        <p:nvSpPr>
+          <p:cNvPr id="3" name="page-route-0"/>
+          <p:cNvSpPr txBox="1"/>
+          <p:nvPr/>
+        </p:nvSpPr>
+        <p:spPr>
+          <a:xfrm>
+            <a:off x="7518654" y="289560"/>
+            <a:ext cx="335280" cy="234696"/>
+          </a:xfrm>
+          <a:prstGeom prst="rect">
+            <a:avLst/>
+          </a:prstGeom>
+          <a:noFill/>
+          <a:ln>
+            <a:noFill/>
+          </a:ln>
+        </p:spPr>
+        <p:txBody>
+          <a:bodyPr wrap="none" lIns="0" tIns="0" rIns="0" bIns="0" anchor="t" anchorCtr="0">
+            <a:spAutoFit/>
+          </a:bodyPr>
+          <a:lstStyle/>
+          <a:p>
+            <a:pPr algn="l"/>
+            <a:r>
+              <a:rPr lang="zh-CN" sz="1200" dirty="0">
+                <a:solidFill>
+                  <a:schemeClr val="accent5"/>
+                </a:solidFill>
+                <a:latin typeface="+mn-lt"/>
+                <a:ea typeface="+mn-ea"/>
+                <a:cs typeface="+mn-cs"/>
+              </a:rPr>
+              <a:t>场景</a:t>
+            </a:r>
+          </a:p>
+        </p:txBody>
+      </p:sp>
+      <p:sp>
+        <p:nvSpPr>
+          <p:cNvPr id="4" name="page-route-1"/>
+          <p:cNvSpPr txBox="1"/>
+          <p:nvPr/>
+        </p:nvSpPr>
+        <p:spPr>
+          <a:xfrm>
+            <a:off x="8404479" y="289560"/>
+            <a:ext cx="335280" cy="234696"/>
+          </a:xfrm>
+          <a:prstGeom prst="rect">
+            <a:avLst/>
+          </a:prstGeom>
+          <a:noFill/>
+          <a:ln>
+            <a:noFill/>
+          </a:ln>
+        </p:spPr>
+        <p:txBody>
+          <a:bodyPr wrap="none" lIns="0" tIns="0" rIns="0" bIns="0" anchor="t" anchorCtr="0">
+            <a:spAutoFit/>
+          </a:bodyPr>
+          <a:lstStyle/>
+          <a:p>
+            <a:pPr algn="l"/>
+            <a:r>
+              <a:rPr lang="zh-CN" sz="1200" dirty="0">
+                <a:solidFill>
+                  <a:schemeClr val="accent5"/>
+                </a:solidFill>
+                <a:latin typeface="+mn-lt"/>
+                <a:ea typeface="+mn-ea"/>
+                <a:cs typeface="+mn-cs"/>
+              </a:rPr>
+              <a:t>系统</a:t>
+            </a:r>
+          </a:p>
+        </p:txBody>
+      </p:sp>
+      <p:sp>
+        <p:nvSpPr>
+          <p:cNvPr id="5" name="page-route-2"/>
+          <p:cNvSpPr txBox="1"/>
+          <p:nvPr/>
+        </p:nvSpPr>
+        <p:spPr>
+          <a:xfrm>
+            <a:off x="9290304" y="289560"/>
+            <a:ext cx="335280" cy="234696"/>
+          </a:xfrm>
+          <a:prstGeom prst="rect">
+            <a:avLst/>
+          </a:prstGeom>
+          <a:noFill/>
+          <a:ln>
+            <a:noFill/>
+          </a:ln>
+        </p:spPr>
+        <p:txBody>
+          <a:bodyPr wrap="none" lIns="0" tIns="0" rIns="0" bIns="0" anchor="t" anchorCtr="0">
+            <a:spAutoFit/>
+          </a:bodyPr>
+          <a:lstStyle/>
+          <a:p>
+            <a:pPr algn="l"/>
+            <a:r>
+              <a:rPr lang="zh-CN" sz="1200" dirty="0">
+                <a:solidFill>
+                  <a:schemeClr val="accent5"/>
+                </a:solidFill>
+                <a:latin typeface="+mn-lt"/>
+                <a:ea typeface="+mn-ea"/>
+                <a:cs typeface="+mn-cs"/>
+              </a:rPr>
+              <a:t>证据</a:t>
+            </a:r>
+          </a:p>
+        </p:txBody>
+      </p:sp>
+      <p:sp>
+        <p:nvSpPr>
+          <p:cNvPr id="6" name="page-route-3"/>
+          <p:cNvSpPr txBox="1"/>
+          <p:nvPr/>
+        </p:nvSpPr>
+        <p:spPr>
+          <a:xfrm>
+            <a:off x="10176129" y="289560"/>
+            <a:ext cx="335280" cy="234696"/>
+          </a:xfrm>
+          <a:prstGeom prst="rect">
+            <a:avLst/>
+          </a:prstGeom>
+          <a:noFill/>
+          <a:ln>
+            <a:noFill/>
+          </a:ln>
+        </p:spPr>
+        <p:txBody>
+          <a:bodyPr wrap="none" lIns="0" tIns="0" rIns="0" bIns="0" anchor="t" anchorCtr="0">
+            <a:spAutoFit/>
+          </a:bodyPr>
+          <a:lstStyle/>
+          <a:p>
+            <a:pPr algn="l"/>
+            <a:r>
+              <a:rPr lang="zh-CN" sz="1200" b="1" dirty="0">
+                <a:solidFill>
+                  <a:schemeClr val="accent1"/>
+                </a:solidFill>
+                <a:latin typeface="+mn-lt"/>
+                <a:ea typeface="+mn-ea"/>
+                <a:cs typeface="+mn-cs"/>
+              </a:rPr>
+              <a:t>实施</a:t>
             </a:r>
           </a:p>
         </p:txBody>
       </p:sp>
       <p:grpSp>
         <p:nvGrpSpPr>
-          <p:cNvPr id="4" name="page-title"/>
+          <p:cNvPr id="8" name="page-title"/>
           <p:cNvGrpSpPr/>
           <p:nvPr/>
         </p:nvGrpSpPr>
         <p:grpSpPr>
           <a:xfrm>
             <a:off x="441198" y="812483"/>
-            <a:ext cx="5968746" cy="616077"/>
+            <a:ext cx="6392799" cy="616077"/>
             <a:chOff x="441198" y="812483"/>
-            <a:chExt cx="5968746" cy="616077"/>
+            <a:chExt cx="6392799" cy="616077"/>
           </a:xfrm>
         </p:grpSpPr>
         <p:sp>
           <p:nvSpPr>
-            <p:cNvPr id="3" name="TextBox 3"/>
+            <p:cNvPr id="7" name="TextBox 7"/>
             <p:cNvSpPr txBox="1"/>
             <p:nvPr/>
           </p:nvSpPr>
           <p:spPr>
             <a:xfrm>
               <a:off x="441198" y="812483"/>
-              <a:ext cx="5968746" cy="616077"/>
+              <a:ext cx="6392799" cy="616077"/>
             </a:xfrm>
             <a:prstGeom prst="rect">
               <a:avLst/>
@@ -5451,7 +6411,7 @@
                   <a:ea typeface="+mj-ea"/>
                   <a:cs typeface="+mj-cs"/>
                 </a:rPr>
-                <a:t>备用｜三个阶段有不同完成标准</a:t>
+                <a:t>备用｜申报、结项和论文各有标准</a:t>
               </a:r>
             </a:p>
           </p:txBody>
@@ -5459,7 +6419,7 @@
       </p:grpSp>
       <p:sp>
         <p:nvSpPr>
-          <p:cNvPr id="5" name="Line 5"/>
+          <p:cNvPr id="9" name="Line 9"/>
           <p:cNvSpPr/>
           <p:nvPr/>
         </p:nvSpPr>
@@ -5495,7 +6455,7 @@
       </p:sp>
       <p:sp>
         <p:nvSpPr>
-          <p:cNvPr id="6" name="source-footer"/>
+          <p:cNvPr id="10" name="source-footer"/>
           <p:cNvSpPr txBox="1"/>
           <p:nvPr/>
         </p:nvSpPr>
@@ -5535,7 +6495,7 @@
       </p:sp>
       <p:sp>
         <p:nvSpPr>
-          <p:cNvPr id="7" name="page-number"/>
+          <p:cNvPr id="11" name="page-number"/>
           <p:cNvSpPr txBox="1"/>
           <p:nvPr/>
         </p:nvSpPr>
@@ -5575,7 +6535,7 @@
       </p:sp>
       <p:grpSp>
         <p:nvGrpSpPr>
-          <p:cNvPr id="18" name="three-phase-contract"/>
+          <p:cNvPr id="22" name="three-phase-contract"/>
           <p:cNvGrpSpPr/>
           <p:nvPr/>
         </p:nvGrpSpPr>
@@ -5589,7 +6549,7 @@
         </p:grpSpPr>
         <p:sp>
           <p:nvSpPr>
-            <p:cNvPr id="8" name="TextBox 8"/>
+            <p:cNvPr id="12" name="TextBox 12"/>
             <p:cNvSpPr txBox="1"/>
             <p:nvPr/>
           </p:nvSpPr>
@@ -5629,14 +6589,14 @@
         </p:sp>
         <p:sp>
           <p:nvSpPr>
-            <p:cNvPr id="9" name="TextBox 9"/>
+            <p:cNvPr id="13" name="TextBox 13"/>
             <p:cNvSpPr txBox="1"/>
             <p:nvPr/>
           </p:nvSpPr>
           <p:spPr>
             <a:xfrm>
               <a:off x="2286381" y="2034540"/>
-              <a:ext cx="4828261" cy="352044"/>
+              <a:ext cx="4864608" cy="352044"/>
             </a:xfrm>
             <a:prstGeom prst="rect">
               <a:avLst/>
@@ -5662,14 +6622,14 @@
                   <a:ea typeface="+mn-ea"/>
                   <a:cs typeface="+mn-cs"/>
                 </a:rPr>
-                <a:t>模型论证 + 三工作包 + 可执行实验/资源计划</a:t>
+                <a:t>九节模板 + 四工作包 + 证据 + 实验/资源计划</a:t>
               </a:r>
             </a:p>
           </p:txBody>
         </p:sp>
         <p:sp>
           <p:nvSpPr>
-            <p:cNvPr id="10" name="Line 10"/>
+            <p:cNvPr id="14" name="Line 14"/>
             <p:cNvSpPr/>
             <p:nvPr/>
           </p:nvSpPr>
@@ -5705,7 +6665,7 @@
         </p:sp>
         <p:sp>
           <p:nvSpPr>
-            <p:cNvPr id="11" name="TextBox 11"/>
+            <p:cNvPr id="15" name="TextBox 15"/>
             <p:cNvSpPr txBox="1"/>
             <p:nvPr/>
           </p:nvSpPr>
@@ -5745,7 +6705,7 @@
         </p:sp>
         <p:sp>
           <p:nvSpPr>
-            <p:cNvPr id="12" name="TextBox 12"/>
+            <p:cNvPr id="16" name="TextBox 16"/>
             <p:cNvSpPr txBox="1"/>
             <p:nvPr/>
           </p:nvSpPr>
@@ -5785,7 +6745,7 @@
         </p:sp>
         <p:sp>
           <p:nvSpPr>
-            <p:cNvPr id="13" name="Line 13"/>
+            <p:cNvPr id="17" name="Line 17"/>
             <p:cNvSpPr/>
             <p:nvPr/>
           </p:nvSpPr>
@@ -5821,7 +6781,7 @@
         </p:sp>
         <p:sp>
           <p:nvSpPr>
-            <p:cNvPr id="14" name="TextBox 14"/>
+            <p:cNvPr id="18" name="TextBox 18"/>
             <p:cNvSpPr txBox="1"/>
             <p:nvPr/>
           </p:nvSpPr>
@@ -5861,7 +6821,7 @@
         </p:sp>
         <p:sp>
           <p:nvSpPr>
-            <p:cNvPr id="15" name="TextBox 15"/>
+            <p:cNvPr id="19" name="TextBox 19"/>
             <p:cNvSpPr txBox="1"/>
             <p:nvPr/>
           </p:nvSpPr>
@@ -5901,7 +6861,7 @@
         </p:sp>
         <p:sp>
           <p:nvSpPr>
-            <p:cNvPr id="16" name="Line 16"/>
+            <p:cNvPr id="20" name="Line 20"/>
             <p:cNvSpPr/>
             <p:nvPr/>
           </p:nvSpPr>
@@ -5937,7 +6897,7 @@
         </p:sp>
         <p:sp>
           <p:nvSpPr>
-            <p:cNvPr id="17" name="TextBox 17"/>
+            <p:cNvPr id="21" name="TextBox 21"/>
             <p:cNvSpPr txBox="1"/>
             <p:nvPr/>
           </p:nvSpPr>
@@ -5970,7 +6930,7 @@
                   <a:ea typeface="+mn-ea"/>
                   <a:cs typeface="+mn-cs"/>
                 </a:rPr>
-                <a:t>优先论文主线：可靠告警约束下的通信取舍；增量不足时据实调整。</a:t>
+                <a:t>论文优先：渐进故障辨识边界；可靠通信为另一候选，不保证发表。</a:t>
               </a:r>
             </a:p>
           </p:txBody>
@@ -6021,7 +6981,7 @@
         <p:spPr>
           <a:xfrm>
             <a:off x="451104" y="289560"/>
-            <a:ext cx="1466088" cy="234696"/>
+            <a:ext cx="819912" cy="234696"/>
           </a:xfrm>
           <a:prstGeom prst="rect">
             <a:avLst/>
@@ -6047,14 +7007,174 @@
                 <a:ea typeface="+mn-ea"/>
                 <a:cs typeface="+mn-cs"/>
               </a:rPr>
-              <a:t>公开文献与本地复现</a:t>
+              <a:t>来源与证据</a:t>
+            </a:r>
+          </a:p>
+        </p:txBody>
+      </p:sp>
+      <p:sp>
+        <p:nvSpPr>
+          <p:cNvPr id="3" name="page-route-0"/>
+          <p:cNvSpPr txBox="1"/>
+          <p:nvPr/>
+        </p:nvSpPr>
+        <p:spPr>
+          <a:xfrm>
+            <a:off x="7518654" y="289560"/>
+            <a:ext cx="335280" cy="234696"/>
+          </a:xfrm>
+          <a:prstGeom prst="rect">
+            <a:avLst/>
+          </a:prstGeom>
+          <a:noFill/>
+          <a:ln>
+            <a:noFill/>
+          </a:ln>
+        </p:spPr>
+        <p:txBody>
+          <a:bodyPr wrap="none" lIns="0" tIns="0" rIns="0" bIns="0" anchor="t" anchorCtr="0">
+            <a:spAutoFit/>
+          </a:bodyPr>
+          <a:lstStyle/>
+          <a:p>
+            <a:pPr algn="l"/>
+            <a:r>
+              <a:rPr lang="zh-CN" sz="1200" dirty="0">
+                <a:solidFill>
+                  <a:schemeClr val="accent5"/>
+                </a:solidFill>
+                <a:latin typeface="+mn-lt"/>
+                <a:ea typeface="+mn-ea"/>
+                <a:cs typeface="+mn-cs"/>
+              </a:rPr>
+              <a:t>场景</a:t>
+            </a:r>
+          </a:p>
+        </p:txBody>
+      </p:sp>
+      <p:sp>
+        <p:nvSpPr>
+          <p:cNvPr id="4" name="page-route-1"/>
+          <p:cNvSpPr txBox="1"/>
+          <p:nvPr/>
+        </p:nvSpPr>
+        <p:spPr>
+          <a:xfrm>
+            <a:off x="8404479" y="289560"/>
+            <a:ext cx="335280" cy="234696"/>
+          </a:xfrm>
+          <a:prstGeom prst="rect">
+            <a:avLst/>
+          </a:prstGeom>
+          <a:noFill/>
+          <a:ln>
+            <a:noFill/>
+          </a:ln>
+        </p:spPr>
+        <p:txBody>
+          <a:bodyPr wrap="none" lIns="0" tIns="0" rIns="0" bIns="0" anchor="t" anchorCtr="0">
+            <a:spAutoFit/>
+          </a:bodyPr>
+          <a:lstStyle/>
+          <a:p>
+            <a:pPr algn="l"/>
+            <a:r>
+              <a:rPr lang="zh-CN" sz="1200" dirty="0">
+                <a:solidFill>
+                  <a:schemeClr val="accent5"/>
+                </a:solidFill>
+                <a:latin typeface="+mn-lt"/>
+                <a:ea typeface="+mn-ea"/>
+                <a:cs typeface="+mn-cs"/>
+              </a:rPr>
+              <a:t>系统</a:t>
+            </a:r>
+          </a:p>
+        </p:txBody>
+      </p:sp>
+      <p:sp>
+        <p:nvSpPr>
+          <p:cNvPr id="5" name="page-route-2"/>
+          <p:cNvSpPr txBox="1"/>
+          <p:nvPr/>
+        </p:nvSpPr>
+        <p:spPr>
+          <a:xfrm>
+            <a:off x="9290304" y="289560"/>
+            <a:ext cx="335280" cy="234696"/>
+          </a:xfrm>
+          <a:prstGeom prst="rect">
+            <a:avLst/>
+          </a:prstGeom>
+          <a:noFill/>
+          <a:ln>
+            <a:noFill/>
+          </a:ln>
+        </p:spPr>
+        <p:txBody>
+          <a:bodyPr wrap="none" lIns="0" tIns="0" rIns="0" bIns="0" anchor="t" anchorCtr="0">
+            <a:spAutoFit/>
+          </a:bodyPr>
+          <a:lstStyle/>
+          <a:p>
+            <a:pPr algn="l"/>
+            <a:r>
+              <a:rPr lang="zh-CN" sz="1200" b="1" dirty="0">
+                <a:solidFill>
+                  <a:schemeClr val="accent1"/>
+                </a:solidFill>
+                <a:latin typeface="+mn-lt"/>
+                <a:ea typeface="+mn-ea"/>
+                <a:cs typeface="+mn-cs"/>
+              </a:rPr>
+              <a:t>证据</a:t>
+            </a:r>
+          </a:p>
+        </p:txBody>
+      </p:sp>
+      <p:sp>
+        <p:nvSpPr>
+          <p:cNvPr id="6" name="page-route-3"/>
+          <p:cNvSpPr txBox="1"/>
+          <p:nvPr/>
+        </p:nvSpPr>
+        <p:spPr>
+          <a:xfrm>
+            <a:off x="10176129" y="289560"/>
+            <a:ext cx="335280" cy="234696"/>
+          </a:xfrm>
+          <a:prstGeom prst="rect">
+            <a:avLst/>
+          </a:prstGeom>
+          <a:noFill/>
+          <a:ln>
+            <a:noFill/>
+          </a:ln>
+        </p:spPr>
+        <p:txBody>
+          <a:bodyPr wrap="none" lIns="0" tIns="0" rIns="0" bIns="0" anchor="t" anchorCtr="0">
+            <a:spAutoFit/>
+          </a:bodyPr>
+          <a:lstStyle/>
+          <a:p>
+            <a:pPr algn="l"/>
+            <a:r>
+              <a:rPr lang="zh-CN" sz="1200" dirty="0">
+                <a:solidFill>
+                  <a:schemeClr val="accent5"/>
+                </a:solidFill>
+                <a:latin typeface="+mn-lt"/>
+                <a:ea typeface="+mn-ea"/>
+                <a:cs typeface="+mn-cs"/>
+              </a:rPr>
+              <a:t>实施</a:t>
             </a:r>
           </a:p>
         </p:txBody>
       </p:sp>
       <p:grpSp>
         <p:nvGrpSpPr>
-          <p:cNvPr id="4" name="page-title"/>
+          <p:cNvPr id="8" name="page-title"/>
           <p:cNvGrpSpPr/>
           <p:nvPr/>
         </p:nvGrpSpPr>
@@ -6068,7 +7188,7 @@
         </p:grpSpPr>
         <p:sp>
           <p:nvSpPr>
-            <p:cNvPr id="3" name="TextBox 3"/>
+            <p:cNvPr id="7" name="TextBox 7"/>
             <p:cNvSpPr txBox="1"/>
             <p:nvPr/>
           </p:nvSpPr>
@@ -6109,7 +7229,7 @@
       </p:grpSp>
       <p:sp>
         <p:nvSpPr>
-          <p:cNvPr id="5" name="Line 5"/>
+          <p:cNvPr id="9" name="Line 9"/>
           <p:cNvSpPr/>
           <p:nvPr/>
         </p:nvSpPr>
@@ -6145,14 +7265,14 @@
       </p:sp>
       <p:sp>
         <p:nvSpPr>
-          <p:cNvPr id="6" name="source-footer"/>
+          <p:cNvPr id="10" name="source-footer"/>
           <p:cNvSpPr txBox="1"/>
           <p:nvPr/>
         </p:nvSpPr>
         <p:spPr>
           <a:xfrm>
             <a:off x="451104" y="6376035"/>
-            <a:ext cx="6473952" cy="234696"/>
+            <a:ext cx="5989320" cy="234696"/>
           </a:xfrm>
           <a:prstGeom prst="rect">
             <a:avLst/>
@@ -6178,14 +7298,14 @@
                 <a:ea typeface="+mn-ea"/>
                 <a:cs typeface="+mn-cs"/>
               </a:rPr>
-              <a:t>学校公开通知作为参考；本批要求另核对。所有已有成果限文献、模型、程序与合成回放。</a:t>
+              <a:t>制度按本批核对；已有成果限文献、模型和程序；案例内容不作为本项目性能证明。</a:t>
             </a:r>
           </a:p>
         </p:txBody>
       </p:sp>
       <p:sp>
         <p:nvSpPr>
-          <p:cNvPr id="7" name="page-number"/>
+          <p:cNvPr id="11" name="page-number"/>
           <p:cNvSpPr txBox="1"/>
           <p:nvPr/>
         </p:nvSpPr>
@@ -6225,21 +7345,21 @@
       </p:sp>
       <p:grpSp>
         <p:nvGrpSpPr>
-          <p:cNvPr id="15" name="reference-register"/>
+          <p:cNvPr id="19" name="reference-register"/>
           <p:cNvGrpSpPr/>
           <p:nvPr/>
         </p:nvGrpSpPr>
         <p:grpSpPr>
           <a:xfrm>
             <a:off x="448056" y="1805940"/>
-            <a:ext cx="7287768" cy="3723894"/>
+            <a:ext cx="6221578" cy="3723894"/>
             <a:chOff x="448056" y="1805940"/>
-            <a:chExt cx="7287768" cy="3723894"/>
+            <a:chExt cx="6221578" cy="3723894"/>
           </a:xfrm>
         </p:grpSpPr>
         <p:sp>
           <p:nvSpPr>
-            <p:cNvPr id="8" name="TextBox 8"/>
+            <p:cNvPr id="12" name="TextBox 12"/>
             <p:cNvSpPr txBox="1"/>
             <p:nvPr/>
           </p:nvSpPr>
@@ -6279,14 +7399,14 @@
         </p:sp>
         <p:sp>
           <p:nvSpPr>
-            <p:cNvPr id="9" name="TextBox 9"/>
+            <p:cNvPr id="13" name="TextBox 13"/>
             <p:cNvSpPr txBox="1"/>
             <p:nvPr/>
           </p:nvSpPr>
           <p:spPr>
             <a:xfrm>
               <a:off x="448056" y="2367915"/>
-              <a:ext cx="6270041" cy="352044"/>
+              <a:ext cx="4816145" cy="352044"/>
             </a:xfrm>
             <a:prstGeom prst="rect">
               <a:avLst/>
@@ -6312,21 +7432,21 @@
                   <a:ea typeface="+mn-ea"/>
                   <a:cs typeface="+mn-cs"/>
                 </a:rPr>
-                <a:t>2026申报通知：jwc.taru.edu.cn/info/1052/4329.htm</a:t>
+                <a:t>堵塞综述：10.1016/j.agwat.2022.107873</a:t>
               </a:r>
             </a:p>
           </p:txBody>
         </p:sp>
         <p:sp>
           <p:nvSpPr>
-            <p:cNvPr id="10" name="TextBox 10"/>
+            <p:cNvPr id="14" name="TextBox 14"/>
             <p:cNvSpPr txBox="1"/>
             <p:nvPr/>
           </p:nvSpPr>
           <p:spPr>
             <a:xfrm>
               <a:off x="448056" y="2929890"/>
-              <a:ext cx="4816145" cy="352044"/>
+              <a:ext cx="3874084" cy="352044"/>
             </a:xfrm>
             <a:prstGeom prst="rect">
               <a:avLst/>
@@ -6352,21 +7472,21 @@
                   <a:ea typeface="+mn-ea"/>
                   <a:cs typeface="+mn-cs"/>
                 </a:rPr>
-                <a:t>堵塞综述｜10.1016/j.agwat.2022.107873</a:t>
+                <a:t>HydroNeuro：10.3390/s26103010</a:t>
               </a:r>
             </a:p>
           </p:txBody>
         </p:sp>
         <p:sp>
           <p:nvSpPr>
-            <p:cNvPr id="11" name="TextBox 11"/>
+            <p:cNvPr id="15" name="TextBox 15"/>
             <p:cNvSpPr txBox="1"/>
             <p:nvPr/>
           </p:nvSpPr>
           <p:spPr>
             <a:xfrm>
               <a:off x="448056" y="3491865"/>
-              <a:ext cx="3874084" cy="352044"/>
+              <a:ext cx="3834765" cy="352044"/>
             </a:xfrm>
             <a:prstGeom prst="rect">
               <a:avLst/>
@@ -6392,21 +7512,21 @@
                   <a:ea typeface="+mn-ea"/>
                   <a:cs typeface="+mn-cs"/>
                 </a:rPr>
-                <a:t>HydroNeuro｜10.3390/s26103010</a:t>
+                <a:t>灌溉平台：10.3390/land15030464</a:t>
               </a:r>
             </a:p>
           </p:txBody>
         </p:sp>
         <p:sp>
           <p:nvSpPr>
-            <p:cNvPr id="12" name="TextBox 12"/>
+            <p:cNvPr id="16" name="TextBox 16"/>
             <p:cNvSpPr txBox="1"/>
             <p:nvPr/>
           </p:nvSpPr>
           <p:spPr>
             <a:xfrm>
               <a:off x="448056" y="4053840"/>
-              <a:ext cx="4319397" cy="352044"/>
+              <a:ext cx="4877181" cy="352044"/>
             </a:xfrm>
             <a:prstGeom prst="rect">
               <a:avLst/>
@@ -6432,21 +7552,21 @@
                   <a:ea typeface="+mn-ea"/>
                   <a:cs typeface="+mn-cs"/>
                 </a:rPr>
-                <a:t>灌溉模拟平台｜10.3390/land15030464</a:t>
+                <a:t>事件通信：10.3390/s21165541；IFAC 2025</a:t>
               </a:r>
             </a:p>
           </p:txBody>
         </p:sp>
         <p:sp>
           <p:nvSpPr>
-            <p:cNvPr id="13" name="TextBox 13"/>
+            <p:cNvPr id="17" name="TextBox 17"/>
             <p:cNvSpPr txBox="1"/>
             <p:nvPr/>
           </p:nvSpPr>
           <p:spPr>
             <a:xfrm>
               <a:off x="448056" y="4615815"/>
-              <a:ext cx="7287768" cy="352044"/>
+              <a:ext cx="5506434" cy="352044"/>
             </a:xfrm>
             <a:prstGeom prst="rect">
               <a:avLst/>
@@ -6472,21 +7592,21 @@
                   <a:ea typeface="+mn-ea"/>
                   <a:cs typeface="+mn-cs"/>
                 </a:rPr>
-                <a:t>事件通信｜10.3390/s21165541；10.1016/j.ifacol.2025.11.761</a:t>
+                <a:t>新增：diagnosis_feasibility.py / DIAGNOSIS.md</a:t>
               </a:r>
             </a:p>
           </p:txBody>
         </p:sp>
         <p:sp>
           <p:nvSpPr>
-            <p:cNvPr id="14" name="TextBox 14"/>
+            <p:cNvPr id="18" name="TextBox 18"/>
             <p:cNvSpPr txBox="1"/>
             <p:nvPr/>
           </p:nvSpPr>
           <p:spPr>
             <a:xfrm>
               <a:off x="448056" y="5177790"/>
-              <a:ext cx="5557723" cy="352044"/>
+              <a:ext cx="5106924" cy="352044"/>
             </a:xfrm>
             <a:prstGeom prst="rect">
               <a:avLst/>
@@ -6512,7 +7632,7 @@
                   <a:ea typeface="+mn-ea"/>
                   <a:cs typeface="+mn-cs"/>
                 </a:rPr>
-                <a:t>本地证据：程序、JSON/CSV、审查报告与交互网站</a:t>
+                <a:t>案例级别由用户提供；性能声明未全部独立核实</a:t>
               </a:r>
             </a:p>
           </p:txBody>
@@ -6563,7 +7683,7 @@
         <p:spPr>
           <a:xfrm>
             <a:off x="451104" y="289560"/>
-            <a:ext cx="658368" cy="234696"/>
+            <a:ext cx="1143000" cy="234696"/>
           </a:xfrm>
           <a:prstGeom prst="rect">
             <a:avLst/>
@@ -6589,35 +7709,195 @@
                 <a:ea typeface="+mn-ea"/>
                 <a:cs typeface="+mn-cs"/>
               </a:rPr>
-              <a:t>研究问题</a:t>
+              <a:t>场景与研究对象</a:t>
+            </a:r>
+          </a:p>
+        </p:txBody>
+      </p:sp>
+      <p:sp>
+        <p:nvSpPr>
+          <p:cNvPr id="3" name="page-route-0"/>
+          <p:cNvSpPr txBox="1"/>
+          <p:nvPr/>
+        </p:nvSpPr>
+        <p:spPr>
+          <a:xfrm>
+            <a:off x="7518654" y="289560"/>
+            <a:ext cx="335280" cy="234696"/>
+          </a:xfrm>
+          <a:prstGeom prst="rect">
+            <a:avLst/>
+          </a:prstGeom>
+          <a:noFill/>
+          <a:ln>
+            <a:noFill/>
+          </a:ln>
+        </p:spPr>
+        <p:txBody>
+          <a:bodyPr wrap="none" lIns="0" tIns="0" rIns="0" bIns="0" anchor="t" anchorCtr="0">
+            <a:spAutoFit/>
+          </a:bodyPr>
+          <a:lstStyle/>
+          <a:p>
+            <a:pPr algn="l"/>
+            <a:r>
+              <a:rPr lang="zh-CN" sz="1200" b="1" dirty="0">
+                <a:solidFill>
+                  <a:schemeClr val="accent1"/>
+                </a:solidFill>
+                <a:latin typeface="+mn-lt"/>
+                <a:ea typeface="+mn-ea"/>
+                <a:cs typeface="+mn-cs"/>
+              </a:rPr>
+              <a:t>场景</a:t>
+            </a:r>
+          </a:p>
+        </p:txBody>
+      </p:sp>
+      <p:sp>
+        <p:nvSpPr>
+          <p:cNvPr id="4" name="page-route-1"/>
+          <p:cNvSpPr txBox="1"/>
+          <p:nvPr/>
+        </p:nvSpPr>
+        <p:spPr>
+          <a:xfrm>
+            <a:off x="8404479" y="289560"/>
+            <a:ext cx="335280" cy="234696"/>
+          </a:xfrm>
+          <a:prstGeom prst="rect">
+            <a:avLst/>
+          </a:prstGeom>
+          <a:noFill/>
+          <a:ln>
+            <a:noFill/>
+          </a:ln>
+        </p:spPr>
+        <p:txBody>
+          <a:bodyPr wrap="none" lIns="0" tIns="0" rIns="0" bIns="0" anchor="t" anchorCtr="0">
+            <a:spAutoFit/>
+          </a:bodyPr>
+          <a:lstStyle/>
+          <a:p>
+            <a:pPr algn="l"/>
+            <a:r>
+              <a:rPr lang="zh-CN" sz="1200" dirty="0">
+                <a:solidFill>
+                  <a:schemeClr val="accent5"/>
+                </a:solidFill>
+                <a:latin typeface="+mn-lt"/>
+                <a:ea typeface="+mn-ea"/>
+                <a:cs typeface="+mn-cs"/>
+              </a:rPr>
+              <a:t>系统</a:t>
+            </a:r>
+          </a:p>
+        </p:txBody>
+      </p:sp>
+      <p:sp>
+        <p:nvSpPr>
+          <p:cNvPr id="5" name="page-route-2"/>
+          <p:cNvSpPr txBox="1"/>
+          <p:nvPr/>
+        </p:nvSpPr>
+        <p:spPr>
+          <a:xfrm>
+            <a:off x="9290304" y="289560"/>
+            <a:ext cx="335280" cy="234696"/>
+          </a:xfrm>
+          <a:prstGeom prst="rect">
+            <a:avLst/>
+          </a:prstGeom>
+          <a:noFill/>
+          <a:ln>
+            <a:noFill/>
+          </a:ln>
+        </p:spPr>
+        <p:txBody>
+          <a:bodyPr wrap="none" lIns="0" tIns="0" rIns="0" bIns="0" anchor="t" anchorCtr="0">
+            <a:spAutoFit/>
+          </a:bodyPr>
+          <a:lstStyle/>
+          <a:p>
+            <a:pPr algn="l"/>
+            <a:r>
+              <a:rPr lang="zh-CN" sz="1200" dirty="0">
+                <a:solidFill>
+                  <a:schemeClr val="accent5"/>
+                </a:solidFill>
+                <a:latin typeface="+mn-lt"/>
+                <a:ea typeface="+mn-ea"/>
+                <a:cs typeface="+mn-cs"/>
+              </a:rPr>
+              <a:t>证据</a:t>
+            </a:r>
+          </a:p>
+        </p:txBody>
+      </p:sp>
+      <p:sp>
+        <p:nvSpPr>
+          <p:cNvPr id="6" name="page-route-3"/>
+          <p:cNvSpPr txBox="1"/>
+          <p:nvPr/>
+        </p:nvSpPr>
+        <p:spPr>
+          <a:xfrm>
+            <a:off x="10176129" y="289560"/>
+            <a:ext cx="335280" cy="234696"/>
+          </a:xfrm>
+          <a:prstGeom prst="rect">
+            <a:avLst/>
+          </a:prstGeom>
+          <a:noFill/>
+          <a:ln>
+            <a:noFill/>
+          </a:ln>
+        </p:spPr>
+        <p:txBody>
+          <a:bodyPr wrap="none" lIns="0" tIns="0" rIns="0" bIns="0" anchor="t" anchorCtr="0">
+            <a:spAutoFit/>
+          </a:bodyPr>
+          <a:lstStyle/>
+          <a:p>
+            <a:pPr algn="l"/>
+            <a:r>
+              <a:rPr lang="zh-CN" sz="1200" dirty="0">
+                <a:solidFill>
+                  <a:schemeClr val="accent5"/>
+                </a:solidFill>
+                <a:latin typeface="+mn-lt"/>
+                <a:ea typeface="+mn-ea"/>
+                <a:cs typeface="+mn-cs"/>
+              </a:rPr>
+              <a:t>实施</a:t>
             </a:r>
           </a:p>
         </p:txBody>
       </p:sp>
       <p:grpSp>
         <p:nvGrpSpPr>
-          <p:cNvPr id="4" name="page-title"/>
+          <p:cNvPr id="8" name="page-title"/>
           <p:cNvGrpSpPr/>
           <p:nvPr/>
         </p:nvGrpSpPr>
         <p:grpSpPr>
           <a:xfrm>
             <a:off x="441198" y="812483"/>
-            <a:ext cx="6392799" cy="616077"/>
+            <a:ext cx="6816852" cy="616077"/>
             <a:chOff x="441198" y="812483"/>
-            <a:chExt cx="6392799" cy="616077"/>
+            <a:chExt cx="6816852" cy="616077"/>
           </a:xfrm>
         </p:grpSpPr>
         <p:sp>
           <p:nvSpPr>
-            <p:cNvPr id="3" name="TextBox 3"/>
+            <p:cNvPr id="7" name="TextBox 7"/>
             <p:cNvSpPr txBox="1"/>
             <p:nvPr/>
           </p:nvSpPr>
           <p:spPr>
             <a:xfrm>
               <a:off x="441198" y="812483"/>
-              <a:ext cx="6392799" cy="616077"/>
+              <a:ext cx="6816852" cy="616077"/>
             </a:xfrm>
             <a:prstGeom prst="rect">
               <a:avLst/>
@@ -6643,7 +7923,7 @@
                   <a:ea typeface="+mj-ea"/>
                   <a:cs typeface="+mj-cs"/>
                 </a:rPr>
-                <a:t>正常操作与异常可能同时改变测量</a:t>
+                <a:t>支管故障需要系统给出可检查的证据</a:t>
               </a:r>
             </a:p>
           </p:txBody>
@@ -6651,7 +7931,7 @@
       </p:grpSp>
       <p:sp>
         <p:nvSpPr>
-          <p:cNvPr id="5" name="Line 5"/>
+          <p:cNvPr id="9" name="Line 9"/>
           <p:cNvSpPr/>
           <p:nvPr/>
         </p:nvSpPr>
@@ -6687,7 +7967,7 @@
       </p:sp>
       <p:sp>
         <p:nvSpPr>
-          <p:cNvPr id="6" name="source-footer"/>
+          <p:cNvPr id="10" name="source-footer"/>
           <p:cNvSpPr txBox="1"/>
           <p:nvPr/>
         </p:nvSpPr>
@@ -6727,7 +8007,7 @@
       </p:sp>
       <p:sp>
         <p:nvSpPr>
-          <p:cNvPr id="7" name="page-number"/>
+          <p:cNvPr id="11" name="page-number"/>
           <p:cNvSpPr txBox="1"/>
           <p:nvPr/>
         </p:nvSpPr>
@@ -6767,7 +8047,7 @@
       </p:sp>
       <p:grpSp>
         <p:nvGrpSpPr>
-          <p:cNvPr id="17" name="problem-comparison"/>
+          <p:cNvPr id="21" name="problem-comparison"/>
           <p:cNvGrpSpPr/>
           <p:nvPr/>
         </p:nvGrpSpPr>
@@ -6781,7 +8061,7 @@
         </p:grpSpPr>
         <p:sp>
           <p:nvSpPr>
-            <p:cNvPr id="8" name="TextBox 8"/>
+            <p:cNvPr id="12" name="TextBox 12"/>
             <p:cNvSpPr txBox="1"/>
             <p:nvPr/>
           </p:nvSpPr>
@@ -6821,7 +8101,7 @@
         </p:sp>
         <p:sp>
           <p:nvSpPr>
-            <p:cNvPr id="9" name="Rectangle 9"/>
+            <p:cNvPr id="13" name="Rectangle 13"/>
             <p:cNvSpPr/>
             <p:nvPr/>
           </p:nvSpPr>
@@ -6843,7 +8123,7 @@
         </p:sp>
         <p:sp>
           <p:nvSpPr>
-            <p:cNvPr id="10" name="TextBox 10"/>
+            <p:cNvPr id="14" name="TextBox 14"/>
             <p:cNvSpPr txBox="1"/>
             <p:nvPr/>
           </p:nvSpPr>
@@ -6883,7 +8163,7 @@
         </p:sp>
         <p:sp>
           <p:nvSpPr>
-            <p:cNvPr id="11" name="TextBox 11"/>
+            <p:cNvPr id="15" name="TextBox 15"/>
             <p:cNvSpPr txBox="1"/>
             <p:nvPr/>
           </p:nvSpPr>
@@ -6923,7 +8203,7 @@
         </p:sp>
         <p:sp>
           <p:nvSpPr>
-            <p:cNvPr id="12" name="Rectangle 12"/>
+            <p:cNvPr id="16" name="Rectangle 16"/>
             <p:cNvSpPr/>
             <p:nvPr/>
           </p:nvSpPr>
@@ -6945,7 +8225,7 @@
         </p:sp>
         <p:sp>
           <p:nvSpPr>
-            <p:cNvPr id="13" name="TextBox 13"/>
+            <p:cNvPr id="17" name="TextBox 17"/>
             <p:cNvSpPr txBox="1"/>
             <p:nvPr/>
           </p:nvSpPr>
@@ -6985,7 +8265,7 @@
         </p:sp>
         <p:sp>
           <p:nvSpPr>
-            <p:cNvPr id="14" name="TextBox 14"/>
+            <p:cNvPr id="18" name="TextBox 18"/>
             <p:cNvSpPr txBox="1"/>
             <p:nvPr/>
           </p:nvSpPr>
@@ -7025,14 +8305,14 @@
         </p:sp>
         <p:sp>
           <p:nvSpPr>
-            <p:cNvPr id="15" name="TextBox 15"/>
+            <p:cNvPr id="19" name="TextBox 19"/>
             <p:cNvSpPr txBox="1"/>
             <p:nvPr/>
           </p:nvSpPr>
           <p:spPr>
             <a:xfrm>
               <a:off x="446532" y="4421505"/>
-              <a:ext cx="5392674" cy="410718"/>
+              <a:ext cx="6523482" cy="410718"/>
             </a:xfrm>
             <a:prstGeom prst="rect">
               <a:avLst/>
@@ -7058,14 +8338,14 @@
                   <a:ea typeface="+mn-ea"/>
                   <a:cs typeface="+mn-cs"/>
                 </a:rPr>
-                <a:t>感知问题：正常扰动中能否看见显著异常？</a:t>
+                <a:t>诊断：能观察到多小的故障，何时需要输出待检查？</a:t>
               </a:r>
             </a:p>
           </p:txBody>
         </p:sp>
         <p:sp>
           <p:nvSpPr>
-            <p:cNvPr id="16" name="TextBox 16"/>
+            <p:cNvPr id="20" name="TextBox 20"/>
             <p:cNvSpPr txBox="1"/>
             <p:nvPr/>
           </p:nvSpPr>
@@ -7098,7 +8378,7 @@
                   <a:ea typeface="+mn-ea"/>
                   <a:cs typeface="+mn-cs"/>
                 </a:rPr>
-                <a:t>通信问题：有限上报下能否保留并送达短时告警？</a:t>
+                <a:t>系统：本地发现的证据能否可靠送达并回放确认？</a:t>
               </a:r>
             </a:p>
           </p:txBody>
@@ -7149,7 +8429,7 @@
         <p:spPr>
           <a:xfrm>
             <a:off x="451104" y="289560"/>
-            <a:ext cx="1627632" cy="234696"/>
+            <a:ext cx="1466088" cy="234696"/>
           </a:xfrm>
           <a:prstGeom prst="rect">
             <a:avLst/>
@@ -7175,14 +8455,174 @@
                 <a:ea typeface="+mn-ea"/>
                 <a:cs typeface="+mn-cs"/>
               </a:rPr>
-              <a:t>文献依据与拟研究差异</a:t>
+              <a:t>已有研究与候选贡献</a:t>
+            </a:r>
+          </a:p>
+        </p:txBody>
+      </p:sp>
+      <p:sp>
+        <p:nvSpPr>
+          <p:cNvPr id="3" name="page-route-0"/>
+          <p:cNvSpPr txBox="1"/>
+          <p:nvPr/>
+        </p:nvSpPr>
+        <p:spPr>
+          <a:xfrm>
+            <a:off x="7518654" y="289560"/>
+            <a:ext cx="335280" cy="234696"/>
+          </a:xfrm>
+          <a:prstGeom prst="rect">
+            <a:avLst/>
+          </a:prstGeom>
+          <a:noFill/>
+          <a:ln>
+            <a:noFill/>
+          </a:ln>
+        </p:spPr>
+        <p:txBody>
+          <a:bodyPr wrap="none" lIns="0" tIns="0" rIns="0" bIns="0" anchor="t" anchorCtr="0">
+            <a:spAutoFit/>
+          </a:bodyPr>
+          <a:lstStyle/>
+          <a:p>
+            <a:pPr algn="l"/>
+            <a:r>
+              <a:rPr lang="zh-CN" sz="1200" b="1" dirty="0">
+                <a:solidFill>
+                  <a:schemeClr val="accent1"/>
+                </a:solidFill>
+                <a:latin typeface="+mn-lt"/>
+                <a:ea typeface="+mn-ea"/>
+                <a:cs typeface="+mn-cs"/>
+              </a:rPr>
+              <a:t>场景</a:t>
+            </a:r>
+          </a:p>
+        </p:txBody>
+      </p:sp>
+      <p:sp>
+        <p:nvSpPr>
+          <p:cNvPr id="4" name="page-route-1"/>
+          <p:cNvSpPr txBox="1"/>
+          <p:nvPr/>
+        </p:nvSpPr>
+        <p:spPr>
+          <a:xfrm>
+            <a:off x="8404479" y="289560"/>
+            <a:ext cx="335280" cy="234696"/>
+          </a:xfrm>
+          <a:prstGeom prst="rect">
+            <a:avLst/>
+          </a:prstGeom>
+          <a:noFill/>
+          <a:ln>
+            <a:noFill/>
+          </a:ln>
+        </p:spPr>
+        <p:txBody>
+          <a:bodyPr wrap="none" lIns="0" tIns="0" rIns="0" bIns="0" anchor="t" anchorCtr="0">
+            <a:spAutoFit/>
+          </a:bodyPr>
+          <a:lstStyle/>
+          <a:p>
+            <a:pPr algn="l"/>
+            <a:r>
+              <a:rPr lang="zh-CN" sz="1200" dirty="0">
+                <a:solidFill>
+                  <a:schemeClr val="accent5"/>
+                </a:solidFill>
+                <a:latin typeface="+mn-lt"/>
+                <a:ea typeface="+mn-ea"/>
+                <a:cs typeface="+mn-cs"/>
+              </a:rPr>
+              <a:t>系统</a:t>
+            </a:r>
+          </a:p>
+        </p:txBody>
+      </p:sp>
+      <p:sp>
+        <p:nvSpPr>
+          <p:cNvPr id="5" name="page-route-2"/>
+          <p:cNvSpPr txBox="1"/>
+          <p:nvPr/>
+        </p:nvSpPr>
+        <p:spPr>
+          <a:xfrm>
+            <a:off x="9290304" y="289560"/>
+            <a:ext cx="335280" cy="234696"/>
+          </a:xfrm>
+          <a:prstGeom prst="rect">
+            <a:avLst/>
+          </a:prstGeom>
+          <a:noFill/>
+          <a:ln>
+            <a:noFill/>
+          </a:ln>
+        </p:spPr>
+        <p:txBody>
+          <a:bodyPr wrap="none" lIns="0" tIns="0" rIns="0" bIns="0" anchor="t" anchorCtr="0">
+            <a:spAutoFit/>
+          </a:bodyPr>
+          <a:lstStyle/>
+          <a:p>
+            <a:pPr algn="l"/>
+            <a:r>
+              <a:rPr lang="zh-CN" sz="1200" dirty="0">
+                <a:solidFill>
+                  <a:schemeClr val="accent5"/>
+                </a:solidFill>
+                <a:latin typeface="+mn-lt"/>
+                <a:ea typeface="+mn-ea"/>
+                <a:cs typeface="+mn-cs"/>
+              </a:rPr>
+              <a:t>证据</a:t>
+            </a:r>
+          </a:p>
+        </p:txBody>
+      </p:sp>
+      <p:sp>
+        <p:nvSpPr>
+          <p:cNvPr id="6" name="page-route-3"/>
+          <p:cNvSpPr txBox="1"/>
+          <p:nvPr/>
+        </p:nvSpPr>
+        <p:spPr>
+          <a:xfrm>
+            <a:off x="10176129" y="289560"/>
+            <a:ext cx="335280" cy="234696"/>
+          </a:xfrm>
+          <a:prstGeom prst="rect">
+            <a:avLst/>
+          </a:prstGeom>
+          <a:noFill/>
+          <a:ln>
+            <a:noFill/>
+          </a:ln>
+        </p:spPr>
+        <p:txBody>
+          <a:bodyPr wrap="none" lIns="0" tIns="0" rIns="0" bIns="0" anchor="t" anchorCtr="0">
+            <a:spAutoFit/>
+          </a:bodyPr>
+          <a:lstStyle/>
+          <a:p>
+            <a:pPr algn="l"/>
+            <a:r>
+              <a:rPr lang="zh-CN" sz="1200" dirty="0">
+                <a:solidFill>
+                  <a:schemeClr val="accent5"/>
+                </a:solidFill>
+                <a:latin typeface="+mn-lt"/>
+                <a:ea typeface="+mn-ea"/>
+                <a:cs typeface="+mn-cs"/>
+              </a:rPr>
+              <a:t>实施</a:t>
             </a:r>
           </a:p>
         </p:txBody>
       </p:sp>
       <p:grpSp>
         <p:nvGrpSpPr>
-          <p:cNvPr id="4" name="page-title"/>
+          <p:cNvPr id="8" name="page-title"/>
           <p:cNvGrpSpPr/>
           <p:nvPr/>
         </p:nvGrpSpPr>
@@ -7196,7 +8636,7 @@
         </p:grpSpPr>
         <p:sp>
           <p:nvSpPr>
-            <p:cNvPr id="3" name="TextBox 3"/>
+            <p:cNvPr id="7" name="TextBox 7"/>
             <p:cNvSpPr txBox="1"/>
             <p:nvPr/>
           </p:nvSpPr>
@@ -7229,7 +8669,7 @@
                   <a:ea typeface="+mj-ea"/>
                   <a:cs typeface="+mj-cs"/>
                 </a:rPr>
-                <a:t>研究增量落在动态工况与可靠告警</a:t>
+                <a:t>已有系统很多，增量需要实验验证</a:t>
               </a:r>
             </a:p>
           </p:txBody>
@@ -7237,7 +8677,7 @@
       </p:grpSp>
       <p:sp>
         <p:nvSpPr>
-          <p:cNvPr id="5" name="Line 5"/>
+          <p:cNvPr id="9" name="Line 9"/>
           <p:cNvSpPr/>
           <p:nvPr/>
         </p:nvSpPr>
@@ -7273,14 +8713,14 @@
       </p:sp>
       <p:sp>
         <p:nvSpPr>
-          <p:cNvPr id="6" name="source-footer"/>
+          <p:cNvPr id="10" name="source-footer"/>
           <p:cNvSpPr txBox="1"/>
           <p:nvPr/>
         </p:nvSpPr>
         <p:spPr>
           <a:xfrm>
             <a:off x="451104" y="6376035"/>
-            <a:ext cx="8031111" cy="234696"/>
+            <a:ext cx="7355728" cy="234696"/>
           </a:xfrm>
           <a:prstGeom prst="rect">
             <a:avLst/>
@@ -7306,14 +8746,14 @@
                 <a:ea typeface="+mn-ea"/>
                 <a:cs typeface="+mn-cs"/>
               </a:rPr>
-              <a:t>文献：AWM 2022；Sensors 2026 HydroNeuro；Land 2026；Sensors 2021；IFAC 2025。完整DOI见备用页。</a:t>
+              <a:t>文献：AWM 2022；HydroNeuro 2026；Land 2026；Sensors 2021；IFAC 2025。完整DOI见备用页。</a:t>
             </a:r>
           </a:p>
         </p:txBody>
       </p:sp>
       <p:sp>
         <p:nvSpPr>
-          <p:cNvPr id="7" name="page-number"/>
+          <p:cNvPr id="11" name="page-number"/>
           <p:cNvSpPr txBox="1"/>
           <p:nvPr/>
         </p:nvSpPr>
@@ -7353,7 +8793,7 @@
       </p:sp>
       <p:grpSp>
         <p:nvGrpSpPr>
-          <p:cNvPr id="20" name="research-position"/>
+          <p:cNvPr id="24" name="research-position"/>
           <p:cNvGrpSpPr/>
           <p:nvPr/>
         </p:nvGrpSpPr>
@@ -7367,7 +8807,7 @@
         </p:grpSpPr>
         <p:sp>
           <p:nvSpPr>
-            <p:cNvPr id="8" name="TextBox 8"/>
+            <p:cNvPr id="12" name="TextBox 12"/>
             <p:cNvSpPr txBox="1"/>
             <p:nvPr/>
           </p:nvSpPr>
@@ -7407,7 +8847,7 @@
         </p:sp>
         <p:sp>
           <p:nvSpPr>
-            <p:cNvPr id="9" name="TextBox 9"/>
+            <p:cNvPr id="13" name="TextBox 13"/>
             <p:cNvSpPr txBox="1"/>
             <p:nvPr/>
           </p:nvSpPr>
@@ -7447,7 +8887,7 @@
         </p:sp>
         <p:sp>
           <p:nvSpPr>
-            <p:cNvPr id="10" name="Line 10"/>
+            <p:cNvPr id="14" name="Line 14"/>
             <p:cNvSpPr/>
             <p:nvPr/>
           </p:nvSpPr>
@@ -7483,7 +8923,7 @@
         </p:sp>
         <p:sp>
           <p:nvSpPr>
-            <p:cNvPr id="11" name="TextBox 11"/>
+            <p:cNvPr id="15" name="TextBox 15"/>
             <p:cNvSpPr txBox="1"/>
             <p:nvPr/>
           </p:nvSpPr>
@@ -7523,7 +8963,7 @@
         </p:sp>
         <p:sp>
           <p:nvSpPr>
-            <p:cNvPr id="12" name="TextBox 12"/>
+            <p:cNvPr id="16" name="TextBox 16"/>
             <p:cNvSpPr txBox="1"/>
             <p:nvPr/>
           </p:nvSpPr>
@@ -7563,7 +9003,7 @@
         </p:sp>
         <p:sp>
           <p:nvSpPr>
-            <p:cNvPr id="13" name="TextBox 13"/>
+            <p:cNvPr id="17" name="TextBox 17"/>
             <p:cNvSpPr txBox="1"/>
             <p:nvPr/>
           </p:nvSpPr>
@@ -7603,7 +9043,7 @@
         </p:sp>
         <p:sp>
           <p:nvSpPr>
-            <p:cNvPr id="14" name="Line 14"/>
+            <p:cNvPr id="18" name="Line 18"/>
             <p:cNvSpPr/>
             <p:nvPr/>
           </p:nvSpPr>
@@ -7639,7 +9079,7 @@
         </p:sp>
         <p:sp>
           <p:nvSpPr>
-            <p:cNvPr id="15" name="TextBox 15"/>
+            <p:cNvPr id="19" name="TextBox 19"/>
             <p:cNvSpPr txBox="1"/>
             <p:nvPr/>
           </p:nvSpPr>
@@ -7679,7 +9119,7 @@
         </p:sp>
         <p:sp>
           <p:nvSpPr>
-            <p:cNvPr id="16" name="TextBox 16"/>
+            <p:cNvPr id="20" name="TextBox 20"/>
             <p:cNvSpPr txBox="1"/>
             <p:nvPr/>
           </p:nvSpPr>
@@ -7719,7 +9159,7 @@
         </p:sp>
         <p:sp>
           <p:nvSpPr>
-            <p:cNvPr id="17" name="TextBox 17"/>
+            <p:cNvPr id="21" name="TextBox 21"/>
             <p:cNvSpPr txBox="1"/>
             <p:nvPr/>
           </p:nvSpPr>
@@ -7759,7 +9199,7 @@
         </p:sp>
         <p:sp>
           <p:nvSpPr>
-            <p:cNvPr id="18" name="Line 18"/>
+            <p:cNvPr id="22" name="Line 22"/>
             <p:cNvSpPr/>
             <p:nvPr/>
           </p:nvSpPr>
@@ -7795,7 +9235,7 @@
         </p:sp>
         <p:sp>
           <p:nvSpPr>
-            <p:cNvPr id="19" name="TextBox 19"/>
+            <p:cNvPr id="23" name="TextBox 23"/>
             <p:cNvSpPr txBox="1"/>
             <p:nvPr/>
           </p:nvSpPr>
@@ -7905,14 +9345,174 @@
                 <a:ea typeface="+mn-ea"/>
                 <a:cs typeface="+mn-cs"/>
               </a:rPr>
-              <a:t>拟开展研究</a:t>
+              <a:t>拟开展任务</a:t>
+            </a:r>
+          </a:p>
+        </p:txBody>
+      </p:sp>
+      <p:sp>
+        <p:nvSpPr>
+          <p:cNvPr id="3" name="page-route-0"/>
+          <p:cNvSpPr txBox="1"/>
+          <p:nvPr/>
+        </p:nvSpPr>
+        <p:spPr>
+          <a:xfrm>
+            <a:off x="7518654" y="289560"/>
+            <a:ext cx="335280" cy="234696"/>
+          </a:xfrm>
+          <a:prstGeom prst="rect">
+            <a:avLst/>
+          </a:prstGeom>
+          <a:noFill/>
+          <a:ln>
+            <a:noFill/>
+          </a:ln>
+        </p:spPr>
+        <p:txBody>
+          <a:bodyPr wrap="none" lIns="0" tIns="0" rIns="0" bIns="0" anchor="t" anchorCtr="0">
+            <a:spAutoFit/>
+          </a:bodyPr>
+          <a:lstStyle/>
+          <a:p>
+            <a:pPr algn="l"/>
+            <a:r>
+              <a:rPr lang="zh-CN" sz="1200" dirty="0">
+                <a:solidFill>
+                  <a:schemeClr val="accent5"/>
+                </a:solidFill>
+                <a:latin typeface="+mn-lt"/>
+                <a:ea typeface="+mn-ea"/>
+                <a:cs typeface="+mn-cs"/>
+              </a:rPr>
+              <a:t>场景</a:t>
+            </a:r>
+          </a:p>
+        </p:txBody>
+      </p:sp>
+      <p:sp>
+        <p:nvSpPr>
+          <p:cNvPr id="4" name="page-route-1"/>
+          <p:cNvSpPr txBox="1"/>
+          <p:nvPr/>
+        </p:nvSpPr>
+        <p:spPr>
+          <a:xfrm>
+            <a:off x="8404479" y="289560"/>
+            <a:ext cx="335280" cy="234696"/>
+          </a:xfrm>
+          <a:prstGeom prst="rect">
+            <a:avLst/>
+          </a:prstGeom>
+          <a:noFill/>
+          <a:ln>
+            <a:noFill/>
+          </a:ln>
+        </p:spPr>
+        <p:txBody>
+          <a:bodyPr wrap="none" lIns="0" tIns="0" rIns="0" bIns="0" anchor="t" anchorCtr="0">
+            <a:spAutoFit/>
+          </a:bodyPr>
+          <a:lstStyle/>
+          <a:p>
+            <a:pPr algn="l"/>
+            <a:r>
+              <a:rPr lang="zh-CN" sz="1200" b="1" dirty="0">
+                <a:solidFill>
+                  <a:schemeClr val="accent1"/>
+                </a:solidFill>
+                <a:latin typeface="+mn-lt"/>
+                <a:ea typeface="+mn-ea"/>
+                <a:cs typeface="+mn-cs"/>
+              </a:rPr>
+              <a:t>系统</a:t>
+            </a:r>
+          </a:p>
+        </p:txBody>
+      </p:sp>
+      <p:sp>
+        <p:nvSpPr>
+          <p:cNvPr id="5" name="page-route-2"/>
+          <p:cNvSpPr txBox="1"/>
+          <p:nvPr/>
+        </p:nvSpPr>
+        <p:spPr>
+          <a:xfrm>
+            <a:off x="9290304" y="289560"/>
+            <a:ext cx="335280" cy="234696"/>
+          </a:xfrm>
+          <a:prstGeom prst="rect">
+            <a:avLst/>
+          </a:prstGeom>
+          <a:noFill/>
+          <a:ln>
+            <a:noFill/>
+          </a:ln>
+        </p:spPr>
+        <p:txBody>
+          <a:bodyPr wrap="none" lIns="0" tIns="0" rIns="0" bIns="0" anchor="t" anchorCtr="0">
+            <a:spAutoFit/>
+          </a:bodyPr>
+          <a:lstStyle/>
+          <a:p>
+            <a:pPr algn="l"/>
+            <a:r>
+              <a:rPr lang="zh-CN" sz="1200" dirty="0">
+                <a:solidFill>
+                  <a:schemeClr val="accent5"/>
+                </a:solidFill>
+                <a:latin typeface="+mn-lt"/>
+                <a:ea typeface="+mn-ea"/>
+                <a:cs typeface="+mn-cs"/>
+              </a:rPr>
+              <a:t>证据</a:t>
+            </a:r>
+          </a:p>
+        </p:txBody>
+      </p:sp>
+      <p:sp>
+        <p:nvSpPr>
+          <p:cNvPr id="6" name="page-route-3"/>
+          <p:cNvSpPr txBox="1"/>
+          <p:nvPr/>
+        </p:nvSpPr>
+        <p:spPr>
+          <a:xfrm>
+            <a:off x="10176129" y="289560"/>
+            <a:ext cx="335280" cy="234696"/>
+          </a:xfrm>
+          <a:prstGeom prst="rect">
+            <a:avLst/>
+          </a:prstGeom>
+          <a:noFill/>
+          <a:ln>
+            <a:noFill/>
+          </a:ln>
+        </p:spPr>
+        <p:txBody>
+          <a:bodyPr wrap="none" lIns="0" tIns="0" rIns="0" bIns="0" anchor="t" anchorCtr="0">
+            <a:spAutoFit/>
+          </a:bodyPr>
+          <a:lstStyle/>
+          <a:p>
+            <a:pPr algn="l"/>
+            <a:r>
+              <a:rPr lang="zh-CN" sz="1200" dirty="0">
+                <a:solidFill>
+                  <a:schemeClr val="accent5"/>
+                </a:solidFill>
+                <a:latin typeface="+mn-lt"/>
+                <a:ea typeface="+mn-ea"/>
+                <a:cs typeface="+mn-cs"/>
+              </a:rPr>
+              <a:t>实施</a:t>
             </a:r>
           </a:p>
         </p:txBody>
       </p:sp>
       <p:grpSp>
         <p:nvGrpSpPr>
-          <p:cNvPr id="4" name="page-title"/>
+          <p:cNvPr id="8" name="page-title"/>
           <p:cNvGrpSpPr/>
           <p:nvPr/>
         </p:nvGrpSpPr>
@@ -7926,7 +9526,7 @@
         </p:grpSpPr>
         <p:sp>
           <p:nvSpPr>
-            <p:cNvPr id="3" name="TextBox 3"/>
+            <p:cNvPr id="7" name="TextBox 7"/>
             <p:cNvSpPr txBox="1"/>
             <p:nvPr/>
           </p:nvSpPr>
@@ -7959,7 +9559,7 @@
                   <a:ea typeface="+mj-ea"/>
                   <a:cs typeface="+mj-cs"/>
                 </a:rPr>
-                <a:t>三个工作包组成完整研究闭环</a:t>
+                <a:t>四个工作包支撑一个完整原型</a:t>
               </a:r>
             </a:p>
           </p:txBody>
@@ -7967,7 +9567,7 @@
       </p:grpSp>
       <p:sp>
         <p:nvSpPr>
-          <p:cNvPr id="5" name="Line 5"/>
+          <p:cNvPr id="9" name="Line 9"/>
           <p:cNvSpPr/>
           <p:nvPr/>
         </p:nvSpPr>
@@ -8003,7 +9603,7 @@
       </p:sp>
       <p:sp>
         <p:nvSpPr>
-          <p:cNvPr id="6" name="source-footer"/>
+          <p:cNvPr id="10" name="source-footer"/>
           <p:cNvSpPr txBox="1"/>
           <p:nvPr/>
         </p:nvSpPr>
@@ -8043,7 +9643,7 @@
       </p:sp>
       <p:sp>
         <p:nvSpPr>
-          <p:cNvPr id="7" name="page-number"/>
+          <p:cNvPr id="11" name="page-number"/>
           <p:cNvSpPr txBox="1"/>
           <p:nvPr/>
         </p:nvSpPr>
@@ -8083,27 +9683,27 @@
       </p:sp>
       <p:grpSp>
         <p:nvGrpSpPr>
-          <p:cNvPr id="20" name="research-packages"/>
+          <p:cNvPr id="28" name="research-packages"/>
           <p:cNvGrpSpPr/>
           <p:nvPr/>
         </p:nvGrpSpPr>
         <p:grpSpPr>
           <a:xfrm>
-            <a:off x="438150" y="1919288"/>
-            <a:ext cx="11296650" cy="3776662"/>
-            <a:chOff x="438150" y="1919288"/>
-            <a:chExt cx="11296650" cy="3776662"/>
+            <a:off x="438150" y="1792605"/>
+            <a:ext cx="11296650" cy="4093845"/>
+            <a:chOff x="438150" y="1792605"/>
+            <a:chExt cx="11296650" cy="4093845"/>
           </a:xfrm>
         </p:grpSpPr>
         <p:sp>
           <p:nvSpPr>
-            <p:cNvPr id="8" name="TextBox 8"/>
+            <p:cNvPr id="12" name="TextBox 12"/>
             <p:cNvSpPr txBox="1"/>
             <p:nvPr/>
           </p:nvSpPr>
           <p:spPr>
             <a:xfrm>
-              <a:off x="438150" y="1924050"/>
+              <a:off x="438150" y="1809750"/>
               <a:ext cx="704469" cy="876300"/>
             </a:xfrm>
             <a:prstGeom prst="rect">
@@ -8137,14 +9737,14 @@
         </p:sp>
         <p:sp>
           <p:nvSpPr>
-            <p:cNvPr id="9" name="TextBox 9"/>
+            <p:cNvPr id="13" name="TextBox 13"/>
             <p:cNvSpPr txBox="1"/>
             <p:nvPr/>
           </p:nvSpPr>
           <p:spPr>
             <a:xfrm>
-              <a:off x="1617345" y="1919288"/>
-              <a:ext cx="3471405" cy="440055"/>
+              <a:off x="1618107" y="1792605"/>
+              <a:ext cx="2109170" cy="410718"/>
             </a:xfrm>
             <a:prstGeom prst="rect">
               <a:avLst/>
@@ -8162,7 +9762,7 @@
             <a:p>
               <a:pPr algn="l"/>
               <a:r>
-                <a:rPr lang="zh-CN" sz="2250" b="1" dirty="0">
+                <a:rPr lang="zh-CN" sz="2100" b="1" dirty="0">
                   <a:solidFill>
                     <a:schemeClr val="accent1"/>
                   </a:solidFill>
@@ -8170,21 +9770,21 @@
                   <a:ea typeface="+mn-ea"/>
                   <a:cs typeface="+mn-cs"/>
                 </a:rPr>
-                <a:t>WP1 水力建模与异常感知</a:t>
+                <a:t>WP1 测量与建模</a:t>
               </a:r>
             </a:p>
           </p:txBody>
         </p:sp>
         <p:sp>
           <p:nvSpPr>
-            <p:cNvPr id="10" name="TextBox 10"/>
+            <p:cNvPr id="14" name="TextBox 14"/>
             <p:cNvSpPr txBox="1"/>
             <p:nvPr/>
           </p:nvSpPr>
           <p:spPr>
             <a:xfrm>
-              <a:off x="1619631" y="2463165"/>
-              <a:ext cx="4489018" cy="352044"/>
+              <a:off x="1619631" y="2244090"/>
+              <a:ext cx="3874084" cy="352044"/>
             </a:xfrm>
             <a:prstGeom prst="rect">
               <a:avLst/>
@@ -8210,20 +9810,20 @@
                   <a:ea typeface="+mn-ea"/>
                   <a:cs typeface="+mn-cs"/>
                 </a:rPr>
-                <a:t>可观测性 → 参数校核 → 正常边界 → 强基线</a:t>
+                <a:t>P0 / P1 / Q → 参考标定 → 差压误差</a:t>
               </a:r>
             </a:p>
           </p:txBody>
         </p:sp>
         <p:sp>
           <p:nvSpPr>
-            <p:cNvPr id="11" name="Line 11"/>
+            <p:cNvPr id="15" name="Line 15"/>
             <p:cNvSpPr/>
             <p:nvPr/>
           </p:nvSpPr>
           <p:spPr>
             <a:xfrm>
-              <a:off x="1628775" y="2905125"/>
+              <a:off x="1628775" y="2638425"/>
               <a:ext cx="10106025" cy="9525"/>
             </a:xfrm>
             <a:custGeom>
@@ -8253,13 +9853,13 @@
         </p:sp>
         <p:sp>
           <p:nvSpPr>
-            <p:cNvPr id="12" name="TextBox 12"/>
+            <p:cNvPr id="16" name="TextBox 16"/>
             <p:cNvSpPr txBox="1"/>
             <p:nvPr/>
           </p:nvSpPr>
           <p:spPr>
             <a:xfrm>
-              <a:off x="438150" y="3314700"/>
+              <a:off x="438150" y="2876550"/>
               <a:ext cx="704469" cy="876300"/>
             </a:xfrm>
             <a:prstGeom prst="rect">
@@ -8293,14 +9893,14 @@
         </p:sp>
         <p:sp>
           <p:nvSpPr>
-            <p:cNvPr id="13" name="TextBox 13"/>
+            <p:cNvPr id="17" name="TextBox 17"/>
             <p:cNvSpPr txBox="1"/>
             <p:nvPr/>
           </p:nvSpPr>
           <p:spPr>
             <a:xfrm>
-              <a:off x="1617345" y="3309938"/>
-              <a:ext cx="2562720" cy="440055"/>
+              <a:off x="1618107" y="2859405"/>
+              <a:ext cx="2109170" cy="410718"/>
             </a:xfrm>
             <a:prstGeom prst="rect">
               <a:avLst/>
@@ -8318,7 +9918,7 @@
             <a:p>
               <a:pPr algn="l"/>
               <a:r>
-                <a:rPr lang="zh-CN" sz="2250" b="1" dirty="0">
+                <a:rPr lang="zh-CN" sz="2100" b="1" dirty="0">
                   <a:solidFill>
                     <a:schemeClr val="accent1"/>
                   </a:solidFill>
@@ -8326,21 +9926,21 @@
                   <a:ea typeface="+mn-ea"/>
                   <a:cs typeface="+mn-cs"/>
                 </a:rPr>
-                <a:t>WP2 可靠事件通信</a:t>
+                <a:t>WP2 诊断与边界</a:t>
               </a:r>
             </a:p>
           </p:txBody>
         </p:sp>
         <p:sp>
           <p:nvSpPr>
-            <p:cNvPr id="14" name="TextBox 14"/>
+            <p:cNvPr id="18" name="TextBox 18"/>
             <p:cNvSpPr txBox="1"/>
             <p:nvPr/>
           </p:nvSpPr>
           <p:spPr>
             <a:xfrm>
-              <a:off x="1619631" y="3853815"/>
-              <a:ext cx="4737049" cy="352044"/>
+              <a:off x="1619631" y="3310890"/>
+              <a:ext cx="4489018" cy="352044"/>
             </a:xfrm>
             <a:prstGeom prst="rect">
               <a:avLst/>
@@ -8366,20 +9966,20 @@
                   <a:ea typeface="+mn-ea"/>
                   <a:cs typeface="+mn-cs"/>
                 </a:rPr>
-                <a:t>变化触发 / 限频 / 心跳；缓存 / ACK / 去重</a:t>
+                <a:t>渐进故障 → 状态 / 强基线 → 程度与提前量</a:t>
               </a:r>
             </a:p>
           </p:txBody>
         </p:sp>
         <p:sp>
           <p:nvSpPr>
-            <p:cNvPr id="15" name="Line 15"/>
+            <p:cNvPr id="19" name="Line 19"/>
             <p:cNvSpPr/>
             <p:nvPr/>
           </p:nvSpPr>
           <p:spPr>
             <a:xfrm>
-              <a:off x="1628775" y="4295775"/>
+              <a:off x="1628775" y="3705225"/>
               <a:ext cx="10106025" cy="9525"/>
             </a:xfrm>
             <a:custGeom>
@@ -8409,13 +10009,13 @@
         </p:sp>
         <p:sp>
           <p:nvSpPr>
-            <p:cNvPr id="16" name="TextBox 16"/>
+            <p:cNvPr id="20" name="TextBox 20"/>
             <p:cNvSpPr txBox="1"/>
             <p:nvPr/>
           </p:nvSpPr>
           <p:spPr>
             <a:xfrm>
-              <a:off x="438150" y="4705350"/>
+              <a:off x="438150" y="3943350"/>
               <a:ext cx="704469" cy="876300"/>
             </a:xfrm>
             <a:prstGeom prst="rect">
@@ -8449,14 +10049,14 @@
         </p:sp>
         <p:sp>
           <p:nvSpPr>
-            <p:cNvPr id="17" name="TextBox 17"/>
+            <p:cNvPr id="21" name="TextBox 21"/>
             <p:cNvSpPr txBox="1"/>
             <p:nvPr/>
           </p:nvSpPr>
           <p:spPr>
             <a:xfrm>
-              <a:off x="1617345" y="4700588"/>
-              <a:ext cx="3471405" cy="440055"/>
+              <a:off x="1618107" y="3926205"/>
+              <a:ext cx="1826468" cy="410718"/>
             </a:xfrm>
             <a:prstGeom prst="rect">
               <a:avLst/>
@@ -8474,7 +10074,7 @@
             <a:p>
               <a:pPr algn="l"/>
               <a:r>
-                <a:rPr lang="zh-CN" sz="2250" b="1" dirty="0">
+                <a:rPr lang="zh-CN" sz="2100" b="1" dirty="0">
                   <a:solidFill>
                     <a:schemeClr val="accent1"/>
                   </a:solidFill>
@@ -8482,21 +10082,21 @@
                   <a:ea typeface="+mn-ea"/>
                   <a:cs typeface="+mn-cs"/>
                 </a:rPr>
-                <a:t>WP3 系统集成与分层验证</a:t>
+                <a:t>WP3 可靠告警</a:t>
               </a:r>
             </a:p>
           </p:txBody>
         </p:sp>
         <p:sp>
           <p:nvSpPr>
-            <p:cNvPr id="18" name="TextBox 18"/>
+            <p:cNvPr id="22" name="TextBox 22"/>
             <p:cNvSpPr txBox="1"/>
             <p:nvPr/>
           </p:nvSpPr>
           <p:spPr>
             <a:xfrm>
-              <a:off x="1619631" y="5244465"/>
-              <a:ext cx="4513250" cy="352044"/>
+              <a:off x="1619631" y="4377690"/>
+              <a:ext cx="5318608" cy="352044"/>
             </a:xfrm>
             <a:prstGeom prst="rect">
               <a:avLst/>
@@ -8522,20 +10122,176 @@
                   <a:ea typeface="+mn-ea"/>
                   <a:cs typeface="+mn-cs"/>
                 </a:rPr>
-                <a:t>台架 + 固件 + 回放网站 + 数据/报告/演示</a:t>
+                <a:t>固定采样 → 周期/事件公平对照 → ACK / 整机测量</a:t>
               </a:r>
             </a:p>
           </p:txBody>
         </p:sp>
         <p:sp>
           <p:nvSpPr>
-            <p:cNvPr id="19" name="Line 19"/>
+            <p:cNvPr id="23" name="Line 23"/>
             <p:cNvSpPr/>
             <p:nvPr/>
           </p:nvSpPr>
           <p:spPr>
             <a:xfrm>
-              <a:off x="1628775" y="5686425"/>
+              <a:off x="1628775" y="4772025"/>
+              <a:ext cx="10106025" cy="9525"/>
+            </a:xfrm>
+            <a:custGeom>
+              <a:avLst/>
+              <a:gdLst/>
+              <a:ahLst/>
+              <a:cxnLst/>
+              <a:rect l="l" t="t" r="r" b="b"/>
+              <a:pathLst>
+                <a:path w="10106025" h="9525">
+                  <a:moveTo>
+                    <a:pt x="0" y="0"/>
+                  </a:moveTo>
+                  <a:lnTo>
+                    <a:pt x="10106025" y="0"/>
+                  </a:lnTo>
+                </a:path>
+              </a:pathLst>
+            </a:custGeom>
+            <a:noFill/>
+            <a:ln w="9525">
+              <a:solidFill>
+                <a:schemeClr val="accent6"/>
+              </a:solidFill>
+            </a:ln>
+          </p:spPr>
+        </p:sp>
+        <p:sp>
+          <p:nvSpPr>
+            <p:cNvPr id="24" name="TextBox 24"/>
+            <p:cNvSpPr txBox="1"/>
+            <p:nvPr/>
+          </p:nvSpPr>
+          <p:spPr>
+            <a:xfrm>
+              <a:off x="438150" y="5010150"/>
+              <a:ext cx="704469" cy="876300"/>
+            </a:xfrm>
+            <a:prstGeom prst="rect">
+              <a:avLst/>
+            </a:prstGeom>
+            <a:noFill/>
+            <a:ln>
+              <a:noFill/>
+            </a:ln>
+          </p:spPr>
+          <p:txBody>
+            <a:bodyPr wrap="none" lIns="0" tIns="0" rIns="0" bIns="0" anchor="t" anchorCtr="0">
+              <a:spAutoFit/>
+            </a:bodyPr>
+            <a:lstStyle/>
+            <a:p>
+              <a:pPr algn="l"/>
+              <a:r>
+                <a:rPr lang="zh-CN" sz="4500" dirty="0">
+                  <a:solidFill>
+                    <a:schemeClr val="accent1"/>
+                  </a:solidFill>
+                  <a:latin typeface="+mn-lt"/>
+                  <a:ea typeface="+mn-ea"/>
+                  <a:cs typeface="+mn-cs"/>
+                </a:rPr>
+                <a:t>04</a:t>
+              </a:r>
+            </a:p>
+          </p:txBody>
+        </p:sp>
+        <p:sp>
+          <p:nvSpPr>
+            <p:cNvPr id="25" name="TextBox 25"/>
+            <p:cNvSpPr txBox="1"/>
+            <p:nvPr/>
+          </p:nvSpPr>
+          <p:spPr>
+            <a:xfrm>
+              <a:off x="1618107" y="4993005"/>
+              <a:ext cx="2109170" cy="410718"/>
+            </a:xfrm>
+            <a:prstGeom prst="rect">
+              <a:avLst/>
+            </a:prstGeom>
+            <a:noFill/>
+            <a:ln>
+              <a:noFill/>
+            </a:ln>
+          </p:spPr>
+          <p:txBody>
+            <a:bodyPr wrap="none" lIns="0" tIns="0" rIns="0" bIns="0" anchor="t" anchorCtr="0">
+              <a:spAutoFit/>
+            </a:bodyPr>
+            <a:lstStyle/>
+            <a:p>
+              <a:pPr algn="l"/>
+              <a:r>
+                <a:rPr lang="zh-CN" sz="2100" b="1" dirty="0">
+                  <a:solidFill>
+                    <a:schemeClr val="accent1"/>
+                  </a:solidFill>
+                  <a:latin typeface="+mn-lt"/>
+                  <a:ea typeface="+mn-ea"/>
+                  <a:cs typeface="+mn-cs"/>
+                </a:rPr>
+                <a:t>WP4 系统与验证</a:t>
+              </a:r>
+            </a:p>
+          </p:txBody>
+        </p:sp>
+        <p:sp>
+          <p:nvSpPr>
+            <p:cNvPr id="26" name="TextBox 26"/>
+            <p:cNvSpPr txBox="1"/>
+            <p:nvPr/>
+          </p:nvSpPr>
+          <p:spPr>
+            <a:xfrm>
+              <a:off x="1619631" y="5444490"/>
+              <a:ext cx="5252314" cy="352044"/>
+            </a:xfrm>
+            <a:prstGeom prst="rect">
+              <a:avLst/>
+            </a:prstGeom>
+            <a:noFill/>
+            <a:ln>
+              <a:noFill/>
+            </a:ln>
+          </p:spPr>
+          <p:txBody>
+            <a:bodyPr wrap="none" lIns="0" tIns="0" rIns="0" bIns="0" anchor="t" anchorCtr="0">
+              <a:spAutoFit/>
+            </a:bodyPr>
+            <a:lstStyle/>
+            <a:p>
+              <a:pPr algn="l"/>
+              <a:r>
+                <a:rPr lang="zh-CN" sz="1800" dirty="0">
+                  <a:solidFill>
+                    <a:schemeClr val="dk1"/>
+                  </a:solidFill>
+                  <a:latin typeface="+mn-lt"/>
+                  <a:ea typeface="+mn-ea"/>
+                  <a:cs typeface="+mn-cs"/>
+                </a:rPr>
+                <a:t>节点 / 管理软件 / 台架 → 独立实测 → 数据与报告</a:t>
+              </a:r>
+            </a:p>
+          </p:txBody>
+        </p:sp>
+        <p:sp>
+          <p:nvSpPr>
+            <p:cNvPr id="27" name="Line 27"/>
+            <p:cNvSpPr/>
+            <p:nvPr/>
+          </p:nvSpPr>
+          <p:spPr>
+            <a:xfrm>
+              <a:off x="1628775" y="5838825"/>
               <a:ext cx="10106025" cy="9525"/>
             </a:xfrm>
             <a:custGeom>
@@ -8609,7 +10365,7 @@
         <p:spPr>
           <a:xfrm>
             <a:off x="451104" y="289560"/>
-            <a:ext cx="1143000" cy="234696"/>
+            <a:ext cx="1304544" cy="234696"/>
           </a:xfrm>
           <a:prstGeom prst="rect">
             <a:avLst/>
@@ -8635,14 +10391,174 @@
                 <a:ea typeface="+mn-ea"/>
                 <a:cs typeface="+mn-cs"/>
               </a:rPr>
-              <a:t>未标定简化模型</a:t>
+              <a:t>布点假设｜未标定</a:t>
+            </a:r>
+          </a:p>
+        </p:txBody>
+      </p:sp>
+      <p:sp>
+        <p:nvSpPr>
+          <p:cNvPr id="3" name="page-route-0"/>
+          <p:cNvSpPr txBox="1"/>
+          <p:nvPr/>
+        </p:nvSpPr>
+        <p:spPr>
+          <a:xfrm>
+            <a:off x="7518654" y="289560"/>
+            <a:ext cx="335280" cy="234696"/>
+          </a:xfrm>
+          <a:prstGeom prst="rect">
+            <a:avLst/>
+          </a:prstGeom>
+          <a:noFill/>
+          <a:ln>
+            <a:noFill/>
+          </a:ln>
+        </p:spPr>
+        <p:txBody>
+          <a:bodyPr wrap="none" lIns="0" tIns="0" rIns="0" bIns="0" anchor="t" anchorCtr="0">
+            <a:spAutoFit/>
+          </a:bodyPr>
+          <a:lstStyle/>
+          <a:p>
+            <a:pPr algn="l"/>
+            <a:r>
+              <a:rPr lang="zh-CN" sz="1200" dirty="0">
+                <a:solidFill>
+                  <a:schemeClr val="accent5"/>
+                </a:solidFill>
+                <a:latin typeface="+mn-lt"/>
+                <a:ea typeface="+mn-ea"/>
+                <a:cs typeface="+mn-cs"/>
+              </a:rPr>
+              <a:t>场景</a:t>
+            </a:r>
+          </a:p>
+        </p:txBody>
+      </p:sp>
+      <p:sp>
+        <p:nvSpPr>
+          <p:cNvPr id="4" name="page-route-1"/>
+          <p:cNvSpPr txBox="1"/>
+          <p:nvPr/>
+        </p:nvSpPr>
+        <p:spPr>
+          <a:xfrm>
+            <a:off x="8404479" y="289560"/>
+            <a:ext cx="335280" cy="234696"/>
+          </a:xfrm>
+          <a:prstGeom prst="rect">
+            <a:avLst/>
+          </a:prstGeom>
+          <a:noFill/>
+          <a:ln>
+            <a:noFill/>
+          </a:ln>
+        </p:spPr>
+        <p:txBody>
+          <a:bodyPr wrap="none" lIns="0" tIns="0" rIns="0" bIns="0" anchor="t" anchorCtr="0">
+            <a:spAutoFit/>
+          </a:bodyPr>
+          <a:lstStyle/>
+          <a:p>
+            <a:pPr algn="l"/>
+            <a:r>
+              <a:rPr lang="zh-CN" sz="1200" b="1" dirty="0">
+                <a:solidFill>
+                  <a:schemeClr val="accent1"/>
+                </a:solidFill>
+                <a:latin typeface="+mn-lt"/>
+                <a:ea typeface="+mn-ea"/>
+                <a:cs typeface="+mn-cs"/>
+              </a:rPr>
+              <a:t>系统</a:t>
+            </a:r>
+          </a:p>
+        </p:txBody>
+      </p:sp>
+      <p:sp>
+        <p:nvSpPr>
+          <p:cNvPr id="5" name="page-route-2"/>
+          <p:cNvSpPr txBox="1"/>
+          <p:nvPr/>
+        </p:nvSpPr>
+        <p:spPr>
+          <a:xfrm>
+            <a:off x="9290304" y="289560"/>
+            <a:ext cx="335280" cy="234696"/>
+          </a:xfrm>
+          <a:prstGeom prst="rect">
+            <a:avLst/>
+          </a:prstGeom>
+          <a:noFill/>
+          <a:ln>
+            <a:noFill/>
+          </a:ln>
+        </p:spPr>
+        <p:txBody>
+          <a:bodyPr wrap="none" lIns="0" tIns="0" rIns="0" bIns="0" anchor="t" anchorCtr="0">
+            <a:spAutoFit/>
+          </a:bodyPr>
+          <a:lstStyle/>
+          <a:p>
+            <a:pPr algn="l"/>
+            <a:r>
+              <a:rPr lang="zh-CN" sz="1200" dirty="0">
+                <a:solidFill>
+                  <a:schemeClr val="accent5"/>
+                </a:solidFill>
+                <a:latin typeface="+mn-lt"/>
+                <a:ea typeface="+mn-ea"/>
+                <a:cs typeface="+mn-cs"/>
+              </a:rPr>
+              <a:t>证据</a:t>
+            </a:r>
+          </a:p>
+        </p:txBody>
+      </p:sp>
+      <p:sp>
+        <p:nvSpPr>
+          <p:cNvPr id="6" name="page-route-3"/>
+          <p:cNvSpPr txBox="1"/>
+          <p:nvPr/>
+        </p:nvSpPr>
+        <p:spPr>
+          <a:xfrm>
+            <a:off x="10176129" y="289560"/>
+            <a:ext cx="335280" cy="234696"/>
+          </a:xfrm>
+          <a:prstGeom prst="rect">
+            <a:avLst/>
+          </a:prstGeom>
+          <a:noFill/>
+          <a:ln>
+            <a:noFill/>
+          </a:ln>
+        </p:spPr>
+        <p:txBody>
+          <a:bodyPr wrap="none" lIns="0" tIns="0" rIns="0" bIns="0" anchor="t" anchorCtr="0">
+            <a:spAutoFit/>
+          </a:bodyPr>
+          <a:lstStyle/>
+          <a:p>
+            <a:pPr algn="l"/>
+            <a:r>
+              <a:rPr lang="zh-CN" sz="1200" dirty="0">
+                <a:solidFill>
+                  <a:schemeClr val="accent5"/>
+                </a:solidFill>
+                <a:latin typeface="+mn-lt"/>
+                <a:ea typeface="+mn-ea"/>
+                <a:cs typeface="+mn-cs"/>
+              </a:rPr>
+              <a:t>实施</a:t>
             </a:r>
           </a:p>
         </p:txBody>
       </p:sp>
       <p:grpSp>
         <p:nvGrpSpPr>
-          <p:cNvPr id="4" name="page-title"/>
+          <p:cNvPr id="8" name="page-title"/>
           <p:cNvGrpSpPr/>
           <p:nvPr/>
         </p:nvGrpSpPr>
@@ -8656,7 +10572,7 @@
         </p:grpSpPr>
         <p:sp>
           <p:nvSpPr>
-            <p:cNvPr id="3" name="TextBox 3"/>
+            <p:cNvPr id="7" name="TextBox 7"/>
             <p:cNvSpPr txBox="1"/>
             <p:nvPr/>
           </p:nvSpPr>
@@ -8689,7 +10605,7 @@
                   <a:ea typeface="+mj-ea"/>
                   <a:cs typeface="+mj-cs"/>
                 </a:rPr>
-                <a:t>先把测点与假设放进同一个模型</a:t>
+                <a:t>双压力测点为有限诊断补充依据</a:t>
               </a:r>
             </a:p>
           </p:txBody>
@@ -8697,7 +10613,7 @@
       </p:grpSp>
       <p:sp>
         <p:nvSpPr>
-          <p:cNvPr id="5" name="Line 5"/>
+          <p:cNvPr id="9" name="Line 9"/>
           <p:cNvSpPr/>
           <p:nvPr/>
         </p:nvSpPr>
@@ -8733,14 +10649,14 @@
       </p:sp>
       <p:sp>
         <p:nvSpPr>
-          <p:cNvPr id="6" name="source-footer"/>
+          <p:cNvPr id="10" name="source-footer"/>
           <p:cNvSpPr txBox="1"/>
           <p:nvPr/>
         </p:nvSpPr>
         <p:spPr>
           <a:xfrm>
             <a:off x="451104" y="6376035"/>
-            <a:ext cx="6578956" cy="234696"/>
+            <a:ext cx="6473952" cy="234696"/>
           </a:xfrm>
           <a:prstGeom prst="rect">
             <a:avLst/>
@@ -8766,14 +10682,14 @@
                 <a:ea typeface="+mn-ea"/>
                 <a:cs typeface="+mn-cs"/>
               </a:rPr>
-              <a:t>来源：run_simulation.py 等效模型；指数/阻力未标定。图为设计与模型示意，不是样机。</a:t>
+              <a:t>来源：diagnosis_feasibility.py 的布点假设；平方律及负载未标定。设计示意，非样机。</a:t>
             </a:r>
           </a:p>
         </p:txBody>
       </p:sp>
       <p:sp>
         <p:nvSpPr>
-          <p:cNvPr id="7" name="page-number"/>
+          <p:cNvPr id="11" name="page-number"/>
           <p:cNvSpPr txBox="1"/>
           <p:nvPr/>
         </p:nvSpPr>
@@ -8813,28 +10729,28 @@
       </p:sp>
       <p:grpSp>
         <p:nvGrpSpPr>
-          <p:cNvPr id="30" name="hydraulic-model"/>
+          <p:cNvPr id="40" name="hydraulic-model"/>
           <p:cNvGrpSpPr/>
           <p:nvPr/>
         </p:nvGrpSpPr>
         <p:grpSpPr>
           <a:xfrm>
             <a:off x="484632" y="1830705"/>
-            <a:ext cx="10305669" cy="3843528"/>
+            <a:ext cx="10486644" cy="4221670"/>
             <a:chOff x="484632" y="1830705"/>
-            <a:chExt cx="10305669" cy="3843528"/>
+            <a:chExt cx="10486644" cy="4221670"/>
           </a:xfrm>
         </p:grpSpPr>
         <p:sp>
           <p:nvSpPr>
-            <p:cNvPr id="8" name="TextBox 8"/>
+            <p:cNvPr id="12" name="TextBox 12"/>
             <p:cNvSpPr txBox="1"/>
             <p:nvPr/>
           </p:nvSpPr>
           <p:spPr>
             <a:xfrm>
               <a:off x="484632" y="1830705"/>
-              <a:ext cx="3963962" cy="410718"/>
+              <a:ext cx="4237063" cy="410718"/>
             </a:xfrm>
             <a:prstGeom prst="rect">
               <a:avLst/>
@@ -8860,14 +10776,14 @@
                   <a:ea typeface="+mn-ea"/>
                   <a:cs typeface="+mn-cs"/>
                 </a:rPr>
-                <a:t>共同供水 → 两支路 → A支路测量</a:t>
+                <a:t>共同供水 → 双支路 → P0 / P1 / Q</a:t>
               </a:r>
             </a:p>
           </p:txBody>
         </p:sp>
         <p:sp>
           <p:nvSpPr>
-            <p:cNvPr id="9" name="Line 9"/>
+            <p:cNvPr id="13" name="Line 13"/>
             <p:cNvSpPr/>
             <p:nvPr/>
           </p:nvSpPr>
@@ -8903,7 +10819,7 @@
         </p:sp>
         <p:sp>
           <p:nvSpPr>
-            <p:cNvPr id="10" name="Line 10"/>
+            <p:cNvPr id="14" name="Line 14"/>
             <p:cNvSpPr/>
             <p:nvPr/>
           </p:nvSpPr>
@@ -8939,7 +10855,7 @@
         </p:sp>
         <p:sp>
           <p:nvSpPr>
-            <p:cNvPr id="11" name="Line 11"/>
+            <p:cNvPr id="15" name="Line 15"/>
             <p:cNvSpPr/>
             <p:nvPr/>
           </p:nvSpPr>
@@ -8975,7 +10891,7 @@
         </p:sp>
         <p:sp>
           <p:nvSpPr>
-            <p:cNvPr id="12" name="Line 12"/>
+            <p:cNvPr id="16" name="Line 16"/>
             <p:cNvSpPr/>
             <p:nvPr/>
           </p:nvSpPr>
@@ -9011,7 +10927,7 @@
         </p:sp>
         <p:sp>
           <p:nvSpPr>
-            <p:cNvPr id="13" name="Rectangle 13"/>
+            <p:cNvPr id="17" name="Rectangle 17"/>
             <p:cNvSpPr/>
             <p:nvPr/>
           </p:nvSpPr>
@@ -9035,7 +10951,7 @@
         </p:sp>
         <p:sp>
           <p:nvSpPr>
-            <p:cNvPr id="14" name="TextBox 14"/>
+            <p:cNvPr id="18" name="TextBox 18"/>
             <p:cNvSpPr txBox="1"/>
             <p:nvPr/>
           </p:nvSpPr>
@@ -9075,7 +10991,7 @@
         </p:sp>
         <p:sp>
           <p:nvSpPr>
-            <p:cNvPr id="15" name="Rectangle 15"/>
+            <p:cNvPr id="19" name="Rectangle 19"/>
             <p:cNvSpPr/>
             <p:nvPr/>
           </p:nvSpPr>
@@ -9099,7 +11015,7 @@
         </p:sp>
         <p:sp>
           <p:nvSpPr>
-            <p:cNvPr id="16" name="TextBox 16"/>
+            <p:cNvPr id="20" name="TextBox 20"/>
             <p:cNvSpPr txBox="1"/>
             <p:nvPr/>
           </p:nvSpPr>
@@ -9139,7 +11055,71 @@
         </p:sp>
         <p:sp>
           <p:nvSpPr>
-            <p:cNvPr id="17" name="Ellipse 17"/>
+            <p:cNvPr id="21" name="Ellipse 21"/>
+            <p:cNvSpPr/>
+            <p:nvPr/>
+          </p:nvSpPr>
+          <p:spPr>
+            <a:xfrm>
+              <a:off x="3590925" y="2466975"/>
+              <a:ext cx="495300" cy="495300"/>
+            </a:xfrm>
+            <a:prstGeom prst="ellipse">
+              <a:avLst/>
+            </a:prstGeom>
+            <a:solidFill>
+              <a:schemeClr val="lt1"/>
+            </a:solidFill>
+            <a:ln w="28575">
+              <a:solidFill>
+                <a:schemeClr val="accent3"/>
+              </a:solidFill>
+            </a:ln>
+          </p:spPr>
+        </p:sp>
+        <p:sp>
+          <p:nvSpPr>
+            <p:cNvPr id="22" name="TextBox 22"/>
+            <p:cNvSpPr txBox="1"/>
+            <p:nvPr/>
+          </p:nvSpPr>
+          <p:spPr>
+            <a:xfrm>
+              <a:off x="3688613" y="2606040"/>
+              <a:ext cx="299923" cy="352044"/>
+            </a:xfrm>
+            <a:prstGeom prst="rect">
+              <a:avLst/>
+            </a:prstGeom>
+            <a:noFill/>
+            <a:ln>
+              <a:noFill/>
+            </a:ln>
+          </p:spPr>
+          <p:txBody>
+            <a:bodyPr wrap="none" lIns="0" tIns="0" rIns="0" bIns="0" anchor="t" anchorCtr="0">
+              <a:spAutoFit/>
+            </a:bodyPr>
+            <a:lstStyle/>
+            <a:p>
+              <a:pPr algn="ctr"/>
+              <a:r>
+                <a:rPr lang="en-US" sz="1800" dirty="0">
+                  <a:solidFill>
+                    <a:schemeClr val="accent3"/>
+                  </a:solidFill>
+                  <a:latin typeface="+mn-lt"/>
+                  <a:ea typeface="+mn-ea"/>
+                  <a:cs typeface="+mn-cs"/>
+                </a:rPr>
+                <a:t>P0</a:t>
+              </a:r>
+            </a:p>
+          </p:txBody>
+        </p:sp>
+        <p:sp>
+          <p:nvSpPr>
+            <p:cNvPr id="23" name="Ellipse 23"/>
             <p:cNvSpPr/>
             <p:nvPr/>
           </p:nvSpPr>
@@ -9163,14 +11143,14 @@
         </p:sp>
         <p:sp>
           <p:nvSpPr>
-            <p:cNvPr id="18" name="TextBox 18"/>
+            <p:cNvPr id="24" name="TextBox 24"/>
             <p:cNvSpPr txBox="1"/>
             <p:nvPr/>
           </p:nvSpPr>
           <p:spPr>
             <a:xfrm>
-              <a:off x="6845122" y="2606040"/>
-              <a:ext cx="159106" cy="352044"/>
+              <a:off x="6774713" y="2606040"/>
+              <a:ext cx="299923" cy="352044"/>
             </a:xfrm>
             <a:prstGeom prst="rect">
               <a:avLst/>
@@ -9196,14 +11176,14 @@
                   <a:ea typeface="+mn-ea"/>
                   <a:cs typeface="+mn-cs"/>
                 </a:rPr>
-                <a:t>P</a:t>
+                <a:t>P1</a:t>
               </a:r>
             </a:p>
           </p:txBody>
         </p:sp>
         <p:sp>
           <p:nvSpPr>
-            <p:cNvPr id="19" name="Ellipse 19"/>
+            <p:cNvPr id="25" name="Ellipse 25"/>
             <p:cNvSpPr/>
             <p:nvPr/>
           </p:nvSpPr>
@@ -9227,7 +11207,7 @@
         </p:sp>
         <p:sp>
           <p:nvSpPr>
-            <p:cNvPr id="20" name="TextBox 20"/>
+            <p:cNvPr id="26" name="TextBox 26"/>
             <p:cNvSpPr txBox="1"/>
             <p:nvPr/>
           </p:nvSpPr>
@@ -9267,7 +11247,7 @@
         </p:sp>
         <p:sp>
           <p:nvSpPr>
-            <p:cNvPr id="21" name="Rectangle 21"/>
+            <p:cNvPr id="27" name="Rectangle 27"/>
             <p:cNvSpPr/>
             <p:nvPr/>
           </p:nvSpPr>
@@ -9291,7 +11271,7 @@
         </p:sp>
         <p:sp>
           <p:nvSpPr>
-            <p:cNvPr id="22" name="Rectangle 22"/>
+            <p:cNvPr id="28" name="Rectangle 28"/>
             <p:cNvSpPr/>
             <p:nvPr/>
           </p:nvSpPr>
@@ -9315,7 +11295,7 @@
         </p:sp>
         <p:sp>
           <p:nvSpPr>
-            <p:cNvPr id="23" name="TextBox 23"/>
+            <p:cNvPr id="29" name="TextBox 29"/>
             <p:cNvSpPr txBox="1"/>
             <p:nvPr/>
           </p:nvSpPr>
@@ -9355,13 +11335,13 @@
         </p:sp>
         <p:sp>
           <p:nvSpPr>
-            <p:cNvPr id="24" name="TextBox 24"/>
+            <p:cNvPr id="30" name="TextBox 30"/>
             <p:cNvSpPr txBox="1"/>
             <p:nvPr/>
           </p:nvSpPr>
           <p:spPr>
             <a:xfrm>
-              <a:off x="6496431" y="2063115"/>
+              <a:off x="6353556" y="2063115"/>
               <a:ext cx="643738" cy="352044"/>
             </a:xfrm>
             <a:prstGeom prst="rect">
@@ -9388,14 +11368,14 @@
                   <a:ea typeface="+mn-ea"/>
                   <a:cs typeface="+mn-cs"/>
                 </a:rPr>
-                <a:t>A测点</a:t>
+                <a:t>A下游</a:t>
               </a:r>
             </a:p>
           </p:txBody>
         </p:sp>
         <p:sp>
           <p:nvSpPr>
-            <p:cNvPr id="25" name="TextBox 25"/>
+            <p:cNvPr id="31" name="TextBox 31"/>
             <p:cNvSpPr txBox="1"/>
             <p:nvPr/>
           </p:nvSpPr>
@@ -9435,7 +11415,119 @@
         </p:sp>
         <p:sp>
           <p:nvSpPr>
-            <p:cNvPr id="26" name="TextBox 26"/>
+            <p:cNvPr id="32" name="Line 32"/>
+            <p:cNvSpPr/>
+            <p:nvPr/>
+          </p:nvSpPr>
+          <p:spPr>
+            <a:xfrm>
+              <a:off x="8801100" y="2714625"/>
+              <a:ext cx="9525" cy="762000"/>
+            </a:xfrm>
+            <a:custGeom>
+              <a:avLst/>
+              <a:gdLst/>
+              <a:ahLst/>
+              <a:cxnLst/>
+              <a:rect l="l" t="t" r="r" b="b"/>
+              <a:pathLst>
+                <a:path w="9525" h="762000">
+                  <a:moveTo>
+                    <a:pt x="0" y="0"/>
+                  </a:moveTo>
+                  <a:lnTo>
+                    <a:pt x="0" y="762000"/>
+                  </a:lnTo>
+                </a:path>
+              </a:pathLst>
+            </a:custGeom>
+            <a:noFill/>
+            <a:ln w="19050">
+              <a:solidFill>
+                <a:schemeClr val="accent2"/>
+              </a:solidFill>
+            </a:ln>
+          </p:spPr>
+        </p:sp>
+        <p:sp>
+          <p:nvSpPr>
+            <p:cNvPr id="33" name="Line 33"/>
+            <p:cNvSpPr/>
+            <p:nvPr/>
+          </p:nvSpPr>
+          <p:spPr>
+            <a:xfrm>
+              <a:off x="8801100" y="3476625"/>
+              <a:ext cx="1485900" cy="9525"/>
+            </a:xfrm>
+            <a:custGeom>
+              <a:avLst/>
+              <a:gdLst/>
+              <a:ahLst/>
+              <a:cxnLst/>
+              <a:rect l="l" t="t" r="r" b="b"/>
+              <a:pathLst>
+                <a:path w="1485900" h="9525">
+                  <a:moveTo>
+                    <a:pt x="0" y="0"/>
+                  </a:moveTo>
+                  <a:lnTo>
+                    <a:pt x="1485900" y="0"/>
+                  </a:lnTo>
+                </a:path>
+              </a:pathLst>
+            </a:custGeom>
+            <a:noFill/>
+            <a:ln w="19050">
+              <a:solidFill>
+                <a:schemeClr val="accent2"/>
+              </a:solidFill>
+            </a:ln>
+          </p:spPr>
+        </p:sp>
+        <p:sp>
+          <p:nvSpPr>
+            <p:cNvPr id="34" name="TextBox 34"/>
+            <p:cNvSpPr txBox="1"/>
+            <p:nvPr/>
+          </p:nvSpPr>
+          <p:spPr>
+            <a:xfrm>
+              <a:off x="10468356" y="3348990"/>
+              <a:ext cx="502920" cy="352044"/>
+            </a:xfrm>
+            <a:prstGeom prst="rect">
+              <a:avLst/>
+            </a:prstGeom>
+            <a:noFill/>
+            <a:ln>
+              <a:noFill/>
+            </a:ln>
+          </p:spPr>
+          <p:txBody>
+            <a:bodyPr wrap="none" lIns="0" tIns="0" rIns="0" bIns="0" anchor="t" anchorCtr="0">
+              <a:spAutoFit/>
+            </a:bodyPr>
+            <a:lstStyle/>
+            <a:p>
+              <a:pPr algn="l"/>
+              <a:r>
+                <a:rPr lang="zh-CN" sz="1800" dirty="0">
+                  <a:solidFill>
+                    <a:schemeClr val="accent2"/>
+                  </a:solidFill>
+                  <a:latin typeface="+mn-lt"/>
+                  <a:ea typeface="+mn-ea"/>
+                  <a:cs typeface="+mn-cs"/>
+                </a:rPr>
+                <a:t>泄漏</a:t>
+              </a:r>
+            </a:p>
+          </p:txBody>
+        </p:sp>
+        <p:sp>
+          <p:nvSpPr>
+            <p:cNvPr id="35" name="TextBox 35"/>
             <p:cNvSpPr txBox="1"/>
             <p:nvPr/>
           </p:nvSpPr>
@@ -9475,7 +11567,7 @@
         </p:sp>
         <p:sp>
           <p:nvSpPr>
-            <p:cNvPr id="27" name="TextBox 27"/>
+            <p:cNvPr id="36" name="TextBox 36"/>
             <p:cNvSpPr txBox="1"/>
             <p:nvPr/>
           </p:nvSpPr>
@@ -9517,14 +11609,14 @@
           <mc:Choice xmlns:a14="http://schemas.microsoft.com/office/drawing/2010/main" Requires="a14">
             <p:sp>
               <p:nvSpPr>
-                <p:cNvPr id="28" name="TextBox 28"/>
+                <p:cNvPr id="37" name="TextBox 37"/>
                 <p:cNvSpPr txBox="1"/>
                 <p:nvPr/>
               </p:nvSpPr>
               <p:spPr>
                 <a:xfrm>
                   <a:off x="484632" y="5196840"/>
-                  <a:ext cx="2495245" cy="477393"/>
+                  <a:ext cx="2659532" cy="508597"/>
                 </a:xfrm>
                 <a:prstGeom prst="rect">
                   <a:avLst/>
@@ -9550,7 +11642,7 @@
                       <a:ea typeface="+mn-ea"/>
                       <a:cs typeface="+mn-cs"/>
                     </a:rPr>
-                    <a:t>负载模型：</a:t>
+                    <a:t>负载假设：</a:t>
                   </a:r>
                   <a14:m>
                     <m:oMath xmlns:a="http://schemas.openxmlformats.org/drawingml/2006/main" xmlns:m="http://schemas.openxmlformats.org/officeDocument/2006/math">
@@ -9606,17 +11698,34 @@
                         </m:radPr>
                         <m:deg/>
                         <m:e>
-                          <m:r>
-                            <a:rPr lang="zh-CN" sz="2100" dirty="0">
-                              <a:solidFill>
-                                <a:schemeClr val="accent1"/>
-                              </a:solidFill>
-                              <a:latin typeface="Cambria Math"/>
-                              <a:ea typeface="Cambria Math"/>
-                              <a:cs typeface="Cambria Math"/>
-                            </a:rPr>
-                            <m:t>P</m:t>
-                          </m:r>
+                          <m:sSub>
+                            <m:e>
+                              <m:r>
+                                <a:rPr lang="zh-CN" sz="2100" dirty="0">
+                                  <a:solidFill>
+                                    <a:schemeClr val="accent1"/>
+                                  </a:solidFill>
+                                  <a:latin typeface="Cambria Math"/>
+                                  <a:ea typeface="Cambria Math"/>
+                                  <a:cs typeface="Cambria Math"/>
+                                </a:rPr>
+                                <m:t>P</m:t>
+                              </m:r>
+                            </m:e>
+                            <m:sub>
+                              <m:r>
+                                <a:rPr lang="zh-CN" sz="2100" dirty="0">
+                                  <a:solidFill>
+                                    <a:schemeClr val="accent1"/>
+                                  </a:solidFill>
+                                  <a:latin typeface="Cambria Math"/>
+                                  <a:ea typeface="Cambria Math"/>
+                                  <a:cs typeface="Cambria Math"/>
+                                </a:rPr>
+                                <m:t>1</m:t>
+                              </m:r>
+                            </m:sub>
+                          </m:sSub>
                         </m:e>
                       </m:rad>
                     </m:oMath>
@@ -9628,14 +11737,14 @@
         </mc:AlternateContent>
         <p:sp>
           <p:nvSpPr>
-            <p:cNvPr id="29" name="TextBox 29"/>
+            <p:cNvPr id="38" name="TextBox 38"/>
             <p:cNvSpPr txBox="1"/>
             <p:nvPr/>
           </p:nvSpPr>
           <p:spPr>
             <a:xfrm>
               <a:off x="5001006" y="5282565"/>
-              <a:ext cx="3410712" cy="352044"/>
+              <a:ext cx="2996489" cy="352044"/>
             </a:xfrm>
             <a:prstGeom prst="rect">
               <a:avLst/>
@@ -9655,13 +11764,53 @@
               <a:r>
                 <a:rPr lang="zh-CN" sz="1800" dirty="0">
                   <a:solidFill>
+                    <a:schemeClr val="accent1"/>
+                  </a:solidFill>
+                  <a:latin typeface="+mn-lt"/>
+                  <a:ea typeface="+mn-ea"/>
+                  <a:cs typeface="+mn-cs"/>
+                </a:rPr>
+                <a:t>压降假设：P0 − P1 = R·Q²</a:t>
+              </a:r>
+            </a:p>
+          </p:txBody>
+        </p:sp>
+        <p:sp>
+          <p:nvSpPr>
+            <p:cNvPr id="39" name="TextBox 39"/>
+            <p:cNvSpPr txBox="1"/>
+            <p:nvPr/>
+          </p:nvSpPr>
+          <p:spPr>
+            <a:xfrm>
+              <a:off x="488442" y="5788342"/>
+              <a:ext cx="5284089" cy="264033"/>
+            </a:xfrm>
+            <a:prstGeom prst="rect">
+              <a:avLst/>
+            </a:prstGeom>
+            <a:noFill/>
+            <a:ln>
+              <a:noFill/>
+            </a:ln>
+          </p:spPr>
+          <p:txBody>
+            <a:bodyPr wrap="none" lIns="0" tIns="0" rIns="0" bIns="0" anchor="t" anchorCtr="0">
+              <a:spAutoFit/>
+            </a:bodyPr>
+            <a:lstStyle/>
+            <a:p>
+              <a:pPr algn="l"/>
+              <a:r>
+                <a:rPr lang="zh-CN" sz="1350" dirty="0">
+                  <a:solidFill>
                     <a:schemeClr val="accent5"/>
                   </a:solidFill>
                   <a:latin typeface="+mn-lt"/>
                   <a:ea typeface="+mn-ea"/>
                   <a:cs typeface="+mn-cs"/>
                 </a:rPr>
-                <a:t>平方根指数与实际水路仍需校核</a:t>
+                <a:t>测点间健康压降与差分不确定度必须先标定；图为集中等效模型。</a:t>
               </a:r>
             </a:p>
           </p:txBody>
@@ -9738,14 +11887,174 @@
                 <a:ea typeface="+mn-ea"/>
                 <a:cs typeface="+mn-cs"/>
               </a:rPr>
-              <a:t>合成仿真｜非实测</a:t>
+              <a:t>合成模型｜非实测</a:t>
+            </a:r>
+          </a:p>
+        </p:txBody>
+      </p:sp>
+      <p:sp>
+        <p:nvSpPr>
+          <p:cNvPr id="3" name="page-route-0"/>
+          <p:cNvSpPr txBox="1"/>
+          <p:nvPr/>
+        </p:nvSpPr>
+        <p:spPr>
+          <a:xfrm>
+            <a:off x="7518654" y="289560"/>
+            <a:ext cx="335280" cy="234696"/>
+          </a:xfrm>
+          <a:prstGeom prst="rect">
+            <a:avLst/>
+          </a:prstGeom>
+          <a:noFill/>
+          <a:ln>
+            <a:noFill/>
+          </a:ln>
+        </p:spPr>
+        <p:txBody>
+          <a:bodyPr wrap="none" lIns="0" tIns="0" rIns="0" bIns="0" anchor="t" anchorCtr="0">
+            <a:spAutoFit/>
+          </a:bodyPr>
+          <a:lstStyle/>
+          <a:p>
+            <a:pPr algn="l"/>
+            <a:r>
+              <a:rPr lang="zh-CN" sz="1200" dirty="0">
+                <a:solidFill>
+                  <a:schemeClr val="accent5"/>
+                </a:solidFill>
+                <a:latin typeface="+mn-lt"/>
+                <a:ea typeface="+mn-ea"/>
+                <a:cs typeface="+mn-cs"/>
+              </a:rPr>
+              <a:t>场景</a:t>
+            </a:r>
+          </a:p>
+        </p:txBody>
+      </p:sp>
+      <p:sp>
+        <p:nvSpPr>
+          <p:cNvPr id="4" name="page-route-1"/>
+          <p:cNvSpPr txBox="1"/>
+          <p:nvPr/>
+        </p:nvSpPr>
+        <p:spPr>
+          <a:xfrm>
+            <a:off x="8404479" y="289560"/>
+            <a:ext cx="335280" cy="234696"/>
+          </a:xfrm>
+          <a:prstGeom prst="rect">
+            <a:avLst/>
+          </a:prstGeom>
+          <a:noFill/>
+          <a:ln>
+            <a:noFill/>
+          </a:ln>
+        </p:spPr>
+        <p:txBody>
+          <a:bodyPr wrap="none" lIns="0" tIns="0" rIns="0" bIns="0" anchor="t" anchorCtr="0">
+            <a:spAutoFit/>
+          </a:bodyPr>
+          <a:lstStyle/>
+          <a:p>
+            <a:pPr algn="l"/>
+            <a:r>
+              <a:rPr lang="zh-CN" sz="1200" dirty="0">
+                <a:solidFill>
+                  <a:schemeClr val="accent5"/>
+                </a:solidFill>
+                <a:latin typeface="+mn-lt"/>
+                <a:ea typeface="+mn-ea"/>
+                <a:cs typeface="+mn-cs"/>
+              </a:rPr>
+              <a:t>系统</a:t>
+            </a:r>
+          </a:p>
+        </p:txBody>
+      </p:sp>
+      <p:sp>
+        <p:nvSpPr>
+          <p:cNvPr id="5" name="page-route-2"/>
+          <p:cNvSpPr txBox="1"/>
+          <p:nvPr/>
+        </p:nvSpPr>
+        <p:spPr>
+          <a:xfrm>
+            <a:off x="9290304" y="289560"/>
+            <a:ext cx="335280" cy="234696"/>
+          </a:xfrm>
+          <a:prstGeom prst="rect">
+            <a:avLst/>
+          </a:prstGeom>
+          <a:noFill/>
+          <a:ln>
+            <a:noFill/>
+          </a:ln>
+        </p:spPr>
+        <p:txBody>
+          <a:bodyPr wrap="none" lIns="0" tIns="0" rIns="0" bIns="0" anchor="t" anchorCtr="0">
+            <a:spAutoFit/>
+          </a:bodyPr>
+          <a:lstStyle/>
+          <a:p>
+            <a:pPr algn="l"/>
+            <a:r>
+              <a:rPr lang="zh-CN" sz="1200" b="1" dirty="0">
+                <a:solidFill>
+                  <a:schemeClr val="accent1"/>
+                </a:solidFill>
+                <a:latin typeface="+mn-lt"/>
+                <a:ea typeface="+mn-ea"/>
+                <a:cs typeface="+mn-cs"/>
+              </a:rPr>
+              <a:t>证据</a:t>
+            </a:r>
+          </a:p>
+        </p:txBody>
+      </p:sp>
+      <p:sp>
+        <p:nvSpPr>
+          <p:cNvPr id="6" name="page-route-3"/>
+          <p:cNvSpPr txBox="1"/>
+          <p:nvPr/>
+        </p:nvSpPr>
+        <p:spPr>
+          <a:xfrm>
+            <a:off x="10176129" y="289560"/>
+            <a:ext cx="335280" cy="234696"/>
+          </a:xfrm>
+          <a:prstGeom prst="rect">
+            <a:avLst/>
+          </a:prstGeom>
+          <a:noFill/>
+          <a:ln>
+            <a:noFill/>
+          </a:ln>
+        </p:spPr>
+        <p:txBody>
+          <a:bodyPr wrap="none" lIns="0" tIns="0" rIns="0" bIns="0" anchor="t" anchorCtr="0">
+            <a:spAutoFit/>
+          </a:bodyPr>
+          <a:lstStyle/>
+          <a:p>
+            <a:pPr algn="l"/>
+            <a:r>
+              <a:rPr lang="zh-CN" sz="1200" dirty="0">
+                <a:solidFill>
+                  <a:schemeClr val="accent5"/>
+                </a:solidFill>
+                <a:latin typeface="+mn-lt"/>
+                <a:ea typeface="+mn-ea"/>
+                <a:cs typeface="+mn-cs"/>
+              </a:rPr>
+              <a:t>实施</a:t>
             </a:r>
           </a:p>
         </p:txBody>
       </p:sp>
       <p:grpSp>
         <p:nvGrpSpPr>
-          <p:cNvPr id="4" name="page-title"/>
+          <p:cNvPr id="8" name="page-title"/>
           <p:cNvGrpSpPr/>
           <p:nvPr/>
         </p:nvGrpSpPr>
@@ -9759,7 +12068,7 @@
         </p:grpSpPr>
         <p:sp>
           <p:nvSpPr>
-            <p:cNvPr id="3" name="TextBox 3"/>
+            <p:cNvPr id="7" name="TextBox 7"/>
             <p:cNvSpPr txBox="1"/>
             <p:nvPr/>
           </p:nvSpPr>
@@ -9792,7 +12101,7 @@
                   <a:ea typeface="+mj-ea"/>
                   <a:cs typeface="+mj-cs"/>
                 </a:rPr>
-                <a:t>模型展示混淆，也为实验提供工况</a:t>
+                <a:t>早期必须参照故障程度与失效判据</a:t>
               </a:r>
             </a:p>
           </p:txBody>
@@ -9800,7 +12109,7 @@
       </p:grpSp>
       <p:sp>
         <p:nvSpPr>
-          <p:cNvPr id="5" name="Line 5"/>
+          <p:cNvPr id="9" name="Line 9"/>
           <p:cNvSpPr/>
           <p:nvPr/>
         </p:nvSpPr>
@@ -9836,14 +12145,14 @@
       </p:sp>
       <p:sp>
         <p:nvSpPr>
-          <p:cNvPr id="6" name="source-footer"/>
+          <p:cNvPr id="10" name="source-footer"/>
           <p:cNvSpPr txBox="1"/>
           <p:nvPr/>
         </p:nvSpPr>
         <p:spPr>
           <a:xfrm>
             <a:off x="451104" y="6376035"/>
-            <a:ext cx="7572451" cy="234696"/>
+            <a:ext cx="7532789" cy="234696"/>
           </a:xfrm>
           <a:prstGeom prst="rect">
             <a:avLst/>
@@ -9869,14 +12178,14 @@
                 <a:ea typeface="+mn-ea"/>
                 <a:cs typeface="+mn-cs"/>
               </a:rPr>
-              <a:t>来源：simulation/results/scenarios.json，种子20261002；5秒抽取绘图。未标定合成仿真，非实测。</a:t>
+              <a:t>来源：diagnosis_results/summary.json，种子10300、压力噪声σ0.3kPa；未标定合成数据，非实测。</a:t>
             </a:r>
           </a:p>
         </p:txBody>
       </p:sp>
       <p:sp>
         <p:nvSpPr>
-          <p:cNvPr id="7" name="page-number"/>
+          <p:cNvPr id="11" name="page-number"/>
           <p:cNvSpPr txBox="1"/>
           <p:nvPr/>
         </p:nvSpPr>
@@ -9916,27 +12225,67 @@
       </p:sp>
       <p:grpSp>
         <p:nvGrpSpPr>
-          <p:cNvPr id="11" name="pressure-heading"/>
+          <p:cNvPr id="16" name="pressure-heading"/>
           <p:cNvGrpSpPr/>
           <p:nvPr/>
         </p:nvGrpSpPr>
         <p:grpSpPr>
           <a:xfrm>
             <a:off x="448056" y="1701165"/>
-            <a:ext cx="9272702" cy="352044"/>
+            <a:ext cx="9967836" cy="352044"/>
             <a:chOff x="448056" y="1701165"/>
-            <a:chExt cx="9272702" cy="352044"/>
+            <a:chExt cx="9967836" cy="352044"/>
           </a:xfrm>
         </p:grpSpPr>
         <p:sp>
           <p:nvSpPr>
-            <p:cNvPr id="8" name="TextBox 8"/>
+            <p:cNvPr id="12" name="TextBox 12"/>
             <p:cNvSpPr txBox="1"/>
             <p:nvPr/>
           </p:nvSpPr>
           <p:spPr>
             <a:xfrm>
               <a:off x="448056" y="1701165"/>
+              <a:ext cx="987552" cy="352044"/>
+            </a:xfrm>
+            <a:prstGeom prst="rect">
+              <a:avLst/>
+            </a:prstGeom>
+            <a:noFill/>
+            <a:ln>
+              <a:noFill/>
+            </a:ln>
+          </p:spPr>
+          <p:txBody>
+            <a:bodyPr wrap="none" lIns="0" tIns="0" rIns="0" bIns="0" anchor="t" anchorCtr="0">
+              <a:spAutoFit/>
+            </a:bodyPr>
+            <a:lstStyle/>
+            <a:p>
+              <a:pPr algn="l"/>
+              <a:r>
+                <a:rPr lang="zh-CN" sz="1800" dirty="0">
+                  <a:solidFill>
+                    <a:schemeClr val="accent2"/>
+                  </a:solidFill>
+                  <a:latin typeface="+mn-lt"/>
+                  <a:ea typeface="+mn-ea"/>
+                  <a:cs typeface="+mn-cs"/>
+                </a:rPr>
+                <a:t>渐进泄漏</a:t>
+              </a:r>
+            </a:p>
+          </p:txBody>
+        </p:sp>
+        <p:sp>
+          <p:nvSpPr>
+            <p:cNvPr id="13" name="TextBox 13"/>
+            <p:cNvSpPr txBox="1"/>
+            <p:nvPr/>
+          </p:nvSpPr>
+          <p:spPr>
+            <a:xfrm>
+              <a:off x="2705481" y="1701165"/>
               <a:ext cx="987552" cy="352044"/>
             </a:xfrm>
             <a:prstGeom prst="rect">
@@ -9963,21 +12312,21 @@
                   <a:ea typeface="+mn-ea"/>
                   <a:cs typeface="+mn-cs"/>
                 </a:rPr>
-                <a:t>正常切换</a:t>
+                <a:t>渐进受限</a:t>
               </a:r>
             </a:p>
           </p:txBody>
         </p:sp>
         <p:sp>
           <p:nvSpPr>
-            <p:cNvPr id="9" name="TextBox 9"/>
+            <p:cNvPr id="14" name="TextBox 14"/>
             <p:cNvSpPr txBox="1"/>
             <p:nvPr/>
           </p:nvSpPr>
           <p:spPr>
             <a:xfrm>
-              <a:off x="2705481" y="1701165"/>
-              <a:ext cx="1714500" cy="352044"/>
+              <a:off x="5210556" y="1701165"/>
+              <a:ext cx="1435837" cy="352044"/>
             </a:xfrm>
             <a:prstGeom prst="rect">
               <a:avLst/>
@@ -9997,27 +12346,27 @@
               <a:r>
                 <a:rPr lang="zh-CN" sz="1800" dirty="0">
                   <a:solidFill>
-                    <a:schemeClr val="accent2"/>
+                    <a:schemeClr val="accent3"/>
                   </a:solidFill>
                   <a:latin typeface="+mn-lt"/>
                   <a:ea typeface="+mn-ea"/>
                   <a:cs typeface="+mn-cs"/>
                 </a:rPr>
-                <a:t>切换期等效泄漏</a:t>
+                <a:t>15%演示判据</a:t>
               </a:r>
             </a:p>
           </p:txBody>
         </p:sp>
         <p:sp>
           <p:nvSpPr>
-            <p:cNvPr id="10" name="TextBox 10"/>
+            <p:cNvPr id="15" name="TextBox 15"/>
             <p:cNvSpPr txBox="1"/>
             <p:nvPr/>
           </p:nvSpPr>
           <p:spPr>
             <a:xfrm>
-              <a:off x="8279892" y="1749742"/>
-              <a:ext cx="1440866" cy="264033"/>
+              <a:off x="8784717" y="1749742"/>
+              <a:ext cx="1631175" cy="264033"/>
             </a:xfrm>
             <a:prstGeom prst="rect">
               <a:avLst/>
@@ -10043,7 +12392,7 @@
                   <a:ea typeface="+mn-ea"/>
                   <a:cs typeface="+mn-cs"/>
                 </a:rPr>
-                <a:t>纵轴：压力 / kPa</a:t>
+                <a:t>纵轴：流量偏离 / %</a:t>
               </a:r>
             </a:p>
           </p:txBody>
@@ -10051,35 +12400,35 @@
       </p:grpSp>
       <p:grpSp>
         <p:nvGrpSpPr>
-          <p:cNvPr id="33" name="pressure-response"/>
+          <p:cNvPr id="42" name="pressure-response"/>
           <p:cNvGrpSpPr/>
           <p:nvPr/>
         </p:nvGrpSpPr>
         <p:grpSpPr>
           <a:xfrm>
-            <a:off x="664826" y="2025968"/>
-            <a:ext cx="10769565" cy="2931033"/>
-            <a:chOff x="664826" y="2025968"/>
-            <a:chExt cx="10769565" cy="2931033"/>
+            <a:off x="764781" y="2025968"/>
+            <a:ext cx="10669610" cy="2931033"/>
+            <a:chOff x="764781" y="2025968"/>
+            <a:chExt cx="10669610" cy="2931033"/>
           </a:xfrm>
         </p:grpSpPr>
         <p:grpSp>
           <p:nvGrpSpPr>
-            <p:cNvPr id="32" name="pressure-response-chartArea"/>
+            <p:cNvPr id="41" name="pressure-response-chartArea"/>
             <p:cNvGrpSpPr/>
             <p:nvPr/>
           </p:nvGrpSpPr>
           <p:grpSpPr>
             <a:xfrm>
-              <a:off x="664826" y="2025968"/>
-              <a:ext cx="10769565" cy="2931033"/>
-              <a:chOff x="664826" y="2025968"/>
-              <a:chExt cx="10769565" cy="2931033"/>
+              <a:off x="764781" y="2025968"/>
+              <a:ext cx="10669610" cy="2931033"/>
+              <a:chOff x="764781" y="2025968"/>
+              <a:chExt cx="10669610" cy="2931033"/>
             </a:xfrm>
           </p:grpSpPr>
           <p:sp>
             <p:nvSpPr>
-              <p:cNvPr id="12" name="Line 12"/>
+              <p:cNvPr id="17" name="Line 17"/>
               <p:cNvSpPr/>
               <p:nvPr/>
             </p:nvSpPr>
@@ -10115,7 +12464,7 @@
           </p:sp>
           <p:sp>
             <p:nvSpPr>
-              <p:cNvPr id="13" name="TextBox 13"/>
+              <p:cNvPr id="18" name="TextBox 18"/>
               <p:cNvSpPr txBox="1"/>
               <p:nvPr/>
             </p:nvSpPr>
@@ -10155,13 +12504,13 @@
           </p:sp>
           <p:sp>
             <p:nvSpPr>
-              <p:cNvPr id="14" name="Line 14"/>
+              <p:cNvPr id="19" name="Line 19"/>
               <p:cNvSpPr/>
               <p:nvPr/>
             </p:nvSpPr>
             <p:spPr>
               <a:xfrm>
-                <a:off x="1123950" y="3957638"/>
+                <a:off x="1123950" y="4080510"/>
                 <a:ext cx="10153650" cy="9525"/>
               </a:xfrm>
               <a:custGeom>
@@ -10191,14 +12540,14 @@
           </p:sp>
           <p:sp>
             <p:nvSpPr>
-              <p:cNvPr id="15" name="TextBox 15"/>
+              <p:cNvPr id="20" name="TextBox 20"/>
               <p:cNvSpPr txBox="1"/>
               <p:nvPr/>
             </p:nvSpPr>
             <p:spPr>
               <a:xfrm>
-                <a:off x="764781" y="3869055"/>
-                <a:ext cx="213627" cy="264033"/>
+                <a:off x="864737" y="3991927"/>
+                <a:ext cx="113671" cy="264033"/>
               </a:xfrm>
               <a:prstGeom prst="rect">
                 <a:avLst/>
@@ -10224,20 +12573,20 @@
                     <a:ea typeface="+mn-ea"/>
                     <a:cs typeface="+mn-cs"/>
                   </a:rPr>
-                  <a:t>35</a:t>
+                  <a:t>6</a:t>
                 </a:r>
               </a:p>
             </p:txBody>
           </p:sp>
           <p:sp>
             <p:nvSpPr>
-              <p:cNvPr id="16" name="Line 16"/>
+              <p:cNvPr id="21" name="Line 21"/>
               <p:cNvSpPr/>
               <p:nvPr/>
             </p:nvSpPr>
             <p:spPr>
               <a:xfrm>
-                <a:off x="1123950" y="3343275"/>
+                <a:off x="1123950" y="3589020"/>
                 <a:ext cx="10153650" cy="9525"/>
               </a:xfrm>
               <a:custGeom>
@@ -10267,13 +12616,13 @@
           </p:sp>
           <p:sp>
             <p:nvSpPr>
-              <p:cNvPr id="17" name="TextBox 17"/>
+              <p:cNvPr id="22" name="TextBox 22"/>
               <p:cNvSpPr txBox="1"/>
               <p:nvPr/>
             </p:nvSpPr>
             <p:spPr>
               <a:xfrm>
-                <a:off x="764781" y="3254692"/>
+                <a:off x="764781" y="3500438"/>
                 <a:ext cx="213627" cy="264033"/>
               </a:xfrm>
               <a:prstGeom prst="rect">
@@ -10300,20 +12649,20 @@
                     <a:ea typeface="+mn-ea"/>
                     <a:cs typeface="+mn-cs"/>
                   </a:rPr>
-                  <a:t>70</a:t>
+                  <a:t>12</a:t>
                 </a:r>
               </a:p>
             </p:txBody>
           </p:sp>
           <p:sp>
             <p:nvSpPr>
-              <p:cNvPr id="18" name="Line 18"/>
+              <p:cNvPr id="23" name="Line 23"/>
               <p:cNvSpPr/>
               <p:nvPr/>
             </p:nvSpPr>
             <p:spPr>
               <a:xfrm>
-                <a:off x="1123950" y="2728912"/>
+                <a:off x="1123950" y="3097530"/>
                 <a:ext cx="10153650" cy="9525"/>
               </a:xfrm>
               <a:custGeom>
@@ -10343,14 +12692,14 @@
           </p:sp>
           <p:sp>
             <p:nvSpPr>
-              <p:cNvPr id="19" name="TextBox 19"/>
+              <p:cNvPr id="24" name="TextBox 24"/>
               <p:cNvSpPr txBox="1"/>
               <p:nvPr/>
             </p:nvSpPr>
             <p:spPr>
               <a:xfrm>
-                <a:off x="664826" y="2640330"/>
-                <a:ext cx="313582" cy="264033"/>
+                <a:off x="764781" y="3008948"/>
+                <a:ext cx="213627" cy="264033"/>
               </a:xfrm>
               <a:prstGeom prst="rect">
                 <a:avLst/>
@@ -10376,14 +12725,90 @@
                     <a:ea typeface="+mn-ea"/>
                     <a:cs typeface="+mn-cs"/>
                   </a:rPr>
-                  <a:t>105</a:t>
+                  <a:t>18</a:t>
                 </a:r>
               </a:p>
             </p:txBody>
           </p:sp>
           <p:sp>
             <p:nvSpPr>
-              <p:cNvPr id="20" name="Line 20"/>
+              <p:cNvPr id="25" name="Line 25"/>
+              <p:cNvSpPr/>
+              <p:nvPr/>
+            </p:nvSpPr>
+            <p:spPr>
+              <a:xfrm>
+                <a:off x="1123950" y="2606040"/>
+                <a:ext cx="10153650" cy="9525"/>
+              </a:xfrm>
+              <a:custGeom>
+                <a:avLst/>
+                <a:gdLst/>
+                <a:ahLst/>
+                <a:cxnLst/>
+                <a:rect l="l" t="t" r="r" b="b"/>
+                <a:pathLst>
+                  <a:path w="10153650" h="9525">
+                    <a:moveTo>
+                      <a:pt x="0" y="0"/>
+                    </a:moveTo>
+                    <a:lnTo>
+                      <a:pt x="10153650" y="0"/>
+                    </a:lnTo>
+                  </a:path>
+                </a:pathLst>
+              </a:custGeom>
+              <a:noFill/>
+              <a:ln w="9525">
+                <a:solidFill>
+                  <a:srgbClr val="E0E7E2"/>
+                </a:solidFill>
+              </a:ln>
+            </p:spPr>
+          </p:sp>
+          <p:sp>
+            <p:nvSpPr>
+              <p:cNvPr id="26" name="TextBox 26"/>
+              <p:cNvSpPr txBox="1"/>
+              <p:nvPr/>
+            </p:nvSpPr>
+            <p:spPr>
+              <a:xfrm>
+                <a:off x="764781" y="2517458"/>
+                <a:ext cx="213627" cy="264033"/>
+              </a:xfrm>
+              <a:prstGeom prst="rect">
+                <a:avLst/>
+              </a:prstGeom>
+              <a:noFill/>
+              <a:ln>
+                <a:noFill/>
+              </a:ln>
+            </p:spPr>
+            <p:txBody>
+              <a:bodyPr wrap="none" lIns="0" tIns="0" rIns="0" bIns="0" anchor="t" anchorCtr="0">
+                <a:spAutoFit/>
+              </a:bodyPr>
+              <a:lstStyle/>
+              <a:p>
+                <a:pPr algn="r"/>
+                <a:r>
+                  <a:rPr lang="zh-CN" sz="1350" dirty="0">
+                    <a:solidFill>
+                      <a:schemeClr val="accent5"/>
+                    </a:solidFill>
+                    <a:latin typeface="+mn-lt"/>
+                    <a:ea typeface="+mn-ea"/>
+                    <a:cs typeface="+mn-cs"/>
+                  </a:rPr>
+                  <a:t>24</a:t>
+                </a:r>
+              </a:p>
+            </p:txBody>
+          </p:sp>
+          <p:sp>
+            <p:nvSpPr>
+              <p:cNvPr id="27" name="Line 27"/>
               <p:cNvSpPr/>
               <p:nvPr/>
             </p:nvSpPr>
@@ -10419,14 +12844,14 @@
           </p:sp>
           <p:sp>
             <p:nvSpPr>
-              <p:cNvPr id="21" name="TextBox 21"/>
+              <p:cNvPr id="28" name="TextBox 28"/>
               <p:cNvSpPr txBox="1"/>
               <p:nvPr/>
             </p:nvSpPr>
             <p:spPr>
               <a:xfrm>
-                <a:off x="664826" y="2025968"/>
-                <a:ext cx="313582" cy="264033"/>
+                <a:off x="764781" y="2025968"/>
+                <a:ext cx="213627" cy="264033"/>
               </a:xfrm>
               <a:prstGeom prst="rect">
                 <a:avLst/>
@@ -10452,21 +12877,21 @@
                     <a:ea typeface="+mn-ea"/>
                     <a:cs typeface="+mn-cs"/>
                   </a:rPr>
-                  <a:t>140</a:t>
+                  <a:t>30</a:t>
                 </a:r>
               </a:p>
             </p:txBody>
           </p:sp>
           <p:sp>
             <p:nvSpPr>
-              <p:cNvPr id="22" name="TextBox 22"/>
+              <p:cNvPr id="29" name="TextBox 29"/>
               <p:cNvSpPr txBox="1"/>
               <p:nvPr/>
             </p:nvSpPr>
             <p:spPr>
               <a:xfrm>
-                <a:off x="1067114" y="4692968"/>
-                <a:ext cx="113671" cy="264033"/>
+                <a:off x="967159" y="4692968"/>
+                <a:ext cx="313582" cy="264033"/>
               </a:xfrm>
               <a:prstGeom prst="rect">
                 <a:avLst/>
@@ -10492,20 +12917,20 @@
                     <a:ea typeface="+mn-ea"/>
                     <a:cs typeface="+mn-cs"/>
                   </a:rPr>
-                  <a:t>0</a:t>
+                  <a:t>330</a:t>
                 </a:r>
               </a:p>
             </p:txBody>
           </p:sp>
           <p:sp>
             <p:nvSpPr>
-              <p:cNvPr id="23" name="TextBox 23"/>
+              <p:cNvPr id="30" name="TextBox 30"/>
               <p:cNvSpPr txBox="1"/>
               <p:nvPr/>
             </p:nvSpPr>
             <p:spPr>
               <a:xfrm>
-                <a:off x="2997889" y="4692968"/>
+                <a:off x="2659434" y="4692968"/>
                 <a:ext cx="313582" cy="264033"/>
               </a:xfrm>
               <a:prstGeom prst="rect">
@@ -10532,20 +12957,20 @@
                     <a:ea typeface="+mn-ea"/>
                     <a:cs typeface="+mn-cs"/>
                   </a:rPr>
-                  <a:t>120</a:t>
+                  <a:t>375</a:t>
                 </a:r>
               </a:p>
             </p:txBody>
           </p:sp>
           <p:sp>
             <p:nvSpPr>
-              <p:cNvPr id="24" name="TextBox 24"/>
+              <p:cNvPr id="31" name="TextBox 31"/>
               <p:cNvSpPr txBox="1"/>
               <p:nvPr/>
             </p:nvSpPr>
             <p:spPr>
               <a:xfrm>
-                <a:off x="5028619" y="4692968"/>
+                <a:off x="4351709" y="4692968"/>
                 <a:ext cx="313582" cy="264033"/>
               </a:xfrm>
               <a:prstGeom prst="rect">
@@ -10572,20 +12997,20 @@
                     <a:ea typeface="+mn-ea"/>
                     <a:cs typeface="+mn-cs"/>
                   </a:rPr>
-                  <a:t>240</a:t>
+                  <a:t>420</a:t>
                 </a:r>
               </a:p>
             </p:txBody>
           </p:sp>
           <p:sp>
             <p:nvSpPr>
-              <p:cNvPr id="25" name="TextBox 25"/>
+              <p:cNvPr id="32" name="TextBox 32"/>
               <p:cNvSpPr txBox="1"/>
               <p:nvPr/>
             </p:nvSpPr>
             <p:spPr>
               <a:xfrm>
-                <a:off x="7059349" y="4692968"/>
+                <a:off x="6043984" y="4692968"/>
                 <a:ext cx="313582" cy="264033"/>
               </a:xfrm>
               <a:prstGeom prst="rect">
@@ -10612,20 +13037,20 @@
                     <a:ea typeface="+mn-ea"/>
                     <a:cs typeface="+mn-cs"/>
                   </a:rPr>
-                  <a:t>360</a:t>
+                  <a:t>465</a:t>
                 </a:r>
               </a:p>
             </p:txBody>
           </p:sp>
           <p:sp>
             <p:nvSpPr>
-              <p:cNvPr id="26" name="TextBox 26"/>
+              <p:cNvPr id="33" name="TextBox 33"/>
               <p:cNvSpPr txBox="1"/>
               <p:nvPr/>
             </p:nvSpPr>
             <p:spPr>
               <a:xfrm>
-                <a:off x="9090079" y="4692968"/>
+                <a:off x="7736259" y="4692968"/>
                 <a:ext cx="313582" cy="264033"/>
               </a:xfrm>
               <a:prstGeom prst="rect">
@@ -10652,14 +13077,54 @@
                     <a:ea typeface="+mn-ea"/>
                     <a:cs typeface="+mn-cs"/>
                   </a:rPr>
-                  <a:t>480</a:t>
+                  <a:t>510</a:t>
                 </a:r>
               </a:p>
             </p:txBody>
           </p:sp>
           <p:sp>
             <p:nvSpPr>
-              <p:cNvPr id="27" name="TextBox 27"/>
+              <p:cNvPr id="34" name="TextBox 34"/>
+              <p:cNvSpPr txBox="1"/>
+              <p:nvPr/>
+            </p:nvSpPr>
+            <p:spPr>
+              <a:xfrm>
+                <a:off x="9428534" y="4692968"/>
+                <a:ext cx="313582" cy="264033"/>
+              </a:xfrm>
+              <a:prstGeom prst="rect">
+                <a:avLst/>
+              </a:prstGeom>
+              <a:noFill/>
+              <a:ln>
+                <a:noFill/>
+              </a:ln>
+            </p:spPr>
+            <p:txBody>
+              <a:bodyPr wrap="none" lIns="0" tIns="0" rIns="0" bIns="0" anchor="t" anchorCtr="0">
+                <a:spAutoFit/>
+              </a:bodyPr>
+              <a:lstStyle/>
+              <a:p>
+                <a:pPr algn="ctr"/>
+                <a:r>
+                  <a:rPr lang="zh-CN" sz="1350" dirty="0">
+                    <a:solidFill>
+                      <a:schemeClr val="accent5"/>
+                    </a:solidFill>
+                    <a:latin typeface="+mn-lt"/>
+                    <a:ea typeface="+mn-ea"/>
+                    <a:cs typeface="+mn-cs"/>
+                  </a:rPr>
+                  <a:t>555</a:t>
+                </a:r>
+              </a:p>
+            </p:txBody>
+          </p:sp>
+          <p:sp>
+            <p:nvSpPr>
+              <p:cNvPr id="35" name="TextBox 35"/>
               <p:cNvSpPr txBox="1"/>
               <p:nvPr/>
             </p:nvSpPr>
@@ -10699,7 +13164,7 @@
           </p:sp>
           <p:sp>
             <p:nvSpPr>
-              <p:cNvPr id="28" name="Line 28"/>
+              <p:cNvPr id="36" name="Line 36"/>
               <p:cNvSpPr/>
               <p:nvPr/>
             </p:nvSpPr>
@@ -10735,7 +13200,7 @@
           </p:sp>
           <p:sp>
             <p:nvSpPr>
-              <p:cNvPr id="29" name="Line 29"/>
+              <p:cNvPr id="37" name="Line 37"/>
               <p:cNvSpPr/>
               <p:nvPr/>
             </p:nvSpPr>
@@ -10771,14 +13236,14 @@
           </p:sp>
           <p:sp>
             <p:nvSpPr>
-              <p:cNvPr id="30" name="Polyline 30"/>
+              <p:cNvPr id="38" name="Polyline 38"/>
               <p:cNvSpPr/>
               <p:nvPr/>
             </p:nvSpPr>
             <p:spPr>
               <a:xfrm>
-                <a:off x="1123950" y="2524192"/>
-                <a:ext cx="10153650" cy="281035"/>
+                <a:off x="1123950" y="2828496"/>
+                <a:ext cx="10153650" cy="1743504"/>
               </a:xfrm>
               <a:custGeom>
                 <a:avLst/>
@@ -10787,369 +13252,366 @@
                 <a:cxnLst/>
                 <a:rect l="l" t="t" r="r" b="b"/>
                 <a:pathLst>
-                  <a:path w="10153650" h="281035">
+                  <a:path w="10153650" h="1743504">
                     <a:moveTo>
-                      <a:pt x="0" y="33719"/>
+                      <a:pt x="0" y="1743504"/>
                     </a:moveTo>
                     <a:lnTo>
-                      <a:pt x="84611" y="23574"/>
+                      <a:pt x="188033" y="1743504"/>
                     </a:lnTo>
                     <a:lnTo>
-                      <a:pt x="169231" y="40977"/>
+                      <a:pt x="376057" y="1743504"/>
                     </a:lnTo>
                     <a:lnTo>
-                      <a:pt x="253841" y="24174"/>
+                      <a:pt x="564090" y="1743504"/>
                     </a:lnTo>
                     <a:lnTo>
-                      <a:pt x="338452" y="43653"/>
+                      <a:pt x="752123" y="1743504"/>
                     </a:lnTo>
                     <a:lnTo>
-                      <a:pt x="423072" y="34814"/>
+                      <a:pt x="940156" y="1743504"/>
                     </a:lnTo>
                     <a:lnTo>
-                      <a:pt x="507683" y="43005"/>
+                      <a:pt x="1128179" y="1743504"/>
                     </a:lnTo>
                     <a:lnTo>
-                      <a:pt x="592293" y="40938"/>
+                      <a:pt x="1316212" y="1692564"/>
                     </a:lnTo>
                     <a:lnTo>
-                      <a:pt x="676913" y="27775"/>
+                      <a:pt x="1504245" y="1641758"/>
                     </a:lnTo>
                     <a:lnTo>
-                      <a:pt x="761524" y="34280"/>
+                      <a:pt x="1692278" y="1591104"/>
                     </a:lnTo>
                     <a:lnTo>
-                      <a:pt x="846134" y="39672"/>
+                      <a:pt x="1880302" y="1540583"/>
                     </a:lnTo>
                     <a:lnTo>
-                      <a:pt x="930754" y="26165"/>
+                      <a:pt x="2068335" y="1490205"/>
                     </a:lnTo>
                     <a:lnTo>
-                      <a:pt x="1015365" y="52521"/>
+                      <a:pt x="2256368" y="1439970"/>
                     </a:lnTo>
                     <a:lnTo>
-                      <a:pt x="1099976" y="26594"/>
+                      <a:pt x="2444401" y="1389869"/>
                     </a:lnTo>
                     <a:lnTo>
-                      <a:pt x="1184596" y="28708"/>
+                      <a:pt x="2632424" y="1339920"/>
                     </a:lnTo>
                     <a:lnTo>
-                      <a:pt x="1269206" y="49540"/>
+                      <a:pt x="2820457" y="1290114"/>
                     </a:lnTo>
                     <a:lnTo>
-                      <a:pt x="1353817" y="42120"/>
+                      <a:pt x="3008490" y="1240441"/>
                     </a:lnTo>
                     <a:lnTo>
-                      <a:pt x="1438437" y="35738"/>
+                      <a:pt x="3196523" y="1190920"/>
                     </a:lnTo>
                     <a:lnTo>
-                      <a:pt x="1523047" y="30347"/>
+                      <a:pt x="3384547" y="1141543"/>
                     </a:lnTo>
                     <a:lnTo>
-                      <a:pt x="1607658" y="13383"/>
+                      <a:pt x="3572580" y="1092308"/>
                     </a:lnTo>
                     <a:lnTo>
-                      <a:pt x="1692278" y="7601"/>
+                      <a:pt x="3760613" y="1043216"/>
                     </a:lnTo>
                     <a:lnTo>
-                      <a:pt x="1776889" y="48292"/>
+                      <a:pt x="3948646" y="994267"/>
                     </a:lnTo>
                     <a:lnTo>
-                      <a:pt x="1861499" y="31242"/>
+                      <a:pt x="4136669" y="945461"/>
                     </a:lnTo>
                     <a:lnTo>
-                      <a:pt x="1946119" y="22584"/>
+                      <a:pt x="4324702" y="896807"/>
                     </a:lnTo>
                     <a:lnTo>
-                      <a:pt x="2030730" y="40834"/>
+                      <a:pt x="4512735" y="848287"/>
                     </a:lnTo>
                     <a:lnTo>
-                      <a:pt x="2115341" y="28137"/>
+                      <a:pt x="4700768" y="799919"/>
                     </a:lnTo>
                     <a:lnTo>
-                      <a:pt x="2199961" y="32737"/>
+                      <a:pt x="4888792" y="751703"/>
                     </a:lnTo>
                     <a:lnTo>
-                      <a:pt x="2284571" y="28604"/>
+                      <a:pt x="5076825" y="703621"/>
                     </a:lnTo>
                     <a:lnTo>
-                      <a:pt x="2369182" y="15507"/>
+                      <a:pt x="5264858" y="655691"/>
                     </a:lnTo>
                     <a:lnTo>
-                      <a:pt x="2453802" y="23574"/>
+                      <a:pt x="5452882" y="607905"/>
                     </a:lnTo>
                     <a:lnTo>
-                      <a:pt x="2538412" y="17888"/>
+                      <a:pt x="5640915" y="560260"/>
                     </a:lnTo>
                     <a:lnTo>
-                      <a:pt x="2623023" y="45606"/>
+                      <a:pt x="5828948" y="512769"/>
                     </a:lnTo>
                     <a:lnTo>
-                      <a:pt x="2707643" y="23231"/>
+                      <a:pt x="6016981" y="465420"/>
                     </a:lnTo>
                     <a:lnTo>
-                      <a:pt x="2792254" y="17812"/>
+                      <a:pt x="6205004" y="418214"/>
                     </a:lnTo>
                     <a:lnTo>
-                      <a:pt x="2876864" y="39300"/>
+                      <a:pt x="6393037" y="371161"/>
                     </a:lnTo>
                     <a:lnTo>
-                      <a:pt x="2961484" y="29118"/>
+                      <a:pt x="6581070" y="324250"/>
                     </a:lnTo>
                     <a:lnTo>
-                      <a:pt x="3046095" y="73752"/>
+                      <a:pt x="6769103" y="277492"/>
                     </a:lnTo>
                     <a:lnTo>
-                      <a:pt x="3130706" y="181899"/>
+                      <a:pt x="6957127" y="230876"/>
                     </a:lnTo>
                     <a:lnTo>
-                      <a:pt x="3215326" y="228333"/>
+                      <a:pt x="7145160" y="184404"/>
                     </a:lnTo>
                     <a:lnTo>
-                      <a:pt x="3299936" y="245050"/>
+                      <a:pt x="7333193" y="138084"/>
                     </a:lnTo>
                     <a:lnTo>
-                      <a:pt x="3384547" y="244059"/>
+                      <a:pt x="7521226" y="91907"/>
                     </a:lnTo>
                     <a:lnTo>
-                      <a:pt x="3469167" y="255213"/>
+                      <a:pt x="7709249" y="45882"/>
                     </a:lnTo>
                     <a:lnTo>
-                      <a:pt x="3553778" y="274825"/>
+                      <a:pt x="7897282" y="0"/>
                     </a:lnTo>
                     <a:lnTo>
-                      <a:pt x="3638388" y="240020"/>
+                      <a:pt x="8085315" y="0"/>
                     </a:lnTo>
                     <a:lnTo>
-                      <a:pt x="3723008" y="260899"/>
+                      <a:pt x="8273348" y="0"/>
                     </a:lnTo>
                     <a:lnTo>
-                      <a:pt x="3807619" y="235115"/>
+                      <a:pt x="8461372" y="0"/>
                     </a:lnTo>
                     <a:lnTo>
-                      <a:pt x="3892229" y="253013"/>
+                      <a:pt x="8649405" y="0"/>
                     </a:lnTo>
                     <a:lnTo>
-                      <a:pt x="3976849" y="252232"/>
+                      <a:pt x="8837438" y="0"/>
                     </a:lnTo>
                     <a:lnTo>
-                      <a:pt x="4061460" y="256851"/>
+                      <a:pt x="9025471" y="0"/>
                     </a:lnTo>
                     <a:lnTo>
-                      <a:pt x="4146071" y="257994"/>
+                      <a:pt x="9213494" y="0"/>
                     </a:lnTo>
                     <a:lnTo>
-                      <a:pt x="4230691" y="251146"/>
+                      <a:pt x="9401527" y="0"/>
                     </a:lnTo>
                     <a:lnTo>
-                      <a:pt x="4315301" y="262538"/>
+                      <a:pt x="9589560" y="0"/>
                     </a:lnTo>
                     <a:lnTo>
-                      <a:pt x="4399912" y="281035"/>
+                      <a:pt x="9777593" y="0"/>
                     </a:lnTo>
                     <a:lnTo>
-                      <a:pt x="4484532" y="271453"/>
+                      <a:pt x="9965617" y="0"/>
                     </a:lnTo>
                     <a:lnTo>
-                      <a:pt x="4569142" y="238620"/>
+                      <a:pt x="10153650" y="0"/>
+                    </a:lnTo>
+                  </a:path>
+                </a:pathLst>
+              </a:custGeom>
+              <a:noFill/>
+              <a:ln w="28575">
+                <a:solidFill>
+                  <a:schemeClr val="accent2"/>
+                </a:solidFill>
+              </a:ln>
+            </p:spPr>
+          </p:sp>
+          <p:sp>
+            <p:nvSpPr>
+              <p:cNvPr id="39" name="Polyline 39"/>
+              <p:cNvSpPr/>
+              <p:nvPr/>
+            </p:nvSpPr>
+            <p:spPr>
+              <a:xfrm>
+                <a:off x="1123950" y="3237290"/>
+                <a:ext cx="10153650" cy="1334710"/>
+              </a:xfrm>
+              <a:custGeom>
+                <a:avLst/>
+                <a:gdLst/>
+                <a:ahLst/>
+                <a:cxnLst/>
+                <a:rect l="l" t="t" r="r" b="b"/>
+                <a:pathLst>
+                  <a:path w="10153650" h="1334710">
+                    <a:moveTo>
+                      <a:pt x="0" y="1334710"/>
+                    </a:moveTo>
+                    <a:lnTo>
+                      <a:pt x="188033" y="1334710"/>
                     </a:lnTo>
                     <a:lnTo>
-                      <a:pt x="4653753" y="267757"/>
+                      <a:pt x="376057" y="1334710"/>
                     </a:lnTo>
                     <a:lnTo>
-                      <a:pt x="4738373" y="248603"/>
+                      <a:pt x="564090" y="1334710"/>
                     </a:lnTo>
                     <a:lnTo>
-                      <a:pt x="4822984" y="242649"/>
+                      <a:pt x="752123" y="1334710"/>
                     </a:lnTo>
                     <a:lnTo>
-                      <a:pt x="4907594" y="255422"/>
+                      <a:pt x="940156" y="1334710"/>
                     </a:lnTo>
                     <a:lnTo>
-                      <a:pt x="4992214" y="261328"/>
+                      <a:pt x="1128179" y="1334710"/>
                     </a:lnTo>
                     <a:lnTo>
-                      <a:pt x="5076825" y="230981"/>
+                      <a:pt x="1316212" y="1286532"/>
                     </a:lnTo>
                     <a:lnTo>
-                      <a:pt x="5161436" y="125311"/>
+                      <a:pt x="1504245" y="1239203"/>
                     </a:lnTo>
                     <a:lnTo>
-                      <a:pt x="5246056" y="56102"/>
+                      <a:pt x="1692278" y="1192682"/>
                     </a:lnTo>
                     <a:lnTo>
-                      <a:pt x="5330666" y="47139"/>
+                      <a:pt x="1880302" y="1146953"/>
                     </a:lnTo>
                     <a:lnTo>
-                      <a:pt x="5415277" y="31442"/>
+                      <a:pt x="2068335" y="1102004"/>
                     </a:lnTo>
                     <a:lnTo>
-                      <a:pt x="5499897" y="28194"/>
+                      <a:pt x="2256368" y="1057789"/>
                     </a:lnTo>
                     <a:lnTo>
-                      <a:pt x="5584508" y="28042"/>
+                      <a:pt x="2444401" y="1014317"/>
                     </a:lnTo>
                     <a:lnTo>
-                      <a:pt x="5669118" y="52873"/>
+                      <a:pt x="2632424" y="971550"/>
                     </a:lnTo>
                     <a:lnTo>
-                      <a:pt x="5753738" y="24422"/>
+                      <a:pt x="2820457" y="929469"/>
                     </a:lnTo>
                     <a:lnTo>
-                      <a:pt x="5838349" y="26279"/>
+                      <a:pt x="3008490" y="888063"/>
                     </a:lnTo>
                     <a:lnTo>
-                      <a:pt x="5922959" y="41967"/>
+                      <a:pt x="3196523" y="847306"/>
                     </a:lnTo>
                     <a:lnTo>
-                      <a:pt x="6007579" y="20393"/>
+                      <a:pt x="3384547" y="807187"/>
                     </a:lnTo>
                     <a:lnTo>
-                      <a:pt x="6092190" y="32671"/>
+                      <a:pt x="3572580" y="767686"/>
                     </a:lnTo>
                     <a:lnTo>
-                      <a:pt x="6176801" y="36014"/>
+                      <a:pt x="3760613" y="728796"/>
                     </a:lnTo>
                     <a:lnTo>
-                      <a:pt x="6261421" y="23746"/>
+                      <a:pt x="3948646" y="690496"/>
                     </a:lnTo>
                     <a:lnTo>
-                      <a:pt x="6346031" y="20717"/>
+                      <a:pt x="4136669" y="652767"/>
                     </a:lnTo>
                     <a:lnTo>
-                      <a:pt x="6430642" y="26813"/>
+                      <a:pt x="4324702" y="615591"/>
                     </a:lnTo>
                     <a:lnTo>
-                      <a:pt x="6515262" y="9896"/>
+                      <a:pt x="4512735" y="578977"/>
                     </a:lnTo>
                     <a:lnTo>
-                      <a:pt x="6599872" y="10811"/>
+                      <a:pt x="4700768" y="542887"/>
                     </a:lnTo>
                     <a:lnTo>
-                      <a:pt x="6684483" y="20898"/>
+                      <a:pt x="4888792" y="507311"/>
                     </a:lnTo>
                     <a:lnTo>
-                      <a:pt x="6769103" y="42605"/>
+                      <a:pt x="5076825" y="472249"/>
                     </a:lnTo>
                     <a:lnTo>
-                      <a:pt x="6853714" y="45025"/>
+                      <a:pt x="5264858" y="437693"/>
                     </a:lnTo>
                     <a:lnTo>
-                      <a:pt x="6938324" y="48216"/>
+                      <a:pt x="5452882" y="403612"/>
                     </a:lnTo>
                     <a:lnTo>
-                      <a:pt x="7022944" y="37071"/>
+                      <a:pt x="5640915" y="369999"/>
                     </a:lnTo>
                     <a:lnTo>
-                      <a:pt x="7107555" y="25737"/>
+                      <a:pt x="5828948" y="336852"/>
                     </a:lnTo>
                     <a:lnTo>
-                      <a:pt x="7192166" y="28727"/>
+                      <a:pt x="6016981" y="304162"/>
                     </a:lnTo>
                     <a:lnTo>
-                      <a:pt x="7276786" y="12992"/>
+                      <a:pt x="6205004" y="271910"/>
                     </a:lnTo>
                     <a:lnTo>
-                      <a:pt x="7361396" y="0"/>
+                      <a:pt x="6393037" y="240097"/>
                     </a:lnTo>
                     <a:lnTo>
-                      <a:pt x="7446007" y="25879"/>
+                      <a:pt x="6581070" y="208693"/>
                     </a:lnTo>
                     <a:lnTo>
-                      <a:pt x="7530627" y="42729"/>
+                      <a:pt x="6769103" y="177708"/>
                     </a:lnTo>
                     <a:lnTo>
-                      <a:pt x="7615238" y="26556"/>
+                      <a:pt x="6957127" y="147133"/>
                     </a:lnTo>
                     <a:lnTo>
-                      <a:pt x="7699848" y="43310"/>
+                      <a:pt x="7145160" y="116948"/>
                     </a:lnTo>
                     <a:lnTo>
-                      <a:pt x="7784468" y="26241"/>
+                      <a:pt x="7333193" y="87154"/>
                     </a:lnTo>
                     <a:lnTo>
-                      <a:pt x="7869079" y="42062"/>
+                      <a:pt x="7521226" y="57731"/>
                     </a:lnTo>
                     <a:lnTo>
-                      <a:pt x="7953689" y="32261"/>
+                      <a:pt x="7709249" y="28680"/>
                     </a:lnTo>
                     <a:lnTo>
-                      <a:pt x="8038309" y="15869"/>
+                      <a:pt x="7897282" y="0"/>
                     </a:lnTo>
                     <a:lnTo>
-                      <a:pt x="8122920" y="29718"/>
+                      <a:pt x="8085315" y="0"/>
                     </a:lnTo>
                     <a:lnTo>
-                      <a:pt x="8207531" y="30699"/>
+                      <a:pt x="8273348" y="0"/>
                     </a:lnTo>
                     <a:lnTo>
-                      <a:pt x="8292151" y="30766"/>
+                      <a:pt x="8461372" y="0"/>
                     </a:lnTo>
                     <a:lnTo>
-                      <a:pt x="8376761" y="40415"/>
+                      <a:pt x="8649405" y="0"/>
                     </a:lnTo>
                     <a:lnTo>
-                      <a:pt x="8461372" y="39491"/>
+                      <a:pt x="8837438" y="0"/>
                     </a:lnTo>
                     <a:lnTo>
-                      <a:pt x="8545992" y="32861"/>
+                      <a:pt x="9025471" y="0"/>
                     </a:lnTo>
                     <a:lnTo>
-                      <a:pt x="8630602" y="28194"/>
+                      <a:pt x="9213494" y="0"/>
                     </a:lnTo>
                     <a:lnTo>
-                      <a:pt x="8715213" y="34481"/>
+                      <a:pt x="9401527" y="0"/>
                     </a:lnTo>
                     <a:lnTo>
-                      <a:pt x="8799833" y="35023"/>
+                      <a:pt x="9589560" y="0"/>
                     </a:lnTo>
                     <a:lnTo>
-                      <a:pt x="8884444" y="47682"/>
+                      <a:pt x="9777593" y="0"/>
                     </a:lnTo>
                     <a:lnTo>
-                      <a:pt x="8969054" y="18764"/>
+                      <a:pt x="9965617" y="0"/>
                     </a:lnTo>
                     <a:lnTo>
-                      <a:pt x="9053674" y="20288"/>
-                    </a:lnTo>
-                    <a:lnTo>
-                      <a:pt x="9138285" y="46091"/>
-                    </a:lnTo>
-                    <a:lnTo>
-                      <a:pt x="9222896" y="21365"/>
-                    </a:lnTo>
-                    <a:lnTo>
-                      <a:pt x="9307516" y="34357"/>
-                    </a:lnTo>
-                    <a:lnTo>
-                      <a:pt x="9392126" y="38119"/>
-                    </a:lnTo>
-                    <a:lnTo>
-                      <a:pt x="9476737" y="28156"/>
-                    </a:lnTo>
-                    <a:lnTo>
-                      <a:pt x="9561357" y="6172"/>
-                    </a:lnTo>
-                    <a:lnTo>
-                      <a:pt x="9645968" y="24689"/>
-                    </a:lnTo>
-                    <a:lnTo>
-                      <a:pt x="9730578" y="39272"/>
-                    </a:lnTo>
-                    <a:lnTo>
-                      <a:pt x="9815198" y="46387"/>
-                    </a:lnTo>
-                    <a:lnTo>
-                      <a:pt x="9899809" y="27403"/>
-                    </a:lnTo>
-                    <a:lnTo>
-                      <a:pt x="9984419" y="42358"/>
-                    </a:lnTo>
-                    <a:lnTo>
-                      <a:pt x="10069039" y="18164"/>
-                    </a:lnTo>
-                    <a:lnTo>
-                      <a:pt x="10153650" y="41443"/>
+                      <a:pt x="10153650" y="0"/>
                     </a:lnTo>
                   </a:path>
                 </a:pathLst>
@@ -11164,14 +13626,14 @@
           </p:sp>
           <p:sp>
             <p:nvSpPr>
-              <p:cNvPr id="31" name="Polyline 31"/>
+              <p:cNvPr id="40" name="Polyline 40"/>
               <p:cNvSpPr/>
               <p:nvPr/>
             </p:nvSpPr>
             <p:spPr>
               <a:xfrm>
-                <a:off x="1123950" y="2524192"/>
-                <a:ext cx="10153650" cy="402374"/>
+                <a:off x="1123950" y="3343275"/>
+                <a:ext cx="10153650" cy="9525"/>
               </a:xfrm>
               <a:custGeom>
                 <a:avLst/>
@@ -11180,369 +13642,171 @@
                 <a:cxnLst/>
                 <a:rect l="l" t="t" r="r" b="b"/>
                 <a:pathLst>
-                  <a:path w="10153650" h="402374">
+                  <a:path w="10153650" h="9525">
                     <a:moveTo>
-                      <a:pt x="0" y="33719"/>
+                      <a:pt x="0" y="0"/>
                     </a:moveTo>
                     <a:lnTo>
-                      <a:pt x="84611" y="23574"/>
+                      <a:pt x="188033" y="0"/>
                     </a:lnTo>
                     <a:lnTo>
-                      <a:pt x="169231" y="40977"/>
+                      <a:pt x="376057" y="0"/>
                     </a:lnTo>
                     <a:lnTo>
-                      <a:pt x="253841" y="24174"/>
+                      <a:pt x="564090" y="0"/>
                     </a:lnTo>
                     <a:lnTo>
-                      <a:pt x="338452" y="43653"/>
+                      <a:pt x="752123" y="0"/>
                     </a:lnTo>
                     <a:lnTo>
-                      <a:pt x="423072" y="34814"/>
+                      <a:pt x="940156" y="0"/>
                     </a:lnTo>
                     <a:lnTo>
-                      <a:pt x="507683" y="43005"/>
+                      <a:pt x="1128179" y="0"/>
                     </a:lnTo>
                     <a:lnTo>
-                      <a:pt x="592293" y="40938"/>
+                      <a:pt x="1316212" y="0"/>
                     </a:lnTo>
                     <a:lnTo>
-                      <a:pt x="676913" y="27775"/>
+                      <a:pt x="1504245" y="0"/>
                     </a:lnTo>
                     <a:lnTo>
-                      <a:pt x="761524" y="34280"/>
+                      <a:pt x="1692278" y="0"/>
                     </a:lnTo>
                     <a:lnTo>
-                      <a:pt x="846134" y="39672"/>
+                      <a:pt x="1880302" y="0"/>
                     </a:lnTo>
                     <a:lnTo>
-                      <a:pt x="930754" y="26165"/>
+                      <a:pt x="2068335" y="0"/>
                     </a:lnTo>
                     <a:lnTo>
-                      <a:pt x="1015365" y="52521"/>
+                      <a:pt x="2256368" y="0"/>
                     </a:lnTo>
                     <a:lnTo>
-                      <a:pt x="1099976" y="26594"/>
+                      <a:pt x="2444401" y="0"/>
                     </a:lnTo>
                     <a:lnTo>
-                      <a:pt x="1184596" y="28708"/>
+                      <a:pt x="2632424" y="0"/>
                     </a:lnTo>
                     <a:lnTo>
-                      <a:pt x="1269206" y="49540"/>
+                      <a:pt x="2820457" y="0"/>
                     </a:lnTo>
                     <a:lnTo>
-                      <a:pt x="1353817" y="42120"/>
+                      <a:pt x="3008490" y="0"/>
                     </a:lnTo>
                     <a:lnTo>
-                      <a:pt x="1438437" y="35738"/>
+                      <a:pt x="3196523" y="0"/>
                     </a:lnTo>
                     <a:lnTo>
-                      <a:pt x="1523047" y="30347"/>
+                      <a:pt x="3384547" y="0"/>
                     </a:lnTo>
                     <a:lnTo>
-                      <a:pt x="1607658" y="13383"/>
+                      <a:pt x="3572580" y="0"/>
                     </a:lnTo>
                     <a:lnTo>
-                      <a:pt x="1692278" y="7601"/>
+                      <a:pt x="3760613" y="0"/>
                     </a:lnTo>
                     <a:lnTo>
-                      <a:pt x="1776889" y="48292"/>
+                      <a:pt x="3948646" y="0"/>
                     </a:lnTo>
                     <a:lnTo>
-                      <a:pt x="1861499" y="31242"/>
+                      <a:pt x="4136669" y="0"/>
                     </a:lnTo>
                     <a:lnTo>
-                      <a:pt x="1946119" y="22584"/>
+                      <a:pt x="4324702" y="0"/>
                     </a:lnTo>
                     <a:lnTo>
-                      <a:pt x="2030730" y="40834"/>
+                      <a:pt x="4512735" y="0"/>
                     </a:lnTo>
                     <a:lnTo>
-                      <a:pt x="2115341" y="28137"/>
+                      <a:pt x="4700768" y="0"/>
                     </a:lnTo>
                     <a:lnTo>
-                      <a:pt x="2199961" y="32737"/>
+                      <a:pt x="4888792" y="0"/>
                     </a:lnTo>
                     <a:lnTo>
-                      <a:pt x="2284571" y="28604"/>
+                      <a:pt x="5076825" y="0"/>
                     </a:lnTo>
                     <a:lnTo>
-                      <a:pt x="2369182" y="15507"/>
+                      <a:pt x="5264858" y="0"/>
                     </a:lnTo>
                     <a:lnTo>
-                      <a:pt x="2453802" y="23574"/>
+                      <a:pt x="5452882" y="0"/>
                     </a:lnTo>
                     <a:lnTo>
-                      <a:pt x="2538412" y="17888"/>
+                      <a:pt x="5640915" y="0"/>
                     </a:lnTo>
                     <a:lnTo>
-                      <a:pt x="2623023" y="45606"/>
+                      <a:pt x="5828948" y="0"/>
                     </a:lnTo>
                     <a:lnTo>
-                      <a:pt x="2707643" y="23231"/>
+                      <a:pt x="6016981" y="0"/>
                     </a:lnTo>
                     <a:lnTo>
-                      <a:pt x="2792254" y="17812"/>
+                      <a:pt x="6205004" y="0"/>
                     </a:lnTo>
                     <a:lnTo>
-                      <a:pt x="2876864" y="39300"/>
+                      <a:pt x="6393037" y="0"/>
                     </a:lnTo>
                     <a:lnTo>
-                      <a:pt x="2961484" y="29118"/>
+                      <a:pt x="6581070" y="0"/>
                     </a:lnTo>
                     <a:lnTo>
-                      <a:pt x="3046095" y="73752"/>
+                      <a:pt x="6769103" y="0"/>
                     </a:lnTo>
                     <a:lnTo>
-                      <a:pt x="3130706" y="181899"/>
+                      <a:pt x="6957127" y="0"/>
                     </a:lnTo>
                     <a:lnTo>
-                      <a:pt x="3215326" y="246964"/>
+                      <a:pt x="7145160" y="0"/>
                     </a:lnTo>
                     <a:lnTo>
-                      <a:pt x="3299936" y="321754"/>
+                      <a:pt x="7333193" y="0"/>
                     </a:lnTo>
                     <a:lnTo>
-                      <a:pt x="3384547" y="345996"/>
+                      <a:pt x="7521226" y="0"/>
                     </a:lnTo>
                     <a:lnTo>
-                      <a:pt x="3469167" y="368122"/>
+                      <a:pt x="7709249" y="0"/>
                     </a:lnTo>
                     <a:lnTo>
-                      <a:pt x="3553778" y="392497"/>
+                      <a:pt x="7897282" y="0"/>
                     </a:lnTo>
                     <a:lnTo>
-                      <a:pt x="3638388" y="359769"/>
+                      <a:pt x="8085315" y="0"/>
                     </a:lnTo>
                     <a:lnTo>
-                      <a:pt x="3723008" y="381543"/>
+                      <a:pt x="8273348" y="0"/>
                     </a:lnTo>
                     <a:lnTo>
-                      <a:pt x="3807619" y="356159"/>
+                      <a:pt x="8461372" y="0"/>
                     </a:lnTo>
                     <a:lnTo>
-                      <a:pt x="3892229" y="374228"/>
+                      <a:pt x="8649405" y="0"/>
                     </a:lnTo>
                     <a:lnTo>
-                      <a:pt x="3976849" y="373513"/>
+                      <a:pt x="8837438" y="0"/>
                     </a:lnTo>
                     <a:lnTo>
-                      <a:pt x="4061460" y="378162"/>
+                      <a:pt x="9025471" y="0"/>
                     </a:lnTo>
                     <a:lnTo>
-                      <a:pt x="4146071" y="379324"/>
+                      <a:pt x="9213494" y="0"/>
                     </a:lnTo>
                     <a:lnTo>
-                      <a:pt x="4230691" y="372485"/>
+                      <a:pt x="9401527" y="0"/>
                     </a:lnTo>
                     <a:lnTo>
-                      <a:pt x="4315301" y="383877"/>
+                      <a:pt x="9589560" y="0"/>
                     </a:lnTo>
                     <a:lnTo>
-                      <a:pt x="4399912" y="402374"/>
+                      <a:pt x="9777593" y="0"/>
                     </a:lnTo>
                     <a:lnTo>
-                      <a:pt x="4484532" y="392792"/>
+                      <a:pt x="9965617" y="0"/>
                     </a:lnTo>
                     <a:lnTo>
-                      <a:pt x="4569142" y="359969"/>
-                    </a:lnTo>
-                    <a:lnTo>
-                      <a:pt x="4653753" y="389096"/>
-                    </a:lnTo>
-                    <a:lnTo>
-                      <a:pt x="4738373" y="351311"/>
-                    </a:lnTo>
-                    <a:lnTo>
-                      <a:pt x="4822984" y="287293"/>
-                    </a:lnTo>
-                    <a:lnTo>
-                      <a:pt x="4907594" y="274825"/>
-                    </a:lnTo>
-                    <a:lnTo>
-                      <a:pt x="4992214" y="269767"/>
-                    </a:lnTo>
-                    <a:lnTo>
-                      <a:pt x="5076825" y="234648"/>
-                    </a:lnTo>
-                    <a:lnTo>
-                      <a:pt x="5161436" y="126902"/>
-                    </a:lnTo>
-                    <a:lnTo>
-                      <a:pt x="5246056" y="56798"/>
-                    </a:lnTo>
-                    <a:lnTo>
-                      <a:pt x="5330666" y="47444"/>
-                    </a:lnTo>
-                    <a:lnTo>
-                      <a:pt x="5415277" y="31575"/>
-                    </a:lnTo>
-                    <a:lnTo>
-                      <a:pt x="5499897" y="28251"/>
-                    </a:lnTo>
-                    <a:lnTo>
-                      <a:pt x="5584508" y="28061"/>
-                    </a:lnTo>
-                    <a:lnTo>
-                      <a:pt x="5669118" y="52883"/>
-                    </a:lnTo>
-                    <a:lnTo>
-                      <a:pt x="5753738" y="24432"/>
-                    </a:lnTo>
-                    <a:lnTo>
-                      <a:pt x="5838349" y="26279"/>
-                    </a:lnTo>
-                    <a:lnTo>
-                      <a:pt x="5922959" y="41967"/>
-                    </a:lnTo>
-                    <a:lnTo>
-                      <a:pt x="6007579" y="20393"/>
-                    </a:lnTo>
-                    <a:lnTo>
-                      <a:pt x="6092190" y="32671"/>
-                    </a:lnTo>
-                    <a:lnTo>
-                      <a:pt x="6176801" y="36014"/>
-                    </a:lnTo>
-                    <a:lnTo>
-                      <a:pt x="6261421" y="23746"/>
-                    </a:lnTo>
-                    <a:lnTo>
-                      <a:pt x="6346031" y="20717"/>
-                    </a:lnTo>
-                    <a:lnTo>
-                      <a:pt x="6430642" y="26813"/>
-                    </a:lnTo>
-                    <a:lnTo>
-                      <a:pt x="6515262" y="9896"/>
-                    </a:lnTo>
-                    <a:lnTo>
-                      <a:pt x="6599872" y="10811"/>
-                    </a:lnTo>
-                    <a:lnTo>
-                      <a:pt x="6684483" y="20898"/>
-                    </a:lnTo>
-                    <a:lnTo>
-                      <a:pt x="6769103" y="42605"/>
-                    </a:lnTo>
-                    <a:lnTo>
-                      <a:pt x="6853714" y="45025"/>
-                    </a:lnTo>
-                    <a:lnTo>
-                      <a:pt x="6938324" y="48216"/>
-                    </a:lnTo>
-                    <a:lnTo>
-                      <a:pt x="7022944" y="37071"/>
-                    </a:lnTo>
-                    <a:lnTo>
-                      <a:pt x="7107555" y="25737"/>
-                    </a:lnTo>
-                    <a:lnTo>
-                      <a:pt x="7192166" y="28727"/>
-                    </a:lnTo>
-                    <a:lnTo>
-                      <a:pt x="7276786" y="12992"/>
-                    </a:lnTo>
-                    <a:lnTo>
-                      <a:pt x="7361396" y="0"/>
-                    </a:lnTo>
-                    <a:lnTo>
-                      <a:pt x="7446007" y="25879"/>
-                    </a:lnTo>
-                    <a:lnTo>
-                      <a:pt x="7530627" y="42729"/>
-                    </a:lnTo>
-                    <a:lnTo>
-                      <a:pt x="7615238" y="26556"/>
-                    </a:lnTo>
-                    <a:lnTo>
-                      <a:pt x="7699848" y="43310"/>
-                    </a:lnTo>
-                    <a:lnTo>
-                      <a:pt x="7784468" y="26241"/>
-                    </a:lnTo>
-                    <a:lnTo>
-                      <a:pt x="7869079" y="42062"/>
-                    </a:lnTo>
-                    <a:lnTo>
-                      <a:pt x="7953689" y="32261"/>
-                    </a:lnTo>
-                    <a:lnTo>
-                      <a:pt x="8038309" y="15869"/>
-                    </a:lnTo>
-                    <a:lnTo>
-                      <a:pt x="8122920" y="29718"/>
-                    </a:lnTo>
-                    <a:lnTo>
-                      <a:pt x="8207531" y="30699"/>
-                    </a:lnTo>
-                    <a:lnTo>
-                      <a:pt x="8292151" y="30766"/>
-                    </a:lnTo>
-                    <a:lnTo>
-                      <a:pt x="8376761" y="40415"/>
-                    </a:lnTo>
-                    <a:lnTo>
-                      <a:pt x="8461372" y="39491"/>
-                    </a:lnTo>
-                    <a:lnTo>
-                      <a:pt x="8545992" y="32861"/>
-                    </a:lnTo>
-                    <a:lnTo>
-                      <a:pt x="8630602" y="28194"/>
-                    </a:lnTo>
-                    <a:lnTo>
-                      <a:pt x="8715213" y="34481"/>
-                    </a:lnTo>
-                    <a:lnTo>
-                      <a:pt x="8799833" y="35023"/>
-                    </a:lnTo>
-                    <a:lnTo>
-                      <a:pt x="8884444" y="47682"/>
-                    </a:lnTo>
-                    <a:lnTo>
-                      <a:pt x="8969054" y="18764"/>
-                    </a:lnTo>
-                    <a:lnTo>
-                      <a:pt x="9053674" y="20288"/>
-                    </a:lnTo>
-                    <a:lnTo>
-                      <a:pt x="9138285" y="46091"/>
-                    </a:lnTo>
-                    <a:lnTo>
-                      <a:pt x="9222896" y="21365"/>
-                    </a:lnTo>
-                    <a:lnTo>
-                      <a:pt x="9307516" y="34357"/>
-                    </a:lnTo>
-                    <a:lnTo>
-                      <a:pt x="9392126" y="38119"/>
-                    </a:lnTo>
-                    <a:lnTo>
-                      <a:pt x="9476737" y="28156"/>
-                    </a:lnTo>
-                    <a:lnTo>
-                      <a:pt x="9561357" y="6172"/>
-                    </a:lnTo>
-                    <a:lnTo>
-                      <a:pt x="9645968" y="24689"/>
-                    </a:lnTo>
-                    <a:lnTo>
-                      <a:pt x="9730578" y="39272"/>
-                    </a:lnTo>
-                    <a:lnTo>
-                      <a:pt x="9815198" y="46387"/>
-                    </a:lnTo>
-                    <a:lnTo>
-                      <a:pt x="9899809" y="27403"/>
-                    </a:lnTo>
-                    <a:lnTo>
-                      <a:pt x="9984419" y="42358"/>
-                    </a:lnTo>
-                    <a:lnTo>
-                      <a:pt x="10069039" y="18164"/>
-                    </a:lnTo>
-                    <a:lnTo>
-                      <a:pt x="10153650" y="41443"/>
+                      <a:pt x="10153650" y="0"/>
                     </a:lnTo>
                   </a:path>
                 </a:pathLst>
@@ -11550,7 +13814,7 @@
               <a:noFill/>
               <a:ln w="28575">
                 <a:solidFill>
-                  <a:schemeClr val="accent2"/>
+                  <a:schemeClr val="accent3"/>
                 </a:solidFill>
               </a:ln>
             </p:spPr>
@@ -11559,28 +13823,28 @@
       </p:grpSp>
       <p:grpSp>
         <p:nvGrpSpPr>
-          <p:cNvPr id="36" name="response-implication"/>
+          <p:cNvPr id="45" name="response-implication"/>
           <p:cNvGrpSpPr/>
           <p:nvPr/>
         </p:nvGrpSpPr>
         <p:grpSpPr>
           <a:xfrm>
             <a:off x="448056" y="5425440"/>
-            <a:ext cx="8107070" cy="704469"/>
+            <a:ext cx="7336231" cy="665035"/>
             <a:chOff x="448056" y="5425440"/>
-            <a:chExt cx="8107070" cy="704469"/>
+            <a:chExt cx="7336231" cy="665035"/>
           </a:xfrm>
         </p:grpSpPr>
         <p:sp>
           <p:nvSpPr>
-            <p:cNvPr id="34" name="TextBox 34"/>
+            <p:cNvPr id="43" name="TextBox 43"/>
             <p:cNvSpPr txBox="1"/>
             <p:nvPr/>
           </p:nvSpPr>
           <p:spPr>
             <a:xfrm>
               <a:off x="448056" y="5425440"/>
-              <a:ext cx="8107070" cy="352044"/>
+              <a:ext cx="7336231" cy="352044"/>
             </a:xfrm>
             <a:prstGeom prst="rect">
               <a:avLst/>
@@ -11606,21 +13870,21 @@
                   <a:ea typeface="+mn-ea"/>
                   <a:cs typeface="+mn-cs"/>
                 </a:rPr>
-                <a:t>B开启180—299s；重叠异常190—279s。模拟响应为台架工况设计提供依据。</a:t>
+                <a:t>从360s渐进增长；早期需在判据前正确提示，并同时报告前期误报。</a:t>
               </a:r>
             </a:p>
           </p:txBody>
         </p:sp>
         <p:sp>
           <p:nvSpPr>
-            <p:cNvPr id="35" name="TextBox 35"/>
+            <p:cNvPr id="44" name="TextBox 44"/>
             <p:cNvSpPr txBox="1"/>
             <p:nvPr/>
           </p:nvSpPr>
           <p:spPr>
             <a:xfrm>
-              <a:off x="448056" y="5777865"/>
-              <a:ext cx="8014716" cy="352044"/>
+              <a:off x="450342" y="5826442"/>
+              <a:ext cx="6728898" cy="264033"/>
             </a:xfrm>
             <a:prstGeom prst="rect">
               <a:avLst/>
@@ -11638,15 +13902,15 @@
             <a:p>
               <a:pPr algn="l"/>
               <a:r>
-                <a:rPr lang="zh-CN" sz="1800" dirty="0">
+                <a:rPr lang="zh-CN" sz="1350" dirty="0">
                   <a:solidFill>
-                    <a:schemeClr val="accent1"/>
+                    <a:schemeClr val="accent5"/>
                   </a:solidFill>
                   <a:latin typeface="+mn-lt"/>
                   <a:ea typeface="+mn-ea"/>
                   <a:cs typeface="+mn-cs"/>
                 </a:rPr>
-                <a:t>下一步：参考标定、测点校核、独立操作标签；不是据此报告真实识别率。</a:t>
+                <a:t>横轴：模型时间/s；15%非农学阈值；实际判据、故障程度和两段时间须独立测量。</a:t>
               </a:r>
             </a:p>
           </p:txBody>
@@ -11697,7 +13961,7 @@
         <p:spPr>
           <a:xfrm>
             <a:off x="451104" y="289560"/>
-            <a:ext cx="2186940" cy="234696"/>
+            <a:ext cx="1789176" cy="234696"/>
           </a:xfrm>
           <a:prstGeom prst="rect">
             <a:avLst/>
@@ -11723,35 +13987,195 @@
                 <a:ea typeface="+mn-ea"/>
                 <a:cs typeface="+mn-cs"/>
               </a:rPr>
-              <a:t>1920次合成回放｜非LoRa实测</a:t>
+              <a:t>旧模型公平回放｜非射频</a:t>
+            </a:r>
+          </a:p>
+        </p:txBody>
+      </p:sp>
+      <p:sp>
+        <p:nvSpPr>
+          <p:cNvPr id="3" name="page-route-0"/>
+          <p:cNvSpPr txBox="1"/>
+          <p:nvPr/>
+        </p:nvSpPr>
+        <p:spPr>
+          <a:xfrm>
+            <a:off x="7518654" y="289560"/>
+            <a:ext cx="335280" cy="234696"/>
+          </a:xfrm>
+          <a:prstGeom prst="rect">
+            <a:avLst/>
+          </a:prstGeom>
+          <a:noFill/>
+          <a:ln>
+            <a:noFill/>
+          </a:ln>
+        </p:spPr>
+        <p:txBody>
+          <a:bodyPr wrap="none" lIns="0" tIns="0" rIns="0" bIns="0" anchor="t" anchorCtr="0">
+            <a:spAutoFit/>
+          </a:bodyPr>
+          <a:lstStyle/>
+          <a:p>
+            <a:pPr algn="l"/>
+            <a:r>
+              <a:rPr lang="zh-CN" sz="1200" dirty="0">
+                <a:solidFill>
+                  <a:schemeClr val="accent5"/>
+                </a:solidFill>
+                <a:latin typeface="+mn-lt"/>
+                <a:ea typeface="+mn-ea"/>
+                <a:cs typeface="+mn-cs"/>
+              </a:rPr>
+              <a:t>场景</a:t>
+            </a:r>
+          </a:p>
+        </p:txBody>
+      </p:sp>
+      <p:sp>
+        <p:nvSpPr>
+          <p:cNvPr id="4" name="page-route-1"/>
+          <p:cNvSpPr txBox="1"/>
+          <p:nvPr/>
+        </p:nvSpPr>
+        <p:spPr>
+          <a:xfrm>
+            <a:off x="8404479" y="289560"/>
+            <a:ext cx="335280" cy="234696"/>
+          </a:xfrm>
+          <a:prstGeom prst="rect">
+            <a:avLst/>
+          </a:prstGeom>
+          <a:noFill/>
+          <a:ln>
+            <a:noFill/>
+          </a:ln>
+        </p:spPr>
+        <p:txBody>
+          <a:bodyPr wrap="none" lIns="0" tIns="0" rIns="0" bIns="0" anchor="t" anchorCtr="0">
+            <a:spAutoFit/>
+          </a:bodyPr>
+          <a:lstStyle/>
+          <a:p>
+            <a:pPr algn="l"/>
+            <a:r>
+              <a:rPr lang="zh-CN" sz="1200" dirty="0">
+                <a:solidFill>
+                  <a:schemeClr val="accent5"/>
+                </a:solidFill>
+                <a:latin typeface="+mn-lt"/>
+                <a:ea typeface="+mn-ea"/>
+                <a:cs typeface="+mn-cs"/>
+              </a:rPr>
+              <a:t>系统</a:t>
+            </a:r>
+          </a:p>
+        </p:txBody>
+      </p:sp>
+      <p:sp>
+        <p:nvSpPr>
+          <p:cNvPr id="5" name="page-route-2"/>
+          <p:cNvSpPr txBox="1"/>
+          <p:nvPr/>
+        </p:nvSpPr>
+        <p:spPr>
+          <a:xfrm>
+            <a:off x="9290304" y="289560"/>
+            <a:ext cx="335280" cy="234696"/>
+          </a:xfrm>
+          <a:prstGeom prst="rect">
+            <a:avLst/>
+          </a:prstGeom>
+          <a:noFill/>
+          <a:ln>
+            <a:noFill/>
+          </a:ln>
+        </p:spPr>
+        <p:txBody>
+          <a:bodyPr wrap="none" lIns="0" tIns="0" rIns="0" bIns="0" anchor="t" anchorCtr="0">
+            <a:spAutoFit/>
+          </a:bodyPr>
+          <a:lstStyle/>
+          <a:p>
+            <a:pPr algn="l"/>
+            <a:r>
+              <a:rPr lang="zh-CN" sz="1200" b="1" dirty="0">
+                <a:solidFill>
+                  <a:schemeClr val="accent1"/>
+                </a:solidFill>
+                <a:latin typeface="+mn-lt"/>
+                <a:ea typeface="+mn-ea"/>
+                <a:cs typeface="+mn-cs"/>
+              </a:rPr>
+              <a:t>证据</a:t>
+            </a:r>
+          </a:p>
+        </p:txBody>
+      </p:sp>
+      <p:sp>
+        <p:nvSpPr>
+          <p:cNvPr id="6" name="page-route-3"/>
+          <p:cNvSpPr txBox="1"/>
+          <p:nvPr/>
+        </p:nvSpPr>
+        <p:spPr>
+          <a:xfrm>
+            <a:off x="10176129" y="289560"/>
+            <a:ext cx="335280" cy="234696"/>
+          </a:xfrm>
+          <a:prstGeom prst="rect">
+            <a:avLst/>
+          </a:prstGeom>
+          <a:noFill/>
+          <a:ln>
+            <a:noFill/>
+          </a:ln>
+        </p:spPr>
+        <p:txBody>
+          <a:bodyPr wrap="none" lIns="0" tIns="0" rIns="0" bIns="0" anchor="t" anchorCtr="0">
+            <a:spAutoFit/>
+          </a:bodyPr>
+          <a:lstStyle/>
+          <a:p>
+            <a:pPr algn="l"/>
+            <a:r>
+              <a:rPr lang="zh-CN" sz="1200" dirty="0">
+                <a:solidFill>
+                  <a:schemeClr val="accent5"/>
+                </a:solidFill>
+                <a:latin typeface="+mn-lt"/>
+                <a:ea typeface="+mn-ea"/>
+                <a:cs typeface="+mn-cs"/>
+              </a:rPr>
+              <a:t>实施</a:t>
             </a:r>
           </a:p>
         </p:txBody>
       </p:sp>
       <p:grpSp>
         <p:nvGrpSpPr>
-          <p:cNvPr id="4" name="page-title"/>
+          <p:cNvPr id="8" name="page-title"/>
           <p:cNvGrpSpPr/>
           <p:nvPr/>
         </p:nvGrpSpPr>
         <p:grpSpPr>
           <a:xfrm>
             <a:off x="441198" y="812483"/>
-            <a:ext cx="5968746" cy="616077"/>
+            <a:ext cx="5120640" cy="616077"/>
             <a:chOff x="441198" y="812483"/>
-            <a:chExt cx="5968746" cy="616077"/>
+            <a:chExt cx="5120640" cy="616077"/>
           </a:xfrm>
         </p:grpSpPr>
         <p:sp>
           <p:nvSpPr>
-            <p:cNvPr id="3" name="TextBox 3"/>
+            <p:cNvPr id="7" name="TextBox 7"/>
             <p:cNvSpPr txBox="1"/>
             <p:nvPr/>
           </p:nvSpPr>
           <p:spPr>
             <a:xfrm>
               <a:off x="441198" y="812483"/>
-              <a:ext cx="5968746" cy="616077"/>
+              <a:ext cx="5120640" cy="616077"/>
             </a:xfrm>
             <a:prstGeom prst="rect">
               <a:avLst/>
@@ -11777,7 +14201,7 @@
                   <a:ea typeface="+mj-ea"/>
                   <a:cs typeface="+mj-cs"/>
                 </a:rPr>
-                <a:t>通信优势必须同时接受误差约束</a:t>
+                <a:t>可靠告警同时承担通信代价</a:t>
               </a:r>
             </a:p>
           </p:txBody>
@@ -11785,7 +14209,7 @@
       </p:grpSp>
       <p:sp>
         <p:nvSpPr>
-          <p:cNvPr id="5" name="Line 5"/>
+          <p:cNvPr id="9" name="Line 9"/>
           <p:cNvSpPr/>
           <p:nvPr/>
         </p:nvSpPr>
@@ -11821,14 +14245,14 @@
       </p:sp>
       <p:sp>
         <p:nvSpPr>
-          <p:cNvPr id="6" name="source-footer"/>
+          <p:cNvPr id="10" name="source-footer"/>
           <p:cNvSpPr txBox="1"/>
           <p:nvPr/>
         </p:nvSpPr>
         <p:spPr>
           <a:xfrm>
             <a:off x="451104" y="6376035"/>
-            <a:ext cx="8254898" cy="234696"/>
+            <a:ext cx="7826807" cy="234696"/>
           </a:xfrm>
           <a:prstGeom prst="rect">
             <a:avLst/>
@@ -11854,14 +14278,14 @@
                 <a:ea typeface="+mn-ea"/>
                 <a:cs typeface="+mn-cs"/>
               </a:rPr>
-              <a:t>来源：communication_results/summary.json；20种子均值；同检测/载荷/ACK；模型回放，非射频/功耗实验。</a:t>
+              <a:t>来源：旧单压力communication_results/summary.json；相同检测/ACK；非射频/功耗，未与新诊断合并。</a:t>
             </a:r>
           </a:p>
         </p:txBody>
       </p:sp>
       <p:sp>
         <p:nvSpPr>
-          <p:cNvPr id="7" name="page-number"/>
+          <p:cNvPr id="11" name="page-number"/>
           <p:cNvSpPr txBox="1"/>
           <p:nvPr/>
         </p:nvSpPr>
@@ -11901,7 +14325,7 @@
       </p:sp>
       <p:grpSp>
         <p:nvGrpSpPr>
-          <p:cNvPr id="9" name="communication-heading"/>
+          <p:cNvPr id="13" name="communication-heading"/>
           <p:cNvGrpSpPr/>
           <p:nvPr/>
         </p:nvGrpSpPr>
@@ -11915,7 +14339,7 @@
         </p:grpSpPr>
         <p:sp>
           <p:nvSpPr>
-            <p:cNvPr id="8" name="TextBox 8"/>
+            <p:cNvPr id="12" name="TextBox 12"/>
             <p:cNvSpPr txBox="1"/>
             <p:nvPr/>
           </p:nvSpPr>
@@ -11956,7 +14380,7 @@
       </p:grpSp>
       <p:grpSp>
         <p:nvGrpSpPr>
-          <p:cNvPr id="12" name="normal-label"/>
+          <p:cNvPr id="16" name="normal-label"/>
           <p:cNvGrpSpPr/>
           <p:nvPr/>
         </p:nvGrpSpPr>
@@ -11970,7 +14394,7 @@
         </p:grpSpPr>
         <p:sp>
           <p:nvSpPr>
-            <p:cNvPr id="10" name="TextBox 10"/>
+            <p:cNvPr id="14" name="TextBox 14"/>
             <p:cNvSpPr txBox="1"/>
             <p:nvPr/>
           </p:nvSpPr>
@@ -12010,7 +14434,7 @@
         </p:sp>
         <p:sp>
           <p:nvSpPr>
-            <p:cNvPr id="11" name="TextBox 11"/>
+            <p:cNvPr id="15" name="TextBox 15"/>
             <p:cNvSpPr txBox="1"/>
             <p:nvPr/>
           </p:nvSpPr>
@@ -12051,7 +14475,7 @@
       </p:grpSp>
       <p:grpSp>
         <p:nvGrpSpPr>
-          <p:cNvPr id="15" name="noise-label"/>
+          <p:cNvPr id="19" name="noise-label"/>
           <p:cNvGrpSpPr/>
           <p:nvPr/>
         </p:nvGrpSpPr>
@@ -12065,7 +14489,7 @@
         </p:grpSpPr>
         <p:sp>
           <p:nvSpPr>
-            <p:cNvPr id="13" name="TextBox 13"/>
+            <p:cNvPr id="17" name="TextBox 17"/>
             <p:cNvSpPr txBox="1"/>
             <p:nvPr/>
           </p:nvSpPr>
@@ -12105,7 +14529,7 @@
         </p:sp>
         <p:sp>
           <p:nvSpPr>
-            <p:cNvPr id="14" name="TextBox 14"/>
+            <p:cNvPr id="18" name="TextBox 18"/>
             <p:cNvSpPr txBox="1"/>
             <p:nvPr/>
           </p:nvSpPr>
@@ -12146,7 +14570,7 @@
       </p:grpSp>
       <p:grpSp>
         <p:nvGrpSpPr>
-          <p:cNvPr id="44" name="normal-tradeoff"/>
+          <p:cNvPr id="48" name="normal-tradeoff"/>
           <p:cNvGrpSpPr/>
           <p:nvPr/>
         </p:nvGrpSpPr>
@@ -12160,7 +14584,7 @@
         </p:grpSpPr>
         <p:grpSp>
           <p:nvGrpSpPr>
-            <p:cNvPr id="43" name="normal-tradeoff-chartArea"/>
+            <p:cNvPr id="47" name="normal-tradeoff-chartArea"/>
             <p:cNvGrpSpPr/>
             <p:nvPr/>
           </p:nvGrpSpPr>
@@ -12174,7 +14598,7 @@
           </p:grpSpPr>
           <p:sp>
             <p:nvSpPr>
-              <p:cNvPr id="16" name="Line 16"/>
+              <p:cNvPr id="20" name="Line 20"/>
               <p:cNvSpPr/>
               <p:nvPr/>
             </p:nvSpPr>
@@ -12210,7 +14634,7 @@
           </p:sp>
           <p:sp>
             <p:nvSpPr>
-              <p:cNvPr id="17" name="TextBox 17"/>
+              <p:cNvPr id="21" name="TextBox 21"/>
               <p:cNvSpPr txBox="1"/>
               <p:nvPr/>
             </p:nvSpPr>
@@ -12250,7 +14674,7 @@
           </p:sp>
           <p:sp>
             <p:nvSpPr>
-              <p:cNvPr id="18" name="Line 18"/>
+              <p:cNvPr id="22" name="Line 22"/>
               <p:cNvSpPr/>
               <p:nvPr/>
             </p:nvSpPr>
@@ -12286,7 +14710,7 @@
           </p:sp>
           <p:sp>
             <p:nvSpPr>
-              <p:cNvPr id="19" name="TextBox 19"/>
+              <p:cNvPr id="23" name="TextBox 23"/>
               <p:cNvSpPr txBox="1"/>
               <p:nvPr/>
             </p:nvSpPr>
@@ -12326,7 +14750,7 @@
           </p:sp>
           <p:sp>
             <p:nvSpPr>
-              <p:cNvPr id="20" name="Line 20"/>
+              <p:cNvPr id="24" name="Line 24"/>
               <p:cNvSpPr/>
               <p:nvPr/>
             </p:nvSpPr>
@@ -12362,7 +14786,7 @@
           </p:sp>
           <p:sp>
             <p:nvSpPr>
-              <p:cNvPr id="21" name="TextBox 21"/>
+              <p:cNvPr id="25" name="TextBox 25"/>
               <p:cNvSpPr txBox="1"/>
               <p:nvPr/>
             </p:nvSpPr>
@@ -12402,7 +14826,7 @@
           </p:sp>
           <p:sp>
             <p:nvSpPr>
-              <p:cNvPr id="22" name="Line 22"/>
+              <p:cNvPr id="26" name="Line 26"/>
               <p:cNvSpPr/>
               <p:nvPr/>
             </p:nvSpPr>
@@ -12438,7 +14862,7 @@
           </p:sp>
           <p:sp>
             <p:nvSpPr>
-              <p:cNvPr id="23" name="TextBox 23"/>
+              <p:cNvPr id="27" name="TextBox 27"/>
               <p:cNvSpPr txBox="1"/>
               <p:nvPr/>
             </p:nvSpPr>
@@ -12478,7 +14902,7 @@
           </p:sp>
           <p:sp>
             <p:nvSpPr>
-              <p:cNvPr id="24" name="Line 24"/>
+              <p:cNvPr id="28" name="Line 28"/>
               <p:cNvSpPr/>
               <p:nvPr/>
             </p:nvSpPr>
@@ -12514,7 +14938,7 @@
           </p:sp>
           <p:sp>
             <p:nvSpPr>
-              <p:cNvPr id="25" name="TextBox 25"/>
+              <p:cNvPr id="29" name="TextBox 29"/>
               <p:cNvSpPr txBox="1"/>
               <p:nvPr/>
             </p:nvSpPr>
@@ -12554,7 +14978,7 @@
           </p:sp>
           <p:sp>
             <p:nvSpPr>
-              <p:cNvPr id="26" name="Line 26"/>
+              <p:cNvPr id="30" name="Line 30"/>
               <p:cNvSpPr/>
               <p:nvPr/>
             </p:nvSpPr>
@@ -12590,7 +15014,7 @@
           </p:sp>
           <p:sp>
             <p:nvSpPr>
-              <p:cNvPr id="27" name="TextBox 27"/>
+              <p:cNvPr id="31" name="TextBox 31"/>
               <p:cNvSpPr txBox="1"/>
               <p:nvPr/>
             </p:nvSpPr>
@@ -12630,7 +15054,7 @@
           </p:sp>
           <p:sp>
             <p:nvSpPr>
-              <p:cNvPr id="28" name="TextBox 28"/>
+              <p:cNvPr id="32" name="TextBox 32"/>
               <p:cNvSpPr txBox="1"/>
               <p:nvPr/>
             </p:nvSpPr>
@@ -12670,7 +15094,7 @@
           </p:sp>
           <p:sp>
             <p:nvSpPr>
-              <p:cNvPr id="29" name="TextBox 29"/>
+              <p:cNvPr id="33" name="TextBox 33"/>
               <p:cNvSpPr txBox="1"/>
               <p:nvPr/>
             </p:nvSpPr>
@@ -12710,7 +15134,7 @@
           </p:sp>
           <p:sp>
             <p:nvSpPr>
-              <p:cNvPr id="30" name="TextBox 30"/>
+              <p:cNvPr id="34" name="TextBox 34"/>
               <p:cNvSpPr txBox="1"/>
               <p:nvPr/>
             </p:nvSpPr>
@@ -12750,7 +15174,7 @@
           </p:sp>
           <p:sp>
             <p:nvSpPr>
-              <p:cNvPr id="31" name="TextBox 31"/>
+              <p:cNvPr id="35" name="TextBox 35"/>
               <p:cNvSpPr txBox="1"/>
               <p:nvPr/>
             </p:nvSpPr>
@@ -12790,7 +15214,7 @@
           </p:sp>
           <p:sp>
             <p:nvSpPr>
-              <p:cNvPr id="32" name="TextBox 32"/>
+              <p:cNvPr id="36" name="TextBox 36"/>
               <p:cNvSpPr txBox="1"/>
               <p:nvPr/>
             </p:nvSpPr>
@@ -12830,7 +15254,7 @@
           </p:sp>
           <p:sp>
             <p:nvSpPr>
-              <p:cNvPr id="33" name="Line 33"/>
+              <p:cNvPr id="37" name="Line 37"/>
               <p:cNvSpPr/>
               <p:nvPr/>
             </p:nvSpPr>
@@ -12866,7 +15290,7 @@
           </p:sp>
           <p:sp>
             <p:nvSpPr>
-              <p:cNvPr id="34" name="Line 34"/>
+              <p:cNvPr id="38" name="Line 38"/>
               <p:cNvSpPr/>
               <p:nvPr/>
             </p:nvSpPr>
@@ -12902,7 +15326,7 @@
           </p:sp>
           <p:sp>
             <p:nvSpPr>
-              <p:cNvPr id="35" name="Ellipse 35"/>
+              <p:cNvPr id="39" name="Ellipse 39"/>
               <p:cNvSpPr/>
               <p:nvPr/>
             </p:nvSpPr>
@@ -12924,7 +15348,7 @@
           </p:sp>
           <p:sp>
             <p:nvSpPr>
-              <p:cNvPr id="36" name="TextBox 36"/>
+              <p:cNvPr id="40" name="TextBox 40"/>
               <p:cNvSpPr txBox="1"/>
               <p:nvPr/>
             </p:nvSpPr>
@@ -12964,7 +15388,7 @@
           </p:sp>
           <p:sp>
             <p:nvSpPr>
-              <p:cNvPr id="37" name="Ellipse 37"/>
+              <p:cNvPr id="41" name="Ellipse 41"/>
               <p:cNvSpPr/>
               <p:nvPr/>
             </p:nvSpPr>
@@ -12986,7 +15410,7 @@
           </p:sp>
           <p:sp>
             <p:nvSpPr>
-              <p:cNvPr id="38" name="TextBox 38"/>
+              <p:cNvPr id="42" name="TextBox 42"/>
               <p:cNvSpPr txBox="1"/>
               <p:nvPr/>
             </p:nvSpPr>
@@ -13026,7 +15450,7 @@
           </p:sp>
           <p:sp>
             <p:nvSpPr>
-              <p:cNvPr id="39" name="Ellipse 39"/>
+              <p:cNvPr id="43" name="Ellipse 43"/>
               <p:cNvSpPr/>
               <p:nvPr/>
             </p:nvSpPr>
@@ -13048,7 +15472,7 @@
           </p:sp>
           <p:sp>
             <p:nvSpPr>
-              <p:cNvPr id="40" name="TextBox 40"/>
+              <p:cNvPr id="44" name="TextBox 44"/>
               <p:cNvSpPr txBox="1"/>
               <p:nvPr/>
             </p:nvSpPr>
@@ -13088,7 +15512,7 @@
           </p:sp>
           <p:sp>
             <p:nvSpPr>
-              <p:cNvPr id="41" name="Ellipse 41"/>
+              <p:cNvPr id="45" name="Ellipse 45"/>
               <p:cNvSpPr/>
               <p:nvPr/>
             </p:nvSpPr>
@@ -13110,7 +15534,7 @@
           </p:sp>
           <p:sp>
             <p:nvSpPr>
-              <p:cNvPr id="42" name="TextBox 42"/>
+              <p:cNvPr id="46" name="TextBox 46"/>
               <p:cNvSpPr txBox="1"/>
               <p:nvPr/>
             </p:nvSpPr>
@@ -13152,7 +15576,7 @@
       </p:grpSp>
       <p:grpSp>
         <p:nvGrpSpPr>
-          <p:cNvPr id="73" name="noise-tradeoff"/>
+          <p:cNvPr id="77" name="noise-tradeoff"/>
           <p:cNvGrpSpPr/>
           <p:nvPr/>
         </p:nvGrpSpPr>
@@ -13166,7 +15590,7 @@
         </p:grpSpPr>
         <p:grpSp>
           <p:nvGrpSpPr>
-            <p:cNvPr id="72" name="noise-tradeoff-chartArea"/>
+            <p:cNvPr id="76" name="noise-tradeoff-chartArea"/>
             <p:cNvGrpSpPr/>
             <p:nvPr/>
           </p:nvGrpSpPr>
@@ -13180,7 +15604,7 @@
           </p:grpSpPr>
           <p:sp>
             <p:nvSpPr>
-              <p:cNvPr id="45" name="Line 45"/>
+              <p:cNvPr id="49" name="Line 49"/>
               <p:cNvSpPr/>
               <p:nvPr/>
             </p:nvSpPr>
@@ -13216,7 +15640,7 @@
           </p:sp>
           <p:sp>
             <p:nvSpPr>
-              <p:cNvPr id="46" name="TextBox 46"/>
+              <p:cNvPr id="50" name="TextBox 50"/>
               <p:cNvSpPr txBox="1"/>
               <p:nvPr/>
             </p:nvSpPr>
@@ -13256,7 +15680,7 @@
           </p:sp>
           <p:sp>
             <p:nvSpPr>
-              <p:cNvPr id="47" name="Line 47"/>
+              <p:cNvPr id="51" name="Line 51"/>
               <p:cNvSpPr/>
               <p:nvPr/>
             </p:nvSpPr>
@@ -13292,7 +15716,7 @@
           </p:sp>
           <p:sp>
             <p:nvSpPr>
-              <p:cNvPr id="48" name="TextBox 48"/>
+              <p:cNvPr id="52" name="TextBox 52"/>
               <p:cNvSpPr txBox="1"/>
               <p:nvPr/>
             </p:nvSpPr>
@@ -13332,7 +15756,7 @@
           </p:sp>
           <p:sp>
             <p:nvSpPr>
-              <p:cNvPr id="49" name="Line 49"/>
+              <p:cNvPr id="53" name="Line 53"/>
               <p:cNvSpPr/>
               <p:nvPr/>
             </p:nvSpPr>
@@ -13368,7 +15792,7 @@
           </p:sp>
           <p:sp>
             <p:nvSpPr>
-              <p:cNvPr id="50" name="TextBox 50"/>
+              <p:cNvPr id="54" name="TextBox 54"/>
               <p:cNvSpPr txBox="1"/>
               <p:nvPr/>
             </p:nvSpPr>
@@ -13408,7 +15832,7 @@
           </p:sp>
           <p:sp>
             <p:nvSpPr>
-              <p:cNvPr id="51" name="Line 51"/>
+              <p:cNvPr id="55" name="Line 55"/>
               <p:cNvSpPr/>
               <p:nvPr/>
             </p:nvSpPr>
@@ -13444,7 +15868,7 @@
           </p:sp>
           <p:sp>
             <p:nvSpPr>
-              <p:cNvPr id="52" name="TextBox 52"/>
+              <p:cNvPr id="56" name="TextBox 56"/>
               <p:cNvSpPr txBox="1"/>
               <p:nvPr/>
             </p:nvSpPr>
@@ -13484,7 +15908,7 @@
           </p:sp>
           <p:sp>
             <p:nvSpPr>
-              <p:cNvPr id="53" name="Line 53"/>
+              <p:cNvPr id="57" name="Line 57"/>
               <p:cNvSpPr/>
               <p:nvPr/>
             </p:nvSpPr>
@@ -13520,7 +15944,7 @@
           </p:sp>
           <p:sp>
             <p:nvSpPr>
-              <p:cNvPr id="54" name="TextBox 54"/>
+              <p:cNvPr id="58" name="TextBox 58"/>
               <p:cNvSpPr txBox="1"/>
               <p:nvPr/>
             </p:nvSpPr>
@@ -13560,7 +15984,7 @@
           </p:sp>
           <p:sp>
             <p:nvSpPr>
-              <p:cNvPr id="55" name="Line 55"/>
+              <p:cNvPr id="59" name="Line 59"/>
               <p:cNvSpPr/>
               <p:nvPr/>
             </p:nvSpPr>
@@ -13596,7 +16020,7 @@
           </p:sp>
           <p:sp>
             <p:nvSpPr>
-              <p:cNvPr id="56" name="TextBox 56"/>
+              <p:cNvPr id="60" name="TextBox 60"/>
               <p:cNvSpPr txBox="1"/>
               <p:nvPr/>
             </p:nvSpPr>
@@ -13636,7 +16060,7 @@
           </p:sp>
           <p:sp>
             <p:nvSpPr>
-              <p:cNvPr id="57" name="TextBox 57"/>
+              <p:cNvPr id="61" name="TextBox 61"/>
               <p:cNvSpPr txBox="1"/>
               <p:nvPr/>
             </p:nvSpPr>
@@ -13676,7 +16100,7 @@
           </p:sp>
           <p:sp>
             <p:nvSpPr>
-              <p:cNvPr id="58" name="TextBox 58"/>
+              <p:cNvPr id="62" name="TextBox 62"/>
               <p:cNvSpPr txBox="1"/>
               <p:nvPr/>
             </p:nvSpPr>
@@ -13716,7 +16140,7 @@
           </p:sp>
           <p:sp>
             <p:nvSpPr>
-              <p:cNvPr id="59" name="TextBox 59"/>
+              <p:cNvPr id="63" name="TextBox 63"/>
               <p:cNvSpPr txBox="1"/>
               <p:nvPr/>
             </p:nvSpPr>
@@ -13756,7 +16180,7 @@
           </p:sp>
           <p:sp>
             <p:nvSpPr>
-              <p:cNvPr id="60" name="TextBox 60"/>
+              <p:cNvPr id="64" name="TextBox 64"/>
               <p:cNvSpPr txBox="1"/>
               <p:nvPr/>
             </p:nvSpPr>
@@ -13796,7 +16220,7 @@
           </p:sp>
           <p:sp>
             <p:nvSpPr>
-              <p:cNvPr id="61" name="TextBox 61"/>
+              <p:cNvPr id="65" name="TextBox 65"/>
               <p:cNvSpPr txBox="1"/>
               <p:nvPr/>
             </p:nvSpPr>
@@ -13836,7 +16260,7 @@
           </p:sp>
           <p:sp>
             <p:nvSpPr>
-              <p:cNvPr id="62" name="Line 62"/>
+              <p:cNvPr id="66" name="Line 66"/>
               <p:cNvSpPr/>
               <p:nvPr/>
             </p:nvSpPr>
@@ -13872,7 +16296,7 @@
           </p:sp>
           <p:sp>
             <p:nvSpPr>
-              <p:cNvPr id="63" name="Line 63"/>
+              <p:cNvPr id="67" name="Line 67"/>
               <p:cNvSpPr/>
               <p:nvPr/>
             </p:nvSpPr>
@@ -13908,7 +16332,7 @@
           </p:sp>
           <p:sp>
             <p:nvSpPr>
-              <p:cNvPr id="64" name="Ellipse 64"/>
+              <p:cNvPr id="68" name="Ellipse 68"/>
               <p:cNvSpPr/>
               <p:nvPr/>
             </p:nvSpPr>
@@ -13930,7 +16354,7 @@
           </p:sp>
           <p:sp>
             <p:nvSpPr>
-              <p:cNvPr id="65" name="TextBox 65"/>
+              <p:cNvPr id="69" name="TextBox 69"/>
               <p:cNvSpPr txBox="1"/>
               <p:nvPr/>
             </p:nvSpPr>
@@ -13970,7 +16394,7 @@
           </p:sp>
           <p:sp>
             <p:nvSpPr>
-              <p:cNvPr id="66" name="Ellipse 66"/>
+              <p:cNvPr id="70" name="Ellipse 70"/>
               <p:cNvSpPr/>
               <p:nvPr/>
             </p:nvSpPr>
@@ -13992,7 +16416,7 @@
           </p:sp>
           <p:sp>
             <p:nvSpPr>
-              <p:cNvPr id="67" name="TextBox 67"/>
+              <p:cNvPr id="71" name="TextBox 71"/>
               <p:cNvSpPr txBox="1"/>
               <p:nvPr/>
             </p:nvSpPr>
@@ -14032,7 +16456,7 @@
           </p:sp>
           <p:sp>
             <p:nvSpPr>
-              <p:cNvPr id="68" name="Ellipse 68"/>
+              <p:cNvPr id="72" name="Ellipse 72"/>
               <p:cNvSpPr/>
               <p:nvPr/>
             </p:nvSpPr>
@@ -14054,7 +16478,7 @@
           </p:sp>
           <p:sp>
             <p:nvSpPr>
-              <p:cNvPr id="69" name="TextBox 69"/>
+              <p:cNvPr id="73" name="TextBox 73"/>
               <p:cNvSpPr txBox="1"/>
               <p:nvPr/>
             </p:nvSpPr>
@@ -14094,7 +16518,7 @@
           </p:sp>
           <p:sp>
             <p:nvSpPr>
-              <p:cNvPr id="70" name="Ellipse 70"/>
+              <p:cNvPr id="74" name="Ellipse 74"/>
               <p:cNvSpPr/>
               <p:nvPr/>
             </p:nvSpPr>
@@ -14116,7 +16540,7 @@
           </p:sp>
           <p:sp>
             <p:nvSpPr>
-              <p:cNvPr id="71" name="TextBox 71"/>
+              <p:cNvPr id="75" name="TextBox 75"/>
               <p:cNvSpPr txBox="1"/>
               <p:nvPr/>
             </p:nvSpPr>
@@ -14158,7 +16582,7 @@
       </p:grpSp>
       <p:grpSp>
         <p:nvGrpSpPr>
-          <p:cNvPr id="76" name="communication-implication"/>
+          <p:cNvPr id="80" name="communication-implication"/>
           <p:cNvGrpSpPr/>
           <p:nvPr/>
         </p:nvGrpSpPr>
@@ -14172,7 +16596,7 @@
         </p:grpSpPr>
         <p:sp>
           <p:nvSpPr>
-            <p:cNvPr id="74" name="TextBox 74"/>
+            <p:cNvPr id="78" name="TextBox 78"/>
             <p:cNvSpPr txBox="1"/>
             <p:nvPr/>
           </p:nvSpPr>
@@ -14212,7 +16636,7 @@
         </p:sp>
         <p:sp>
           <p:nvSpPr>
-            <p:cNvPr id="75" name="TextBox 75"/>
+            <p:cNvPr id="79" name="TextBox 79"/>
             <p:cNvSpPr txBox="1"/>
             <p:nvPr/>
           </p:nvSpPr>
@@ -14296,7 +16720,7 @@
         <p:spPr>
           <a:xfrm>
             <a:off x="451104" y="289560"/>
-            <a:ext cx="981456" cy="234696"/>
+            <a:ext cx="1627632" cy="234696"/>
           </a:xfrm>
           <a:prstGeom prst="rect">
             <a:avLst/>
@@ -14322,14 +16746,174 @@
                 <a:ea typeface="+mn-ea"/>
                 <a:cs typeface="+mn-cs"/>
               </a:rPr>
-              <a:t>合成挑战检验</a:t>
+              <a:t>新增合成挑战｜非实测</a:t>
+            </a:r>
+          </a:p>
+        </p:txBody>
+      </p:sp>
+      <p:sp>
+        <p:nvSpPr>
+          <p:cNvPr id="3" name="page-route-0"/>
+          <p:cNvSpPr txBox="1"/>
+          <p:nvPr/>
+        </p:nvSpPr>
+        <p:spPr>
+          <a:xfrm>
+            <a:off x="7518654" y="289560"/>
+            <a:ext cx="335280" cy="234696"/>
+          </a:xfrm>
+          <a:prstGeom prst="rect">
+            <a:avLst/>
+          </a:prstGeom>
+          <a:noFill/>
+          <a:ln>
+            <a:noFill/>
+          </a:ln>
+        </p:spPr>
+        <p:txBody>
+          <a:bodyPr wrap="none" lIns="0" tIns="0" rIns="0" bIns="0" anchor="t" anchorCtr="0">
+            <a:spAutoFit/>
+          </a:bodyPr>
+          <a:lstStyle/>
+          <a:p>
+            <a:pPr algn="l"/>
+            <a:r>
+              <a:rPr lang="zh-CN" sz="1200" dirty="0">
+                <a:solidFill>
+                  <a:schemeClr val="accent5"/>
+                </a:solidFill>
+                <a:latin typeface="+mn-lt"/>
+                <a:ea typeface="+mn-ea"/>
+                <a:cs typeface="+mn-cs"/>
+              </a:rPr>
+              <a:t>场景</a:t>
+            </a:r>
+          </a:p>
+        </p:txBody>
+      </p:sp>
+      <p:sp>
+        <p:nvSpPr>
+          <p:cNvPr id="4" name="page-route-1"/>
+          <p:cNvSpPr txBox="1"/>
+          <p:nvPr/>
+        </p:nvSpPr>
+        <p:spPr>
+          <a:xfrm>
+            <a:off x="8404479" y="289560"/>
+            <a:ext cx="335280" cy="234696"/>
+          </a:xfrm>
+          <a:prstGeom prst="rect">
+            <a:avLst/>
+          </a:prstGeom>
+          <a:noFill/>
+          <a:ln>
+            <a:noFill/>
+          </a:ln>
+        </p:spPr>
+        <p:txBody>
+          <a:bodyPr wrap="none" lIns="0" tIns="0" rIns="0" bIns="0" anchor="t" anchorCtr="0">
+            <a:spAutoFit/>
+          </a:bodyPr>
+          <a:lstStyle/>
+          <a:p>
+            <a:pPr algn="l"/>
+            <a:r>
+              <a:rPr lang="zh-CN" sz="1200" dirty="0">
+                <a:solidFill>
+                  <a:schemeClr val="accent5"/>
+                </a:solidFill>
+                <a:latin typeface="+mn-lt"/>
+                <a:ea typeface="+mn-ea"/>
+                <a:cs typeface="+mn-cs"/>
+              </a:rPr>
+              <a:t>系统</a:t>
+            </a:r>
+          </a:p>
+        </p:txBody>
+      </p:sp>
+      <p:sp>
+        <p:nvSpPr>
+          <p:cNvPr id="5" name="page-route-2"/>
+          <p:cNvSpPr txBox="1"/>
+          <p:nvPr/>
+        </p:nvSpPr>
+        <p:spPr>
+          <a:xfrm>
+            <a:off x="9290304" y="289560"/>
+            <a:ext cx="335280" cy="234696"/>
+          </a:xfrm>
+          <a:prstGeom prst="rect">
+            <a:avLst/>
+          </a:prstGeom>
+          <a:noFill/>
+          <a:ln>
+            <a:noFill/>
+          </a:ln>
+        </p:spPr>
+        <p:txBody>
+          <a:bodyPr wrap="none" lIns="0" tIns="0" rIns="0" bIns="0" anchor="t" anchorCtr="0">
+            <a:spAutoFit/>
+          </a:bodyPr>
+          <a:lstStyle/>
+          <a:p>
+            <a:pPr algn="l"/>
+            <a:r>
+              <a:rPr lang="zh-CN" sz="1200" b="1" dirty="0">
+                <a:solidFill>
+                  <a:schemeClr val="accent1"/>
+                </a:solidFill>
+                <a:latin typeface="+mn-lt"/>
+                <a:ea typeface="+mn-ea"/>
+                <a:cs typeface="+mn-cs"/>
+              </a:rPr>
+              <a:t>证据</a:t>
+            </a:r>
+          </a:p>
+        </p:txBody>
+      </p:sp>
+      <p:sp>
+        <p:nvSpPr>
+          <p:cNvPr id="6" name="page-route-3"/>
+          <p:cNvSpPr txBox="1"/>
+          <p:nvPr/>
+        </p:nvSpPr>
+        <p:spPr>
+          <a:xfrm>
+            <a:off x="10176129" y="289560"/>
+            <a:ext cx="335280" cy="234696"/>
+          </a:xfrm>
+          <a:prstGeom prst="rect">
+            <a:avLst/>
+          </a:prstGeom>
+          <a:noFill/>
+          <a:ln>
+            <a:noFill/>
+          </a:ln>
+        </p:spPr>
+        <p:txBody>
+          <a:bodyPr wrap="none" lIns="0" tIns="0" rIns="0" bIns="0" anchor="t" anchorCtr="0">
+            <a:spAutoFit/>
+          </a:bodyPr>
+          <a:lstStyle/>
+          <a:p>
+            <a:pPr algn="l"/>
+            <a:r>
+              <a:rPr lang="zh-CN" sz="1200" dirty="0">
+                <a:solidFill>
+                  <a:schemeClr val="accent5"/>
+                </a:solidFill>
+                <a:latin typeface="+mn-lt"/>
+                <a:ea typeface="+mn-ea"/>
+                <a:cs typeface="+mn-cs"/>
+              </a:rPr>
+              <a:t>实施</a:t>
             </a:r>
           </a:p>
         </p:txBody>
       </p:sp>
       <p:grpSp>
         <p:nvGrpSpPr>
-          <p:cNvPr id="4" name="page-title"/>
+          <p:cNvPr id="8" name="page-title"/>
           <p:cNvGrpSpPr/>
           <p:nvPr/>
         </p:nvGrpSpPr>
@@ -14343,7 +16927,7 @@
         </p:grpSpPr>
         <p:sp>
           <p:nvSpPr>
-            <p:cNvPr id="3" name="TextBox 3"/>
+            <p:cNvPr id="7" name="TextBox 7"/>
             <p:cNvSpPr txBox="1"/>
             <p:nvPr/>
           </p:nvSpPr>
@@ -14376,7 +16960,7 @@
                   <a:ea typeface="+mj-ea"/>
                   <a:cs typeface="+mj-cs"/>
                 </a:rPr>
-                <a:t>反例决定边界，而不是被隐藏</a:t>
+                <a:t>增加测点仍不能消除所有混淆</a:t>
               </a:r>
             </a:p>
           </p:txBody>
@@ -14384,7 +16968,7 @@
       </p:grpSp>
       <p:sp>
         <p:nvSpPr>
-          <p:cNvPr id="5" name="Line 5"/>
+          <p:cNvPr id="9" name="Line 9"/>
           <p:cNvSpPr/>
           <p:nvPr/>
         </p:nvSpPr>
@@ -14420,14 +17004,14 @@
       </p:sp>
       <p:sp>
         <p:nvSpPr>
-          <p:cNvPr id="6" name="source-footer"/>
+          <p:cNvPr id="10" name="source-footer"/>
           <p:cNvSpPr txBox="1"/>
           <p:nvPr/>
         </p:nvSpPr>
         <p:spPr>
           <a:xfrm>
             <a:off x="451104" y="6376035"/>
-            <a:ext cx="7814767" cy="234696"/>
+            <a:ext cx="6829349" cy="234696"/>
           </a:xfrm>
           <a:prstGeom prst="rect">
             <a:avLst/>
@@ -14453,14 +17037,14 @@
                 <a:ea typeface="+mn-ea"/>
                 <a:cs typeface="+mn-cs"/>
               </a:rPr>
-              <a:t>来源：audit_results/audit.json 与 communication_results/summary.json；合成重复不是实际识别率。</a:t>
+              <a:t>来源：diagnosis_results/summary.json，6场景×4噪声×20种子；合成重复不是实物识别率。</a:t>
             </a:r>
           </a:p>
         </p:txBody>
       </p:sp>
       <p:sp>
         <p:nvSpPr>
-          <p:cNvPr id="7" name="page-number"/>
+          <p:cNvPr id="11" name="page-number"/>
           <p:cNvSpPr txBox="1"/>
           <p:nvPr/>
         </p:nvSpPr>
@@ -14500,7 +17084,7 @@
       </p:sp>
       <p:grpSp>
         <p:nvGrpSpPr>
-          <p:cNvPr id="19" name="failure-boundaries"/>
+          <p:cNvPr id="23" name="failure-boundaries"/>
           <p:cNvGrpSpPr/>
           <p:nvPr/>
         </p:nvGrpSpPr>
@@ -14514,14 +17098,14 @@
         </p:grpSpPr>
         <p:sp>
           <p:nvSpPr>
-            <p:cNvPr id="8" name="TextBox 8"/>
+            <p:cNvPr id="12" name="TextBox 12"/>
             <p:cNvSpPr txBox="1"/>
             <p:nvPr/>
           </p:nvSpPr>
           <p:spPr>
             <a:xfrm>
               <a:off x="438150" y="1990725"/>
-              <a:ext cx="1819123" cy="876300"/>
+              <a:ext cx="2168966" cy="876300"/>
             </a:xfrm>
             <a:prstGeom prst="rect">
               <a:avLst/>
@@ -14547,21 +17131,21 @@
                   <a:ea typeface="+mn-ea"/>
                   <a:cs typeface="+mn-cs"/>
                 </a:rPr>
-                <a:t>0 / 20</a:t>
+                <a:t>12 / 20</a:t>
               </a:r>
             </a:p>
           </p:txBody>
         </p:sp>
         <p:sp>
           <p:nvSpPr>
-            <p:cNvPr id="9" name="TextBox 9"/>
+            <p:cNvPr id="13" name="TextBox 13"/>
             <p:cNvSpPr txBox="1"/>
             <p:nvPr/>
           </p:nvSpPr>
           <p:spPr>
             <a:xfrm>
               <a:off x="3636645" y="2138362"/>
-              <a:ext cx="2748915" cy="440055"/>
+              <a:ext cx="3657600" cy="440055"/>
             </a:xfrm>
             <a:prstGeom prst="rect">
               <a:avLst/>
@@ -14587,21 +17171,21 @@
                   <a:ea typeface="+mn-ea"/>
                   <a:cs typeface="+mn-cs"/>
                 </a:rPr>
-                <a:t>弱等效泄漏未被命中</a:t>
+                <a:t>大噪声下正确提前发现试次</a:t>
               </a:r>
             </a:p>
           </p:txBody>
         </p:sp>
         <p:sp>
           <p:nvSpPr>
-            <p:cNvPr id="10" name="TextBox 10"/>
+            <p:cNvPr id="14" name="TextBox 14"/>
             <p:cNvSpPr txBox="1"/>
             <p:nvPr/>
           </p:nvSpPr>
           <p:spPr>
             <a:xfrm>
               <a:off x="3638931" y="2663190"/>
-              <a:ext cx="5106924" cy="352044"/>
+              <a:ext cx="4948618" cy="352044"/>
             </a:xfrm>
             <a:prstGeom prst="rect">
               <a:avLst/>
@@ -14627,14 +17211,14 @@
                   <a:ea typeface="+mn-ea"/>
                   <a:cs typeface="+mn-cs"/>
                 </a:rPr>
-                <a:t>这是检测边界，不是通信重传能够补救的问题。</a:t>
+                <a:t>两类均如此；压力噪声σ10kPa，非实物性能。</a:t>
               </a:r>
             </a:p>
           </p:txBody>
         </p:sp>
         <p:sp>
           <p:nvSpPr>
-            <p:cNvPr id="11" name="Line 11"/>
+            <p:cNvPr id="15" name="Line 15"/>
             <p:cNvSpPr/>
             <p:nvPr/>
           </p:nvSpPr>
@@ -14670,7 +17254,7 @@
         </p:sp>
         <p:sp>
           <p:nvSpPr>
-            <p:cNvPr id="12" name="TextBox 12"/>
+            <p:cNvPr id="16" name="TextBox 16"/>
             <p:cNvSpPr txBox="1"/>
             <p:nvPr/>
           </p:nvSpPr>
@@ -14703,21 +17287,21 @@
                   <a:ea typeface="+mn-ea"/>
                   <a:cs typeface="+mn-cs"/>
                 </a:rPr>
-                <a:t>信息缺失</a:t>
+                <a:t>测量漂移</a:t>
               </a:r>
             </a:p>
           </p:txBody>
         </p:sp>
         <p:sp>
           <p:nvSpPr>
-            <p:cNvPr id="13" name="TextBox 13"/>
+            <p:cNvPr id="17" name="TextBox 17"/>
             <p:cNvSpPr txBox="1"/>
             <p:nvPr/>
           </p:nvSpPr>
           <p:spPr>
             <a:xfrm>
               <a:off x="2676906" y="3558540"/>
-              <a:ext cx="3919576" cy="352044"/>
+              <a:ext cx="3653028" cy="352044"/>
             </a:xfrm>
             <a:prstGeom prst="rect">
               <a:avLst/>
@@ -14743,14 +17327,14 @@
                   <a:ea typeface="+mn-ea"/>
                   <a:cs typeface="+mn-cs"/>
                 </a:rPr>
-                <a:t>无阀态正常切换：平均1次误报/试次</a:t>
+                <a:t>入口压力漂移可被误判为局部受限</a:t>
               </a:r>
             </a:p>
           </p:txBody>
         </p:sp>
         <p:sp>
           <p:nvSpPr>
-            <p:cNvPr id="14" name="TextBox 14"/>
+            <p:cNvPr id="18" name="TextBox 18"/>
             <p:cNvSpPr txBox="1"/>
             <p:nvPr/>
           </p:nvSpPr>
@@ -14783,21 +17367,21 @@
                   <a:ea typeface="+mn-ea"/>
                   <a:cs typeface="+mn-cs"/>
                 </a:rPr>
-                <a:t>较大噪声</a:t>
+                <a:t>状态未知</a:t>
               </a:r>
             </a:p>
           </p:txBody>
         </p:sp>
         <p:sp>
           <p:nvSpPr>
-            <p:cNvPr id="15" name="TextBox 15"/>
+            <p:cNvPr id="19" name="TextBox 19"/>
             <p:cNvSpPr txBox="1"/>
             <p:nvPr/>
           </p:nvSpPr>
           <p:spPr>
             <a:xfrm>
               <a:off x="2676906" y="4177665"/>
-              <a:ext cx="3459175" cy="352044"/>
+              <a:ext cx="3410712" cy="352044"/>
             </a:xfrm>
             <a:prstGeom prst="rect">
               <a:avLst/>
@@ -14823,14 +17407,14 @@
                   <a:ea typeface="+mn-ea"/>
                   <a:cs typeface="+mn-cs"/>
                 </a:rPr>
-                <a:t>候选检测：平均2.7次误报/试次</a:t>
+                <a:t>正常负载增大可与等效泄漏同形</a:t>
               </a:r>
             </a:p>
           </p:txBody>
         </p:sp>
         <p:sp>
           <p:nvSpPr>
-            <p:cNvPr id="16" name="TextBox 16"/>
+            <p:cNvPr id="20" name="TextBox 20"/>
             <p:cNvSpPr txBox="1"/>
             <p:nvPr/>
           </p:nvSpPr>
@@ -14863,21 +17447,21 @@
                   <a:ea typeface="+mn-ea"/>
                   <a:cs typeface="+mn-cs"/>
                 </a:rPr>
-                <a:t>链路中断</a:t>
+                <a:t>理想假设</a:t>
               </a:r>
             </a:p>
           </p:txBody>
         </p:sp>
         <p:sp>
           <p:nvSpPr>
-            <p:cNvPr id="17" name="TextBox 17"/>
+            <p:cNvPr id="21" name="TextBox 21"/>
             <p:cNvSpPr txBox="1"/>
             <p:nvPr/>
           </p:nvSpPr>
           <p:spPr>
             <a:xfrm>
               <a:off x="2676906" y="4796790"/>
-              <a:ext cx="6330620" cy="352044"/>
+              <a:ext cx="6318504" cy="352044"/>
             </a:xfrm>
             <a:prstGeom prst="rect">
               <a:avLst/>
@@ -14903,14 +17487,14 @@
                   <a:ea typeface="+mn-ea"/>
                   <a:cs typeface="+mn-cs"/>
                 </a:rPr>
-                <a:t>30%随机丢包＋15秒阻断，仍有短时告警超过20秒演示约束</a:t>
+                <a:t>单故障、同步测量、平方律；不能据此证明田间早期准确率</a:t>
               </a:r>
             </a:p>
           </p:txBody>
         </p:sp>
         <p:sp>
           <p:nvSpPr>
-            <p:cNvPr id="18" name="TextBox 18"/>
+            <p:cNvPr id="22" name="TextBox 22"/>
             <p:cNvSpPr txBox="1"/>
             <p:nvPr/>
           </p:nvSpPr>
@@ -14994,7 +17578,7 @@
         <p:spPr>
           <a:xfrm>
             <a:off x="451104" y="289560"/>
-            <a:ext cx="2435352" cy="234696"/>
+            <a:ext cx="1627632" cy="234696"/>
           </a:xfrm>
           <a:prstGeom prst="rect">
             <a:avLst/>
@@ -15020,35 +17604,195 @@
                 <a:ea typeface="+mn-ea"/>
                 <a:cs typeface="+mn-cs"/>
               </a:rPr>
-              <a:t>拟实现系统｜网站当前为模型展示</a:t>
+              <a:t>拟实现系统｜演示网页</a:t>
+            </a:r>
+          </a:p>
+        </p:txBody>
+      </p:sp>
+      <p:sp>
+        <p:nvSpPr>
+          <p:cNvPr id="3" name="page-route-0"/>
+          <p:cNvSpPr txBox="1"/>
+          <p:nvPr/>
+        </p:nvSpPr>
+        <p:spPr>
+          <a:xfrm>
+            <a:off x="7518654" y="289560"/>
+            <a:ext cx="335280" cy="234696"/>
+          </a:xfrm>
+          <a:prstGeom prst="rect">
+            <a:avLst/>
+          </a:prstGeom>
+          <a:noFill/>
+          <a:ln>
+            <a:noFill/>
+          </a:ln>
+        </p:spPr>
+        <p:txBody>
+          <a:bodyPr wrap="none" lIns="0" tIns="0" rIns="0" bIns="0" anchor="t" anchorCtr="0">
+            <a:spAutoFit/>
+          </a:bodyPr>
+          <a:lstStyle/>
+          <a:p>
+            <a:pPr algn="l"/>
+            <a:r>
+              <a:rPr lang="zh-CN" sz="1200" dirty="0">
+                <a:solidFill>
+                  <a:schemeClr val="accent5"/>
+                </a:solidFill>
+                <a:latin typeface="+mn-lt"/>
+                <a:ea typeface="+mn-ea"/>
+                <a:cs typeface="+mn-cs"/>
+              </a:rPr>
+              <a:t>场景</a:t>
+            </a:r>
+          </a:p>
+        </p:txBody>
+      </p:sp>
+      <p:sp>
+        <p:nvSpPr>
+          <p:cNvPr id="4" name="page-route-1"/>
+          <p:cNvSpPr txBox="1"/>
+          <p:nvPr/>
+        </p:nvSpPr>
+        <p:spPr>
+          <a:xfrm>
+            <a:off x="8404479" y="289560"/>
+            <a:ext cx="335280" cy="234696"/>
+          </a:xfrm>
+          <a:prstGeom prst="rect">
+            <a:avLst/>
+          </a:prstGeom>
+          <a:noFill/>
+          <a:ln>
+            <a:noFill/>
+          </a:ln>
+        </p:spPr>
+        <p:txBody>
+          <a:bodyPr wrap="none" lIns="0" tIns="0" rIns="0" bIns="0" anchor="t" anchorCtr="0">
+            <a:spAutoFit/>
+          </a:bodyPr>
+          <a:lstStyle/>
+          <a:p>
+            <a:pPr algn="l"/>
+            <a:r>
+              <a:rPr lang="zh-CN" sz="1200" b="1" dirty="0">
+                <a:solidFill>
+                  <a:schemeClr val="accent1"/>
+                </a:solidFill>
+                <a:latin typeface="+mn-lt"/>
+                <a:ea typeface="+mn-ea"/>
+                <a:cs typeface="+mn-cs"/>
+              </a:rPr>
+              <a:t>系统</a:t>
+            </a:r>
+          </a:p>
+        </p:txBody>
+      </p:sp>
+      <p:sp>
+        <p:nvSpPr>
+          <p:cNvPr id="5" name="page-route-2"/>
+          <p:cNvSpPr txBox="1"/>
+          <p:nvPr/>
+        </p:nvSpPr>
+        <p:spPr>
+          <a:xfrm>
+            <a:off x="9290304" y="289560"/>
+            <a:ext cx="335280" cy="234696"/>
+          </a:xfrm>
+          <a:prstGeom prst="rect">
+            <a:avLst/>
+          </a:prstGeom>
+          <a:noFill/>
+          <a:ln>
+            <a:noFill/>
+          </a:ln>
+        </p:spPr>
+        <p:txBody>
+          <a:bodyPr wrap="none" lIns="0" tIns="0" rIns="0" bIns="0" anchor="t" anchorCtr="0">
+            <a:spAutoFit/>
+          </a:bodyPr>
+          <a:lstStyle/>
+          <a:p>
+            <a:pPr algn="l"/>
+            <a:r>
+              <a:rPr lang="zh-CN" sz="1200" dirty="0">
+                <a:solidFill>
+                  <a:schemeClr val="accent5"/>
+                </a:solidFill>
+                <a:latin typeface="+mn-lt"/>
+                <a:ea typeface="+mn-ea"/>
+                <a:cs typeface="+mn-cs"/>
+              </a:rPr>
+              <a:t>证据</a:t>
+            </a:r>
+          </a:p>
+        </p:txBody>
+      </p:sp>
+      <p:sp>
+        <p:nvSpPr>
+          <p:cNvPr id="6" name="page-route-3"/>
+          <p:cNvSpPr txBox="1"/>
+          <p:nvPr/>
+        </p:nvSpPr>
+        <p:spPr>
+          <a:xfrm>
+            <a:off x="10176129" y="289560"/>
+            <a:ext cx="335280" cy="234696"/>
+          </a:xfrm>
+          <a:prstGeom prst="rect">
+            <a:avLst/>
+          </a:prstGeom>
+          <a:noFill/>
+          <a:ln>
+            <a:noFill/>
+          </a:ln>
+        </p:spPr>
+        <p:txBody>
+          <a:bodyPr wrap="none" lIns="0" tIns="0" rIns="0" bIns="0" anchor="t" anchorCtr="0">
+            <a:spAutoFit/>
+          </a:bodyPr>
+          <a:lstStyle/>
+          <a:p>
+            <a:pPr algn="l"/>
+            <a:r>
+              <a:rPr lang="zh-CN" sz="1200" dirty="0">
+                <a:solidFill>
+                  <a:schemeClr val="accent5"/>
+                </a:solidFill>
+                <a:latin typeface="+mn-lt"/>
+                <a:ea typeface="+mn-ea"/>
+                <a:cs typeface="+mn-cs"/>
+              </a:rPr>
+              <a:t>实施</a:t>
             </a:r>
           </a:p>
         </p:txBody>
       </p:sp>
       <p:grpSp>
         <p:nvGrpSpPr>
-          <p:cNvPr id="4" name="page-title"/>
+          <p:cNvPr id="8" name="page-title"/>
           <p:cNvGrpSpPr/>
           <p:nvPr/>
         </p:nvGrpSpPr>
         <p:grpSpPr>
           <a:xfrm>
             <a:off x="441198" y="812483"/>
-            <a:ext cx="5544693" cy="616077"/>
+            <a:ext cx="5120640" cy="616077"/>
             <a:chOff x="441198" y="812483"/>
-            <a:chExt cx="5544693" cy="616077"/>
+            <a:chExt cx="5120640" cy="616077"/>
           </a:xfrm>
         </p:grpSpPr>
         <p:sp>
           <p:nvSpPr>
-            <p:cNvPr id="3" name="TextBox 3"/>
+            <p:cNvPr id="7" name="TextBox 7"/>
             <p:cNvSpPr txBox="1"/>
             <p:nvPr/>
           </p:nvSpPr>
           <p:spPr>
             <a:xfrm>
               <a:off x="441198" y="812483"/>
-              <a:ext cx="5544693" cy="616077"/>
+              <a:ext cx="5120640" cy="616077"/>
             </a:xfrm>
             <a:prstGeom prst="rect">
               <a:avLst/>
@@ -15074,7 +17818,7 @@
                   <a:ea typeface="+mj-ea"/>
                   <a:cs typeface="+mj-cs"/>
                 </a:rPr>
-                <a:t>由原始采集走向可追踪的系统</a:t>
+                <a:t>系统把故障证据交给管理者</a:t>
               </a:r>
             </a:p>
           </p:txBody>
@@ -15082,7 +17826,7 @@
       </p:grpSp>
       <p:sp>
         <p:nvSpPr>
-          <p:cNvPr id="5" name="Line 5"/>
+          <p:cNvPr id="9" name="Line 9"/>
           <p:cNvSpPr/>
           <p:nvPr/>
         </p:nvSpPr>
@@ -15118,7 +17862,7 @@
       </p:sp>
       <p:sp>
         <p:nvSpPr>
-          <p:cNvPr id="6" name="source-footer"/>
+          <p:cNvPr id="10" name="source-footer"/>
           <p:cNvSpPr txBox="1"/>
           <p:nvPr/>
         </p:nvSpPr>
@@ -15158,7 +17902,7 @@
       </p:sp>
       <p:sp>
         <p:nvSpPr>
-          <p:cNvPr id="7" name="page-number"/>
+          <p:cNvPr id="11" name="page-number"/>
           <p:cNvSpPr txBox="1"/>
           <p:nvPr/>
         </p:nvSpPr>
@@ -15198,7 +17942,7 @@
       </p:sp>
       <p:grpSp>
         <p:nvGrpSpPr>
-          <p:cNvPr id="26" name="system-chain"/>
+          <p:cNvPr id="30" name="system-chain"/>
           <p:cNvGrpSpPr/>
           <p:nvPr/>
         </p:nvGrpSpPr>
@@ -15212,7 +17956,7 @@
         </p:grpSpPr>
         <p:sp>
           <p:nvSpPr>
-            <p:cNvPr id="8" name="Rectangle 8"/>
+            <p:cNvPr id="12" name="Rectangle 12"/>
             <p:cNvSpPr/>
             <p:nvPr/>
           </p:nvSpPr>
@@ -15234,7 +17978,7 @@
         </p:sp>
         <p:sp>
           <p:nvSpPr>
-            <p:cNvPr id="9" name="TextBox 9"/>
+            <p:cNvPr id="13" name="TextBox 13"/>
             <p:cNvSpPr txBox="1"/>
             <p:nvPr/>
           </p:nvSpPr>
@@ -15274,14 +18018,14 @@
         </p:sp>
         <p:sp>
           <p:nvSpPr>
-            <p:cNvPr id="10" name="TextBox 10"/>
+            <p:cNvPr id="14" name="TextBox 14"/>
             <p:cNvSpPr txBox="1"/>
             <p:nvPr/>
           </p:nvSpPr>
           <p:spPr>
             <a:xfrm>
               <a:off x="638556" y="3034665"/>
-              <a:ext cx="1266215" cy="352044"/>
+              <a:ext cx="1362456" cy="352044"/>
             </a:xfrm>
             <a:prstGeom prst="rect">
               <a:avLst/>
@@ -15299,7 +18043,7 @@
             <a:p>
               <a:pPr algn="l"/>
               <a:r>
-                <a:rPr lang="zh-CN" sz="1800" dirty="0">
+                <a:rPr lang="en-US" sz="1800" dirty="0">
                   <a:solidFill>
                     <a:schemeClr val="dk1"/>
                   </a:solidFill>
@@ -15307,14 +18051,14 @@
                   <a:ea typeface="+mn-ea"/>
                   <a:cs typeface="+mn-cs"/>
                 </a:rPr>
-                <a:t>压力 / 流量</a:t>
+                <a:t>P0 / P1 / Q</a:t>
               </a:r>
             </a:p>
           </p:txBody>
         </p:sp>
         <p:sp>
           <p:nvSpPr>
-            <p:cNvPr id="11" name="Line 11"/>
+            <p:cNvPr id="15" name="Line 15"/>
             <p:cNvSpPr/>
             <p:nvPr/>
           </p:nvSpPr>
@@ -15350,7 +18094,7 @@
         </p:sp>
         <p:sp>
           <p:nvSpPr>
-            <p:cNvPr id="12" name="Rectangle 12"/>
+            <p:cNvPr id="16" name="Rectangle 16"/>
             <p:cNvSpPr/>
             <p:nvPr/>
           </p:nvSpPr>
@@ -15372,7 +18116,7 @@
         </p:sp>
         <p:sp>
           <p:nvSpPr>
-            <p:cNvPr id="13" name="TextBox 13"/>
+            <p:cNvPr id="17" name="TextBox 17"/>
             <p:cNvSpPr txBox="1"/>
             <p:nvPr/>
           </p:nvSpPr>
@@ -15412,14 +18156,14 @@
         </p:sp>
         <p:sp>
           <p:nvSpPr>
-            <p:cNvPr id="14" name="TextBox 14"/>
+            <p:cNvPr id="18" name="TextBox 18"/>
             <p:cNvSpPr txBox="1"/>
             <p:nvPr/>
           </p:nvSpPr>
           <p:spPr>
             <a:xfrm>
               <a:off x="3562731" y="3034665"/>
-              <a:ext cx="1266215" cy="352044"/>
+              <a:ext cx="1750847" cy="352044"/>
             </a:xfrm>
             <a:prstGeom prst="rect">
               <a:avLst/>
@@ -15445,14 +18189,14 @@
                   <a:ea typeface="+mn-ea"/>
                   <a:cs typeface="+mn-cs"/>
                 </a:rPr>
-                <a:t>检测 + 缓存</a:t>
+                <a:t>有限诊断 + 缓存</a:t>
               </a:r>
             </a:p>
           </p:txBody>
         </p:sp>
         <p:sp>
           <p:nvSpPr>
-            <p:cNvPr id="15" name="Line 15"/>
+            <p:cNvPr id="19" name="Line 19"/>
             <p:cNvSpPr/>
             <p:nvPr/>
           </p:nvSpPr>
@@ -15488,7 +18232,7 @@
         </p:sp>
         <p:sp>
           <p:nvSpPr>
-            <p:cNvPr id="16" name="Rectangle 16"/>
+            <p:cNvPr id="20" name="Rectangle 20"/>
             <p:cNvSpPr/>
             <p:nvPr/>
           </p:nvSpPr>
@@ -15510,7 +18254,7 @@
         </p:sp>
         <p:sp>
           <p:nvSpPr>
-            <p:cNvPr id="17" name="TextBox 17"/>
+            <p:cNvPr id="21" name="TextBox 21"/>
             <p:cNvSpPr txBox="1"/>
             <p:nvPr/>
           </p:nvSpPr>
@@ -15550,7 +18294,7 @@
         </p:sp>
         <p:sp>
           <p:nvSpPr>
-            <p:cNvPr id="18" name="TextBox 18"/>
+            <p:cNvPr id="22" name="TextBox 22"/>
             <p:cNvSpPr txBox="1"/>
             <p:nvPr/>
           </p:nvSpPr>
@@ -15590,7 +18334,7 @@
         </p:sp>
         <p:sp>
           <p:nvSpPr>
-            <p:cNvPr id="19" name="Line 19"/>
+            <p:cNvPr id="23" name="Line 23"/>
             <p:cNvSpPr/>
             <p:nvPr/>
           </p:nvSpPr>
@@ -15626,7 +18370,7 @@
         </p:sp>
         <p:sp>
           <p:nvSpPr>
-            <p:cNvPr id="20" name="Rectangle 20"/>
+            <p:cNvPr id="24" name="Rectangle 24"/>
             <p:cNvSpPr/>
             <p:nvPr/>
           </p:nvSpPr>
@@ -15648,7 +18392,7 @@
         </p:sp>
         <p:sp>
           <p:nvSpPr>
-            <p:cNvPr id="21" name="TextBox 21"/>
+            <p:cNvPr id="25" name="TextBox 25"/>
             <p:cNvSpPr txBox="1"/>
             <p:nvPr/>
           </p:nvSpPr>
@@ -15681,14 +18425,14 @@
                   <a:ea typeface="+mn-ea"/>
                   <a:cs typeface="+mn-cs"/>
                 </a:rPr>
-                <a:t>接收软件</a:t>
+                <a:t>管理软件</a:t>
               </a:r>
             </a:p>
           </p:txBody>
         </p:sp>
         <p:sp>
           <p:nvSpPr>
-            <p:cNvPr id="22" name="TextBox 22"/>
+            <p:cNvPr id="26" name="TextBox 26"/>
             <p:cNvSpPr txBox="1"/>
             <p:nvPr/>
           </p:nvSpPr>
@@ -15721,21 +18465,21 @@
                   <a:ea typeface="+mn-ea"/>
                   <a:cs typeface="+mn-cs"/>
                 </a:rPr>
-                <a:t>日志 + 回放</a:t>
+                <a:t>证据 + 确认</a:t>
               </a:r>
             </a:p>
           </p:txBody>
         </p:sp>
         <p:sp>
           <p:nvSpPr>
-            <p:cNvPr id="23" name="TextBox 23"/>
+            <p:cNvPr id="27" name="TextBox 27"/>
             <p:cNvSpPr txBox="1"/>
             <p:nvPr/>
           </p:nvSpPr>
           <p:spPr>
             <a:xfrm>
               <a:off x="448056" y="4196715"/>
-              <a:ext cx="6293815" cy="352044"/>
+              <a:ext cx="7045452" cy="352044"/>
             </a:xfrm>
             <a:prstGeom prst="rect">
               <a:avLst/>
@@ -15761,21 +18505,21 @@
                   <a:ea typeface="+mn-ea"/>
                   <a:cs typeface="+mn-cs"/>
                 </a:rPr>
-                <a:t>记录字段：启动会话、序号、时间、测量、状态、事件ID。</a:t>
+                <a:t>管理功能：设备档案、支管示意、趋势、事件确认、回放、导出。</a:t>
               </a:r>
             </a:p>
           </p:txBody>
         </p:sp>
         <p:sp>
           <p:nvSpPr>
-            <p:cNvPr id="24" name="TextBox 24"/>
+            <p:cNvPr id="28" name="TextBox 28"/>
             <p:cNvSpPr txBox="1"/>
             <p:nvPr/>
           </p:nvSpPr>
           <p:spPr>
             <a:xfrm>
               <a:off x="448056" y="4739640"/>
-              <a:ext cx="6318504" cy="352044"/>
+              <a:ext cx="5942914" cy="352044"/>
             </a:xfrm>
             <a:prstGeom prst="rect">
               <a:avLst/>
@@ -15801,21 +18545,21 @@
                   <a:ea typeface="+mn-ea"/>
                   <a:cs typeface="+mn-cs"/>
                 </a:rPr>
-                <a:t>工程检查：超时、去重、掉电恢复、缓存溢出与断链恢复。</a:t>
+                <a:t>分别显示：故障模式 / 待检查 / 数据无效 / 节点离线。</a:t>
               </a:r>
             </a:p>
           </p:txBody>
         </p:sp>
         <p:sp>
           <p:nvSpPr>
-            <p:cNvPr id="25" name="TextBox 25"/>
+            <p:cNvPr id="29" name="TextBox 29"/>
             <p:cNvSpPr txBox="1"/>
             <p:nvPr/>
           </p:nvSpPr>
           <p:spPr>
             <a:xfrm>
               <a:off x="446532" y="5412105"/>
-              <a:ext cx="6608293" cy="410718"/>
+              <a:ext cx="7654290" cy="410718"/>
             </a:xfrm>
             <a:prstGeom prst="rect">
               <a:avLst/>
@@ -15841,7 +18585,7 @@
                   <a:ea typeface="+mn-ea"/>
                   <a:cs typeface="+mn-cs"/>
                 </a:rPr>
-                <a:t>先有线数据 → 再可靠无线 → 再有许可的现场适应性。</a:t>
+                <a:t>当前网站：设计及合成回放；接收日志与状态持久化拟实现。</a:t>
               </a:r>
             </a:p>
           </p:txBody>
